--- a/proptech-deck/Conforme_Pitch.pptx
+++ b/proptech-deck/Conforme_Pitch.pptx
@@ -5709,7 +5709,7 @@
                 <a:ea typeface="Cambria" pitchFamily="34" charset="-122"/>
                 <a:cs typeface="Cambria" pitchFamily="34" charset="-120"/>
               </a:rPr>
-              <a:t>~75%</a:t>
+              <a:t>~720.000</a:t>
             </a:r>
             <a:endParaRPr lang="en-US" sz="4400" dirty="0"/>
           </a:p>
@@ -5748,7 +5748,7 @@
                 <a:ea typeface="Calibri" pitchFamily="34" charset="-122"/>
                 <a:cs typeface="Calibri" pitchFamily="34" charset="-120"/>
               </a:rPr>
-              <a:t>tra i più alti tassi di proprietà della casa in Europa: un patrimonio enorme e frammentato</a:t>
+              <a:t>compravendite residenziali all'anno in Italia (OMI 2024)</a:t>
             </a:r>
             <a:endParaRPr lang="en-US" sz="1400" dirty="0"/>
           </a:p>
@@ -5919,7 +5919,7 @@
                 <a:ea typeface="Cambria" pitchFamily="34" charset="-122"/>
                 <a:cs typeface="Cambria" pitchFamily="34" charset="-120"/>
               </a:rPr>
-              <a:t>~€100 mld+</a:t>
+              <a:t>~€120 mld</a:t>
             </a:r>
             <a:endParaRPr lang="en-US" sz="4400" dirty="0"/>
           </a:p>
@@ -5958,7 +5958,7 @@
                 <a:ea typeface="Calibri" pitchFamily="34" charset="-122"/>
                 <a:cs typeface="Calibri" pitchFamily="34" charset="-120"/>
               </a:rPr>
-              <a:t>volume annuo delle compravendite residenziali (ordine di grandezza)</a:t>
+              <a:t>transato residenziale all'anno (ordine di grandezza)</a:t>
             </a:r>
             <a:endParaRPr lang="en-US" sz="1400" dirty="0"/>
           </a:p>
@@ -6012,7 +6012,7 @@
         <p:spPr>
           <a:xfrm>
             <a:off x="502920" y="5989320"/>
-            <a:ext cx="7315200" cy="274320"/>
+            <a:ext cx="10058400" cy="274320"/>
           </a:xfrm>
           <a:prstGeom prst="rect">
             <a:avLst/>
@@ -6036,7 +6036,7 @@
                 <a:ea typeface="Calibri" pitchFamily="34" charset="-122"/>
                 <a:cs typeface="Calibri" pitchFamily="34" charset="-120"/>
               </a:rPr>
-              <a:t>Cifre a livello di mercato, indicative / ordine di grandezza.</a:t>
+              <a:t>Fonte compravendite: OMI — Agenzia delle Entrate, Rapporto Immobiliare 2025. Transato: stima / ordine di grandezza.</a:t>
             </a:r>
             <a:endParaRPr lang="en-US" sz="1000" dirty="0"/>
           </a:p>
@@ -9090,7 +9090,7 @@
         </p:nvSpPr>
         <p:spPr>
           <a:xfrm>
-            <a:off x="548640" y="502920"/>
+            <a:off x="548640" y="457200"/>
             <a:ext cx="5486400" cy="274320"/>
           </a:xfrm>
           <a:prstGeom prst="rect">
@@ -9129,8 +9129,8 @@
         </p:nvSpPr>
         <p:spPr>
           <a:xfrm>
-            <a:off x="502920" y="822960"/>
-            <a:ext cx="11155680" cy="731520"/>
+            <a:off x="502920" y="749808"/>
+            <a:ext cx="11155680" cy="548640"/>
           </a:xfrm>
           <a:prstGeom prst="rect">
             <a:avLst/>
@@ -9146,7 +9146,7 @@
               <a:buNone/>
             </a:pPr>
             <a:r>
-              <a:rPr lang="en-US" sz="2600" b="1" dirty="0">
+              <a:rPr lang="en-US" sz="2700" b="1" dirty="0">
                 <a:solidFill>
                   <a:srgbClr val="16233B"/>
                 </a:solidFill>
@@ -9154,26 +9154,65 @@
                 <a:ea typeface="Cambria" pitchFamily="34" charset="-122"/>
                 <a:cs typeface="Cambria" pitchFamily="34" charset="-120"/>
               </a:rPr>
-              <a:t>Un mercato enorme, con un punto d'ingresso stretto e monetizzabile subito</a:t>
-            </a:r>
-            <a:endParaRPr lang="en-US" sz="2600" dirty="0"/>
-          </a:p>
-        </p:txBody>
-      </p:sp>
-      <p:sp>
-        <p:nvSpPr>
-          <p:cNvPr id="4" name="Shape 2"/>
-          <p:cNvSpPr/>
-          <p:nvPr/>
-        </p:nvSpPr>
-        <p:spPr>
-          <a:xfrm>
-            <a:off x="502920" y="2148840"/>
-            <a:ext cx="5120640" cy="1143000"/>
+              <a:t>Il mercato target supera il miliardo — di molto</a:t>
+            </a:r>
+            <a:endParaRPr lang="en-US" sz="2700" dirty="0"/>
+          </a:p>
+        </p:txBody>
+      </p:sp>
+      <p:sp>
+        <p:nvSpPr>
+          <p:cNvPr id="4" name="Text 2"/>
+          <p:cNvSpPr/>
+          <p:nvPr/>
+        </p:nvSpPr>
+        <p:spPr>
+          <a:xfrm>
+            <a:off x="502920" y="1298448"/>
+            <a:ext cx="11155680" cy="502920"/>
+          </a:xfrm>
+          <a:prstGeom prst="rect">
+            <a:avLst/>
+          </a:prstGeom>
+          <a:noFill/>
+          <a:ln/>
+        </p:spPr>
+        <p:txBody>
+          <a:bodyPr wrap="square" lIns="0" tIns="0" rIns="0" bIns="0" rtlCol="0" anchor="ctr"/>
+          <a:lstStyle/>
+          <a:p>
+            <a:pPr indent="0" marL="0">
+              <a:buNone/>
+            </a:pPr>
+            <a:r>
+              <a:rPr lang="en-US" sz="1450" dirty="0">
+                <a:solidFill>
+                  <a:srgbClr val="5C6C87"/>
+                </a:solidFill>
+                <a:latin typeface="Calibri" pitchFamily="34" charset="0"/>
+                <a:ea typeface="Calibri" pitchFamily="34" charset="-122"/>
+                <a:cs typeface="Calibri" pitchFamily="34" charset="-120"/>
+              </a:rPr>
+              <a:t>La sola due diligence tecnico-legale vale ~€1 mld/anno. Con i servizi alla transazione e l'ondata Case Green, il target è multi-miliardo.</a:t>
+            </a:r>
+            <a:endParaRPr lang="en-US" sz="1450" dirty="0"/>
+          </a:p>
+        </p:txBody>
+      </p:sp>
+      <p:sp>
+        <p:nvSpPr>
+          <p:cNvPr id="5" name="Shape 3"/>
+          <p:cNvSpPr/>
+          <p:nvPr/>
+        </p:nvSpPr>
+        <p:spPr>
+          <a:xfrm>
+            <a:off x="502920" y="1965960"/>
+            <a:ext cx="7863840" cy="1188720"/>
           </a:xfrm>
           <a:prstGeom prst="roundRect">
             <a:avLst>
-              <a:gd name="adj" fmla="val 7200"/>
+              <a:gd name="adj" fmla="val 6923"/>
             </a:avLst>
           </a:prstGeom>
           <a:solidFill>
@@ -9184,14 +9223,14 @@
       </p:sp>
       <p:sp>
         <p:nvSpPr>
-          <p:cNvPr id="5" name="Text 3"/>
-          <p:cNvSpPr/>
-          <p:nvPr/>
-        </p:nvSpPr>
-        <p:spPr>
-          <a:xfrm>
-            <a:off x="731520" y="2313432"/>
-            <a:ext cx="1463040" cy="822960"/>
+          <p:cNvPr id="6" name="Text 4"/>
+          <p:cNvSpPr/>
+          <p:nvPr/>
+        </p:nvSpPr>
+        <p:spPr>
+          <a:xfrm>
+            <a:off x="731520" y="2103120"/>
+            <a:ext cx="1371600" cy="914400"/>
           </a:xfrm>
           <a:prstGeom prst="rect">
             <a:avLst/>
@@ -9223,14 +9262,14 @@
       </p:sp>
       <p:sp>
         <p:nvSpPr>
-          <p:cNvPr id="6" name="Text 4"/>
-          <p:cNvSpPr/>
-          <p:nvPr/>
-        </p:nvSpPr>
-        <p:spPr>
-          <a:xfrm>
-            <a:off x="2103120" y="2331720"/>
-            <a:ext cx="3566160" cy="457200"/>
+          <p:cNvPr id="7" name="Text 5"/>
+          <p:cNvSpPr/>
+          <p:nvPr/>
+        </p:nvSpPr>
+        <p:spPr>
+          <a:xfrm>
+            <a:off x="2057400" y="2167128"/>
+            <a:ext cx="6355080" cy="457200"/>
           </a:xfrm>
           <a:prstGeom prst="rect">
             <a:avLst/>
@@ -9246,7 +9285,7 @@
               <a:buNone/>
             </a:pPr>
             <a:r>
-              <a:rPr lang="en-US" sz="1600" b="1" dirty="0">
+              <a:rPr lang="en-US" sz="1700" b="1" dirty="0">
                 <a:solidFill>
                   <a:srgbClr val="FFFFFF"/>
                 </a:solidFill>
@@ -9254,22 +9293,22 @@
                 <a:ea typeface="Cambria" pitchFamily="34" charset="-122"/>
                 <a:cs typeface="Cambria" pitchFamily="34" charset="-120"/>
               </a:rPr>
-              <a:t>~€100 mld+ transato/anno</a:t>
-            </a:r>
-            <a:endParaRPr lang="en-US" sz="1600" dirty="0"/>
-          </a:p>
-        </p:txBody>
-      </p:sp>
-      <p:sp>
-        <p:nvSpPr>
-          <p:cNvPr id="7" name="Text 5"/>
-          <p:cNvSpPr/>
-          <p:nvPr/>
-        </p:nvSpPr>
-        <p:spPr>
-          <a:xfrm>
-            <a:off x="2103120" y="2770632"/>
-            <a:ext cx="4114800" cy="457200"/>
+              <a:t>~€120 mld transato residenziale/anno + €280 mld di giro d'affari Case Green potenziale</a:t>
+            </a:r>
+            <a:endParaRPr lang="en-US" sz="1700" dirty="0"/>
+          </a:p>
+        </p:txBody>
+      </p:sp>
+      <p:sp>
+        <p:nvSpPr>
+          <p:cNvPr id="8" name="Text 6"/>
+          <p:cNvSpPr/>
+          <p:nvPr/>
+        </p:nvSpPr>
+        <p:spPr>
+          <a:xfrm>
+            <a:off x="2057400" y="2624328"/>
+            <a:ext cx="6355080" cy="457200"/>
           </a:xfrm>
           <a:prstGeom prst="rect">
             <a:avLst/>
@@ -9287,13 +9326,13 @@
             <a:r>
               <a:rPr lang="en-US" sz="1250" dirty="0">
                 <a:solidFill>
-                  <a:srgbClr val="FFFFFF"/>
+                  <a:srgbClr val="EAF1FA"/>
                 </a:solidFill>
                 <a:latin typeface="Calibri" pitchFamily="34" charset="0"/>
                 <a:ea typeface="Calibri" pitchFamily="34" charset="-122"/>
                 <a:cs typeface="Calibri" pitchFamily="34" charset="-120"/>
               </a:rPr>
-              <a:t>Mercato immobiliare &amp; servizi collegati in Italia</a:t>
+              <a:t>Mercato immobiliare &amp; riqualificazione in Italia</a:t>
             </a:r>
             <a:endParaRPr lang="en-US" sz="1250" dirty="0"/>
           </a:p>
@@ -9301,18 +9340,18 @@
       </p:sp>
       <p:sp>
         <p:nvSpPr>
-          <p:cNvPr id="8" name="Shape 6"/>
-          <p:cNvSpPr/>
-          <p:nvPr/>
-        </p:nvSpPr>
-        <p:spPr>
-          <a:xfrm>
-            <a:off x="502920" y="3474720"/>
-            <a:ext cx="3840480" cy="1143000"/>
+          <p:cNvPr id="9" name="Shape 7"/>
+          <p:cNvSpPr/>
+          <p:nvPr/>
+        </p:nvSpPr>
+        <p:spPr>
+          <a:xfrm>
+            <a:off x="502920" y="3337560"/>
+            <a:ext cx="6035040" cy="1188720"/>
           </a:xfrm>
           <a:prstGeom prst="roundRect">
             <a:avLst>
-              <a:gd name="adj" fmla="val 7200"/>
+              <a:gd name="adj" fmla="val 6923"/>
             </a:avLst>
           </a:prstGeom>
           <a:solidFill>
@@ -9323,14 +9362,14 @@
       </p:sp>
       <p:sp>
         <p:nvSpPr>
-          <p:cNvPr id="9" name="Text 7"/>
-          <p:cNvSpPr/>
-          <p:nvPr/>
-        </p:nvSpPr>
-        <p:spPr>
-          <a:xfrm>
-            <a:off x="731520" y="3639312"/>
-            <a:ext cx="1463040" cy="822960"/>
+          <p:cNvPr id="10" name="Text 8"/>
+          <p:cNvSpPr/>
+          <p:nvPr/>
+        </p:nvSpPr>
+        <p:spPr>
+          <a:xfrm>
+            <a:off x="731520" y="3474720"/>
+            <a:ext cx="1371600" cy="914400"/>
           </a:xfrm>
           <a:prstGeom prst="rect">
             <a:avLst/>
@@ -9362,14 +9401,14 @@
       </p:sp>
       <p:sp>
         <p:nvSpPr>
-          <p:cNvPr id="10" name="Text 8"/>
-          <p:cNvSpPr/>
-          <p:nvPr/>
-        </p:nvSpPr>
-        <p:spPr>
-          <a:xfrm>
-            <a:off x="2103120" y="3657600"/>
-            <a:ext cx="2286000" cy="457200"/>
+          <p:cNvPr id="11" name="Text 9"/>
+          <p:cNvSpPr/>
+          <p:nvPr/>
+        </p:nvSpPr>
+        <p:spPr>
+          <a:xfrm>
+            <a:off x="2057400" y="3538728"/>
+            <a:ext cx="4526280" cy="457200"/>
           </a:xfrm>
           <a:prstGeom prst="rect">
             <a:avLst/>
@@ -9385,7 +9424,7 @@
               <a:buNone/>
             </a:pPr>
             <a:r>
-              <a:rPr lang="en-US" sz="1600" b="1" dirty="0">
+              <a:rPr lang="en-US" sz="1700" b="1" dirty="0">
                 <a:solidFill>
                   <a:srgbClr val="FFFFFF"/>
                 </a:solidFill>
@@ -9393,22 +9432,22 @@
                 <a:ea typeface="Cambria" pitchFamily="34" charset="-122"/>
                 <a:cs typeface="Cambria" pitchFamily="34" charset="-120"/>
               </a:rPr>
-              <a:t>Miliardi di € di spesa annua</a:t>
-            </a:r>
-            <a:endParaRPr lang="en-US" sz="1600" dirty="0"/>
-          </a:p>
-        </p:txBody>
-      </p:sp>
-      <p:sp>
-        <p:nvSpPr>
-          <p:cNvPr id="11" name="Text 9"/>
-          <p:cNvSpPr/>
-          <p:nvPr/>
-        </p:nvSpPr>
-        <p:spPr>
-          <a:xfrm>
-            <a:off x="2103120" y="4096512"/>
-            <a:ext cx="4114800" cy="457200"/>
+              <a:t>Multi-miliardo € / anno</a:t>
+            </a:r>
+            <a:endParaRPr lang="en-US" sz="1700" dirty="0"/>
+          </a:p>
+        </p:txBody>
+      </p:sp>
+      <p:sp>
+        <p:nvSpPr>
+          <p:cNvPr id="12" name="Text 10"/>
+          <p:cNvSpPr/>
+          <p:nvPr/>
+        </p:nvSpPr>
+        <p:spPr>
+          <a:xfrm>
+            <a:off x="2057400" y="3995928"/>
+            <a:ext cx="4526280" cy="457200"/>
           </a:xfrm>
           <a:prstGeom prst="rect">
             <a:avLst/>
@@ -9426,13 +9465,13 @@
             <a:r>
               <a:rPr lang="en-US" sz="1250" dirty="0">
                 <a:solidFill>
-                  <a:srgbClr val="FFFFFF"/>
+                  <a:srgbClr val="F6E4DE"/>
                 </a:solidFill>
                 <a:latin typeface="Calibri" pitchFamily="34" charset="0"/>
                 <a:ea typeface="Calibri" pitchFamily="34" charset="-122"/>
                 <a:cs typeface="Calibri" pitchFamily="34" charset="-120"/>
               </a:rPr>
-              <a:t>Due diligence, valutazione e servizi di transazione</a:t>
+              <a:t>Servizi tecnico-legali, valutazione e intelligence energetica digitalizzabili</a:t>
             </a:r>
             <a:endParaRPr lang="en-US" sz="1250" dirty="0"/>
           </a:p>
@@ -9440,18 +9479,18 @@
       </p:sp>
       <p:sp>
         <p:nvSpPr>
-          <p:cNvPr id="12" name="Shape 10"/>
-          <p:cNvSpPr/>
-          <p:nvPr/>
-        </p:nvSpPr>
-        <p:spPr>
-          <a:xfrm>
-            <a:off x="502920" y="4800600"/>
-            <a:ext cx="2560320" cy="1143000"/>
+          <p:cNvPr id="13" name="Shape 11"/>
+          <p:cNvSpPr/>
+          <p:nvPr/>
+        </p:nvSpPr>
+        <p:spPr>
+          <a:xfrm>
+            <a:off x="502920" y="4709160"/>
+            <a:ext cx="4206240" cy="1188720"/>
           </a:xfrm>
           <a:prstGeom prst="roundRect">
             <a:avLst>
-              <a:gd name="adj" fmla="val 7200"/>
+              <a:gd name="adj" fmla="val 6923"/>
             </a:avLst>
           </a:prstGeom>
           <a:solidFill>
@@ -9462,14 +9501,14 @@
       </p:sp>
       <p:sp>
         <p:nvSpPr>
-          <p:cNvPr id="13" name="Text 11"/>
-          <p:cNvSpPr/>
-          <p:nvPr/>
-        </p:nvSpPr>
-        <p:spPr>
-          <a:xfrm>
-            <a:off x="731520" y="4965192"/>
-            <a:ext cx="1463040" cy="822960"/>
+          <p:cNvPr id="14" name="Text 12"/>
+          <p:cNvSpPr/>
+          <p:nvPr/>
+        </p:nvSpPr>
+        <p:spPr>
+          <a:xfrm>
+            <a:off x="731520" y="4846320"/>
+            <a:ext cx="1371600" cy="914400"/>
           </a:xfrm>
           <a:prstGeom prst="rect">
             <a:avLst/>
@@ -9501,14 +9540,14 @@
       </p:sp>
       <p:sp>
         <p:nvSpPr>
-          <p:cNvPr id="14" name="Text 12"/>
-          <p:cNvSpPr/>
-          <p:nvPr/>
-        </p:nvSpPr>
-        <p:spPr>
-          <a:xfrm>
-            <a:off x="2103120" y="4983480"/>
-            <a:ext cx="1005840" cy="457200"/>
+          <p:cNvPr id="15" name="Text 13"/>
+          <p:cNvSpPr/>
+          <p:nvPr/>
+        </p:nvSpPr>
+        <p:spPr>
+          <a:xfrm>
+            <a:off x="2057400" y="4910328"/>
+            <a:ext cx="2697480" cy="457200"/>
           </a:xfrm>
           <a:prstGeom prst="rect">
             <a:avLst/>
@@ -9524,7 +9563,7 @@
               <a:buNone/>
             </a:pPr>
             <a:r>
-              <a:rPr lang="en-US" sz="1600" b="1" dirty="0">
+              <a:rPr lang="en-US" sz="1700" b="1" dirty="0">
                 <a:solidFill>
                   <a:srgbClr val="0E1E38"/>
                 </a:solidFill>
@@ -9532,22 +9571,22 @@
                 <a:ea typeface="Cambria" pitchFamily="34" charset="-122"/>
                 <a:cs typeface="Cambria" pitchFamily="34" charset="-120"/>
               </a:rPr>
-              <a:t>Centinaia di mln raggiungibili</a:t>
-            </a:r>
-            <a:endParaRPr lang="en-US" sz="1600" dirty="0"/>
-          </a:p>
-        </p:txBody>
-      </p:sp>
-      <p:sp>
-        <p:nvSpPr>
-          <p:cNvPr id="15" name="Text 13"/>
-          <p:cNvSpPr/>
-          <p:nvPr/>
-        </p:nvSpPr>
-        <p:spPr>
-          <a:xfrm>
-            <a:off x="2103120" y="5422392"/>
-            <a:ext cx="4114800" cy="457200"/>
+              <a:t>Centinaia di mln (beachhead 0–3 anni)</a:t>
+            </a:r>
+            <a:endParaRPr lang="en-US" sz="1700" dirty="0"/>
+          </a:p>
+        </p:txBody>
+      </p:sp>
+      <p:sp>
+        <p:nvSpPr>
+          <p:cNvPr id="16" name="Text 14"/>
+          <p:cNvSpPr/>
+          <p:nvPr/>
+        </p:nvSpPr>
+        <p:spPr>
+          <a:xfrm>
+            <a:off x="2057400" y="5367528"/>
+            <a:ext cx="2697480" cy="457200"/>
           </a:xfrm>
           <a:prstGeom prst="rect">
             <a:avLst/>
@@ -9565,13 +9604,13 @@
             <a:r>
               <a:rPr lang="en-US" sz="1250" dirty="0">
                 <a:solidFill>
-                  <a:srgbClr val="0E1E38"/>
+                  <a:srgbClr val="5A4212"/>
                 </a:solidFill>
                 <a:latin typeface="Calibri" pitchFamily="34" charset="0"/>
                 <a:ea typeface="Calibri" pitchFamily="34" charset="-122"/>
                 <a:cs typeface="Calibri" pitchFamily="34" charset="-120"/>
               </a:rPr>
-              <a:t>Target iniziale: DD B2B per reti, notai, banche, fondi</a:t>
+              <a:t>Due diligence B2B su ~720k transazioni/anno: reti, notai, banche, fondi</a:t>
             </a:r>
             <a:endParaRPr lang="en-US" sz="1250" dirty="0"/>
           </a:p>
@@ -9579,26 +9618,26 @@
       </p:sp>
       <p:sp>
         <p:nvSpPr>
-          <p:cNvPr id="16" name="Shape 14"/>
-          <p:cNvSpPr/>
-          <p:nvPr/>
-        </p:nvSpPr>
-        <p:spPr>
-          <a:xfrm>
-            <a:off x="8732520" y="2148840"/>
-            <a:ext cx="2926080" cy="3703320"/>
+          <p:cNvPr id="17" name="Shape 15"/>
+          <p:cNvSpPr/>
+          <p:nvPr/>
+        </p:nvSpPr>
+        <p:spPr>
+          <a:xfrm>
+            <a:off x="8549640" y="1965960"/>
+            <a:ext cx="3108960" cy="3931920"/>
           </a:xfrm>
           <a:prstGeom prst="roundRect">
             <a:avLst>
-              <a:gd name="adj" fmla="val 2813"/>
+              <a:gd name="adj" fmla="val 2647"/>
             </a:avLst>
           </a:prstGeom>
           <a:solidFill>
-            <a:srgbClr val="F4F7FC"/>
+            <a:srgbClr val="0E1E38"/>
           </a:solidFill>
           <a:ln w="12700">
             <a:solidFill>
-              <a:srgbClr val="D9E2EF"/>
+              <a:srgbClr val="0E1E38"/>
             </a:solidFill>
             <a:prstDash val="solid"/>
           </a:ln>
@@ -9606,14 +9645,14 @@
       </p:sp>
       <p:sp>
         <p:nvSpPr>
-          <p:cNvPr id="17" name="Text 15"/>
-          <p:cNvSpPr/>
-          <p:nvPr/>
-        </p:nvSpPr>
-        <p:spPr>
-          <a:xfrm>
-            <a:off x="8961120" y="2331720"/>
-            <a:ext cx="2514600" cy="365760"/>
+          <p:cNvPr id="18" name="Text 16"/>
+          <p:cNvSpPr/>
+          <p:nvPr/>
+        </p:nvSpPr>
+        <p:spPr>
+          <a:xfrm>
+            <a:off x="8778240" y="2148840"/>
+            <a:ext cx="2697480" cy="640080"/>
           </a:xfrm>
           <a:prstGeom prst="rect">
             <a:avLst/>
@@ -9629,201 +9668,265 @@
               <a:buNone/>
             </a:pPr>
             <a:r>
-              <a:rPr lang="en-US" sz="1500" b="1" dirty="0">
-                <a:solidFill>
-                  <a:srgbClr val="16233B"/>
+              <a:rPr lang="en-US" sz="1400" b="1" dirty="0">
+                <a:solidFill>
+                  <a:srgbClr val="E8A33D"/>
                 </a:solidFill>
                 <a:latin typeface="Cambria" pitchFamily="34" charset="0"/>
                 <a:ea typeface="Cambria" pitchFamily="34" charset="-122"/>
                 <a:cs typeface="Cambria" pitchFamily="34" charset="-120"/>
               </a:rPr>
-              <a:t>Perché si vince dal SOM</a:t>
-            </a:r>
-            <a:endParaRPr lang="en-US" sz="1500" dirty="0"/>
-          </a:p>
-        </p:txBody>
-      </p:sp>
-      <p:sp>
-        <p:nvSpPr>
-          <p:cNvPr id="18" name="Text 16"/>
-          <p:cNvSpPr/>
-          <p:nvPr/>
-        </p:nvSpPr>
-        <p:spPr>
-          <a:xfrm>
-            <a:off x="9006840" y="2788920"/>
-            <a:ext cx="2468880" cy="2926080"/>
-          </a:xfrm>
-          <a:prstGeom prst="rect">
-            <a:avLst/>
-          </a:prstGeom>
-          <a:noFill/>
-          <a:ln/>
-        </p:spPr>
-        <p:txBody>
-          <a:bodyPr wrap="square" lIns="0" tIns="0" rIns="0" bIns="0" rtlCol="0" anchor="ctr"/>
-          <a:lstStyle/>
-          <a:p>
-            <a:pPr marL="342900" indent="-342900">
+              <a:t>I numeri che reggono la tesi</a:t>
+            </a:r>
+            <a:endParaRPr lang="en-US" sz="1400" dirty="0"/>
+          </a:p>
+        </p:txBody>
+      </p:sp>
+      <p:sp>
+        <p:nvSpPr>
+          <p:cNvPr id="19" name="Text 17"/>
+          <p:cNvSpPr/>
+          <p:nvPr/>
+        </p:nvSpPr>
+        <p:spPr>
+          <a:xfrm>
+            <a:off x="8778240" y="2880360"/>
+            <a:ext cx="2697480" cy="2926080"/>
+          </a:xfrm>
+          <a:prstGeom prst="rect">
+            <a:avLst/>
+          </a:prstGeom>
+          <a:noFill/>
+          <a:ln/>
+        </p:spPr>
+        <p:txBody>
+          <a:bodyPr wrap="square" lIns="0" tIns="0" rIns="0" bIns="0" rtlCol="0" anchor="ctr"/>
+          <a:lstStyle/>
+          <a:p>
+            <a:pPr indent="0" marL="0">
               <a:spcAft>
-                <a:spcPts val="1000"/>
+                <a:spcPts val="1100"/>
               </a:spcAft>
-              <a:buSzPct val="100000"/>
-              <a:buChar char="•"/>
-            </a:pPr>
-            <a:r>
-              <a:rPr lang="en-US" sz="1300" dirty="0">
-                <a:solidFill>
-                  <a:srgbClr val="5C6C87"/>
+              <a:buNone/>
+            </a:pPr>
+            <a:r>
+              <a:rPr lang="en-US" sz="1250" b="1" dirty="0">
+                <a:solidFill>
+                  <a:srgbClr val="FFFFFF"/>
                 </a:solidFill>
                 <a:latin typeface="Calibri" pitchFamily="34" charset="0"/>
                 <a:ea typeface="Calibri" pitchFamily="34" charset="-122"/>
                 <a:cs typeface="Calibri" pitchFamily="34" charset="-120"/>
               </a:rPr>
-              <a:t>Domanda già esistente e pagante
-</a:t>
-            </a:r>
-            <a:endParaRPr lang="en-US" sz="1300" dirty="0"/>
-          </a:p>
-          <a:p>
-            <a:pPr marL="342900" indent="-342900">
+              <a:t>719.578 </a:t>
+            </a:r>
+            <a:pPr indent="0" marL="0">
               <a:spcAft>
-                <a:spcPts val="1000"/>
+                <a:spcPts val="1100"/>
               </a:spcAft>
-              <a:buSzPct val="100000"/>
-              <a:buChar char="•"/>
-            </a:pPr>
-            <a:r>
-              <a:rPr lang="en-US" sz="1300" dirty="0">
-                <a:solidFill>
-                  <a:srgbClr val="5C6C87"/>
+              <a:buNone/>
+            </a:pPr>
+            <a:r>
+              <a:rPr lang="en-US" sz="1250" dirty="0">
+                <a:solidFill>
+                  <a:srgbClr val="EAF1FA"/>
                 </a:solidFill>
                 <a:latin typeface="Calibri" pitchFamily="34" charset="0"/>
                 <a:ea typeface="Calibri" pitchFamily="34" charset="-122"/>
                 <a:cs typeface="Calibri" pitchFamily="34" charset="-120"/>
               </a:rPr>
-              <a:t>Ciclo di vendita B2B veloce
+              <a:t>compravendite residenziali (2024)
 </a:t>
             </a:r>
-            <a:endParaRPr lang="en-US" sz="1300" dirty="0"/>
-          </a:p>
-          <a:p>
-            <a:pPr marL="342900" indent="-342900">
+            <a:endParaRPr lang="en-US" sz="1250" dirty="0"/>
+          </a:p>
+          <a:p>
+            <a:pPr indent="0" marL="0">
               <a:spcAft>
-                <a:spcPts val="1000"/>
+                <a:spcPts val="1100"/>
               </a:spcAft>
-              <a:buSzPct val="100000"/>
-              <a:buChar char="•"/>
-            </a:pPr>
-            <a:r>
-              <a:rPr lang="en-US" sz="1300" dirty="0">
-                <a:solidFill>
-                  <a:srgbClr val="5C6C87"/>
+              <a:buNone/>
+            </a:pPr>
+            <a:r>
+              <a:rPr lang="en-US" sz="1250" b="1" dirty="0">
+                <a:solidFill>
+                  <a:srgbClr val="FFFFFF"/>
                 </a:solidFill>
                 <a:latin typeface="Calibri" pitchFamily="34" charset="0"/>
                 <a:ea typeface="Calibri" pitchFamily="34" charset="-122"/>
                 <a:cs typeface="Calibri" pitchFamily="34" charset="-120"/>
               </a:rPr>
-              <a:t>Ogni pratica costruisce il data-moat
-</a:t>
-            </a:r>
-            <a:endParaRPr lang="en-US" sz="1300" dirty="0"/>
-          </a:p>
-          <a:p>
-            <a:pPr marL="342900" indent="-342900">
+              <a:t>€2,8 mld </a:t>
+            </a:r>
+            <a:pPr indent="0" marL="0">
               <a:spcAft>
-                <a:spcPts val="1000"/>
+                <a:spcPts val="1100"/>
               </a:spcAft>
-              <a:buSzPct val="100000"/>
-              <a:buChar char="•"/>
-            </a:pPr>
-            <a:r>
-              <a:rPr lang="en-US" sz="1300" dirty="0">
-                <a:solidFill>
-                  <a:srgbClr val="5C6C87"/>
+              <a:buNone/>
+            </a:pPr>
+            <a:r>
+              <a:rPr lang="en-US" sz="1250" dirty="0">
+                <a:solidFill>
+                  <a:srgbClr val="EAF1FA"/>
                 </a:solidFill>
                 <a:latin typeface="Calibri" pitchFamily="34" charset="0"/>
                 <a:ea typeface="Calibri" pitchFamily="34" charset="-122"/>
                 <a:cs typeface="Calibri" pitchFamily="34" charset="-120"/>
               </a:rPr>
-              <a:t>Da lì si espande a 360°</a:t>
-            </a:r>
-            <a:endParaRPr lang="en-US" sz="1300" dirty="0"/>
-          </a:p>
-        </p:txBody>
-      </p:sp>
-      <p:sp>
-        <p:nvSpPr>
-          <p:cNvPr id="19" name="Text 17"/>
-          <p:cNvSpPr/>
-          <p:nvPr/>
-        </p:nvSpPr>
-        <p:spPr>
-          <a:xfrm>
-            <a:off x="502920" y="6035040"/>
-            <a:ext cx="7772400" cy="274320"/>
-          </a:xfrm>
-          <a:prstGeom prst="rect">
-            <a:avLst/>
-          </a:prstGeom>
-          <a:noFill/>
-          <a:ln/>
-        </p:spPr>
-        <p:txBody>
-          <a:bodyPr wrap="square" lIns="0" tIns="0" rIns="0" bIns="0" rtlCol="0" anchor="ctr"/>
-          <a:lstStyle/>
+              <a:t>ricavi intermediazione; €36 mld servizi immobiliari
+</a:t>
+            </a:r>
+            <a:endParaRPr lang="en-US" sz="1250" dirty="0"/>
+          </a:p>
           <a:p>
             <a:pPr indent="0" marL="0">
-              <a:buNone/>
-            </a:pPr>
-            <a:r>
-              <a:rPr lang="en-US" sz="1000" dirty="0">
-                <a:solidFill>
-                  <a:srgbClr val="5C6C87"/>
+              <a:spcAft>
+                <a:spcPts val="1100"/>
+              </a:spcAft>
+              <a:buNone/>
+            </a:pPr>
+            <a:r>
+              <a:rPr lang="en-US" sz="1250" b="1" dirty="0">
+                <a:solidFill>
+                  <a:srgbClr val="FFFFFF"/>
                 </a:solidFill>
                 <a:latin typeface="Calibri" pitchFamily="34" charset="0"/>
                 <a:ea typeface="Calibri" pitchFamily="34" charset="-122"/>
                 <a:cs typeface="Calibri" pitchFamily="34" charset="-120"/>
               </a:rPr>
-              <a:t>Dimensionamenti indicativi / ordine di grandezza, da validare in fase di diligence.</a:t>
-            </a:r>
-            <a:endParaRPr lang="en-US" sz="1000" dirty="0"/>
-          </a:p>
-        </p:txBody>
-      </p:sp>
-      <p:sp>
-        <p:nvSpPr>
-          <p:cNvPr id="20" name="Text 18"/>
-          <p:cNvSpPr/>
-          <p:nvPr/>
-        </p:nvSpPr>
-        <p:spPr>
-          <a:xfrm>
-            <a:off x="11338560" y="6355080"/>
-            <a:ext cx="457200" cy="274320"/>
-          </a:xfrm>
-          <a:prstGeom prst="rect">
-            <a:avLst/>
-          </a:prstGeom>
-          <a:noFill/>
-          <a:ln/>
-        </p:spPr>
-        <p:txBody>
-          <a:bodyPr wrap="square" lIns="0" tIns="0" rIns="0" bIns="0" rtlCol="0" anchor="ctr"/>
-          <a:lstStyle/>
-          <a:p>
-            <a:pPr algn="r" indent="0" marL="0">
-              <a:buNone/>
-            </a:pPr>
-            <a:r>
-              <a:rPr lang="en-US" sz="1000" dirty="0">
-                <a:solidFill>
-                  <a:srgbClr val="5C6C87"/>
+              <a:t>€85 mld </a:t>
+            </a:r>
+            <a:pPr indent="0" marL="0">
+              <a:spcAft>
+                <a:spcPts val="1100"/>
+              </a:spcAft>
+              <a:buNone/>
+            </a:pPr>
+            <a:r>
+              <a:rPr lang="en-US" sz="1250" dirty="0">
+                <a:solidFill>
+                  <a:srgbClr val="EAF1FA"/>
                 </a:solidFill>
                 <a:latin typeface="Calibri" pitchFamily="34" charset="0"/>
                 <a:ea typeface="Calibri" pitchFamily="34" charset="-122"/>
                 <a:cs typeface="Calibri" pitchFamily="34" charset="-120"/>
               </a:rPr>
+              <a:t>investimenti Case Green entro il 2030
+</a:t>
+            </a:r>
+            <a:endParaRPr lang="en-US" sz="1250" dirty="0"/>
+          </a:p>
+          <a:p>
+            <a:pPr indent="0" marL="0">
+              <a:spcAft>
+                <a:spcPts val="1100"/>
+              </a:spcAft>
+              <a:buNone/>
+            </a:pPr>
+            <a:r>
+              <a:rPr lang="en-US" sz="1250" b="1" dirty="0">
+                <a:solidFill>
+                  <a:srgbClr val="FFFFFF"/>
+                </a:solidFill>
+                <a:latin typeface="Calibri" pitchFamily="34" charset="0"/>
+                <a:ea typeface="Calibri" pitchFamily="34" charset="-122"/>
+                <a:cs typeface="Calibri" pitchFamily="34" charset="-120"/>
+              </a:rPr>
+              <a:t>~500.000 </a:t>
+            </a:r>
+            <a:pPr indent="0" marL="0">
+              <a:spcAft>
+                <a:spcPts val="1100"/>
+              </a:spcAft>
+              <a:buNone/>
+            </a:pPr>
+            <a:r>
+              <a:rPr lang="en-US" sz="1250" dirty="0">
+                <a:solidFill>
+                  <a:srgbClr val="EAF1FA"/>
+                </a:solidFill>
+                <a:latin typeface="Calibri" pitchFamily="34" charset="0"/>
+                <a:ea typeface="Calibri" pitchFamily="34" charset="-122"/>
+                <a:cs typeface="Calibri" pitchFamily="34" charset="-120"/>
+              </a:rPr>
+              <a:t>abitazioni/anno da riqualificare</a:t>
+            </a:r>
+            <a:endParaRPr lang="en-US" sz="1250" dirty="0"/>
+          </a:p>
+        </p:txBody>
+      </p:sp>
+      <p:sp>
+        <p:nvSpPr>
+          <p:cNvPr id="20" name="Text 18"/>
+          <p:cNvSpPr/>
+          <p:nvPr/>
+        </p:nvSpPr>
+        <p:spPr>
+          <a:xfrm>
+            <a:off x="502920" y="6053328"/>
+            <a:ext cx="7863840" cy="457200"/>
+          </a:xfrm>
+          <a:prstGeom prst="rect">
+            <a:avLst/>
+          </a:prstGeom>
+          <a:noFill/>
+          <a:ln/>
+        </p:spPr>
+        <p:txBody>
+          <a:bodyPr wrap="square" lIns="0" tIns="0" rIns="0" bIns="0" rtlCol="0" anchor="ctr"/>
+          <a:lstStyle/>
+          <a:p>
+            <a:pPr indent="0" marL="0">
+              <a:buNone/>
+            </a:pPr>
+            <a:r>
+              <a:rPr lang="en-US" sz="950" dirty="0">
+                <a:solidFill>
+                  <a:srgbClr val="5C6C87"/>
+                </a:solidFill>
+                <a:latin typeface="Calibri" pitchFamily="34" charset="0"/>
+                <a:ea typeface="Calibri" pitchFamily="34" charset="-122"/>
+                <a:cs typeface="Calibri" pitchFamily="34" charset="-120"/>
+              </a:rPr>
+              <a:t>Fonti: OMI–Agenzia delle Entrate (2024); Il Sole 24 Ore; ACCA/BibLus, rinnovabili.it (EPBD). SAM/SOM: stime, da validare in diligence.</a:t>
+            </a:r>
+            <a:endParaRPr lang="en-US" sz="950" dirty="0"/>
+          </a:p>
+        </p:txBody>
+      </p:sp>
+      <p:sp>
+        <p:nvSpPr>
+          <p:cNvPr id="21" name="Text 19"/>
+          <p:cNvSpPr/>
+          <p:nvPr/>
+        </p:nvSpPr>
+        <p:spPr>
+          <a:xfrm>
+            <a:off x="11338560" y="6355080"/>
+            <a:ext cx="457200" cy="274320"/>
+          </a:xfrm>
+          <a:prstGeom prst="rect">
+            <a:avLst/>
+          </a:prstGeom>
+          <a:noFill/>
+          <a:ln/>
+        </p:spPr>
+        <p:txBody>
+          <a:bodyPr wrap="square" lIns="0" tIns="0" rIns="0" bIns="0" rtlCol="0" anchor="ctr"/>
+          <a:lstStyle/>
+          <a:p>
+            <a:pPr algn="r" indent="0" marL="0">
+              <a:buNone/>
+            </a:pPr>
+            <a:r>
+              <a:rPr lang="en-US" sz="1000" dirty="0">
+                <a:solidFill>
+                  <a:srgbClr val="5C6C87"/>
+                </a:solidFill>
+                <a:latin typeface="Calibri" pitchFamily="34" charset="0"/>
+                <a:ea typeface="Calibri" pitchFamily="34" charset="-122"/>
+                <a:cs typeface="Calibri" pitchFamily="34" charset="-120"/>
+              </a:rPr>
               <a:t>07</a:t>
             </a:r>
             <a:endParaRPr lang="en-US" sz="1000" dirty="0"/>
@@ -9832,7 +9935,7 @@
       </p:sp>
       <p:sp>
         <p:nvSpPr>
-          <p:cNvPr id="21" name="Text 19"/>
+          <p:cNvPr id="22" name="Text 20"/>
           <p:cNvSpPr/>
           <p:nvPr/>
         </p:nvSpPr>
@@ -11036,7 +11139,7 @@
                 <a:ea typeface="Calibri" pitchFamily="34" charset="-122"/>
                 <a:cs typeface="Calibri" pitchFamily="34" charset="-120"/>
               </a:rPr>
-              <a:t>La EPBD impone l'adeguamento energetico di milioni di edifici entro il 2030/2033: un'ondata di ristrutturazioni forzata e finanziabile.</a:t>
+              <a:t>La EPBD (recepimento entro maggio 2026) impone l'adeguamento di ~500.000 abitazioni/anno: ~€85 mld di investimenti entro il 2030. Domanda forzata e finanziabile.</a:t>
             </a:r>
             <a:endParaRPr lang="en-US" sz="1350" dirty="0"/>
           </a:p>

--- a/proptech-deck/Conforme_Pitch.pptx
+++ b/proptech-deck/Conforme_Pitch.pptx
@@ -7195,8 +7195,8 @@
         </p:nvSpPr>
         <p:spPr>
           <a:xfrm>
-            <a:off x="5074920" y="3063240"/>
-            <a:ext cx="2011680" cy="2011680"/>
+            <a:off x="5276088" y="2971800"/>
+            <a:ext cx="1645920" cy="1645920"/>
           </a:xfrm>
           <a:prstGeom prst="ellipse">
             <a:avLst/>
@@ -7215,8 +7215,8 @@
         </p:nvSpPr>
         <p:spPr>
           <a:xfrm>
-            <a:off x="5074920" y="3063240"/>
-            <a:ext cx="2011680" cy="2011680"/>
+            <a:off x="5276088" y="2971800"/>
+            <a:ext cx="1645920" cy="1645920"/>
           </a:xfrm>
           <a:prstGeom prst="rect">
             <a:avLst/>
@@ -7232,7 +7232,7 @@
               <a:buNone/>
             </a:pPr>
             <a:r>
-              <a:rPr lang="en-US" sz="1600" b="1" dirty="0">
+              <a:rPr lang="en-US" sz="1500" b="1" dirty="0">
                 <a:solidFill>
                   <a:srgbClr val="0E1E38"/>
                 </a:solidFill>
@@ -7242,14 +7242,14 @@
               </a:rPr>
               <a:t>DATI</a:t>
             </a:r>
-            <a:endParaRPr lang="en-US" sz="1600" dirty="0"/>
+            <a:endParaRPr lang="en-US" sz="1500" dirty="0"/>
           </a:p>
           <a:p>
             <a:pPr algn="ctr" indent="0" marL="0">
               <a:buNone/>
             </a:pPr>
             <a:r>
-              <a:rPr lang="en-US" sz="1600" b="1" dirty="0">
+              <a:rPr lang="en-US" sz="1500" b="1" dirty="0">
                 <a:solidFill>
                   <a:srgbClr val="0E1E38"/>
                 </a:solidFill>
@@ -7259,7 +7259,7 @@
               </a:rPr>
               <a:t>PROPRIETARI</a:t>
             </a:r>
-            <a:endParaRPr lang="en-US" sz="1600" dirty="0"/>
+            <a:endParaRPr lang="en-US" sz="1500" dirty="0"/>
           </a:p>
         </p:txBody>
       </p:sp>
@@ -7271,12 +7271,12 @@
         </p:nvSpPr>
         <p:spPr>
           <a:xfrm>
-            <a:off x="4023360" y="1874520"/>
-            <a:ext cx="2743200" cy="1005840"/>
+            <a:off x="2331720" y="2331720"/>
+            <a:ext cx="2743200" cy="960120"/>
           </a:xfrm>
           <a:prstGeom prst="roundRect">
             <a:avLst>
-              <a:gd name="adj" fmla="val 8182"/>
+              <a:gd name="adj" fmla="val 8571"/>
             </a:avLst>
           </a:prstGeom>
           <a:solidFill>
@@ -7298,8 +7298,8 @@
         </p:nvSpPr>
         <p:spPr>
           <a:xfrm>
-            <a:off x="4160520" y="1874520"/>
-            <a:ext cx="2468880" cy="1005840"/>
+            <a:off x="2468880" y="2331720"/>
+            <a:ext cx="2468880" cy="960120"/>
           </a:xfrm>
           <a:prstGeom prst="rect">
             <a:avLst/>
@@ -7337,12 +7337,12 @@
         </p:nvSpPr>
         <p:spPr>
           <a:xfrm>
-            <a:off x="8275320" y="2880360"/>
-            <a:ext cx="2743200" cy="1005840"/>
+            <a:off x="7086600" y="2331720"/>
+            <a:ext cx="2743200" cy="960120"/>
           </a:xfrm>
           <a:prstGeom prst="roundRect">
             <a:avLst>
-              <a:gd name="adj" fmla="val 8182"/>
+              <a:gd name="adj" fmla="val 8571"/>
             </a:avLst>
           </a:prstGeom>
           <a:solidFill>
@@ -7364,8 +7364,8 @@
         </p:nvSpPr>
         <p:spPr>
           <a:xfrm>
-            <a:off x="8412480" y="2880360"/>
-            <a:ext cx="2468880" cy="1005840"/>
+            <a:off x="7223760" y="2331720"/>
+            <a:ext cx="2468880" cy="960120"/>
           </a:xfrm>
           <a:prstGeom prst="rect">
             <a:avLst/>
@@ -7403,12 +7403,12 @@
         </p:nvSpPr>
         <p:spPr>
           <a:xfrm>
-            <a:off x="4023360" y="4251960"/>
-            <a:ext cx="2743200" cy="1005840"/>
+            <a:off x="7086600" y="4480560"/>
+            <a:ext cx="2743200" cy="960120"/>
           </a:xfrm>
           <a:prstGeom prst="roundRect">
             <a:avLst>
-              <a:gd name="adj" fmla="val 8182"/>
+              <a:gd name="adj" fmla="val 8571"/>
             </a:avLst>
           </a:prstGeom>
           <a:solidFill>
@@ -7430,8 +7430,8 @@
         </p:nvSpPr>
         <p:spPr>
           <a:xfrm>
-            <a:off x="4160520" y="4251960"/>
-            <a:ext cx="2468880" cy="1005840"/>
+            <a:off x="7223760" y="4480560"/>
+            <a:ext cx="2468880" cy="960120"/>
           </a:xfrm>
           <a:prstGeom prst="rect">
             <a:avLst/>
@@ -7469,12 +7469,12 @@
         </p:nvSpPr>
         <p:spPr>
           <a:xfrm>
-            <a:off x="960120" y="2880360"/>
-            <a:ext cx="2743200" cy="1005840"/>
+            <a:off x="2331720" y="4480560"/>
+            <a:ext cx="2743200" cy="960120"/>
           </a:xfrm>
           <a:prstGeom prst="roundRect">
             <a:avLst>
-              <a:gd name="adj" fmla="val 8182"/>
+              <a:gd name="adj" fmla="val 8571"/>
             </a:avLst>
           </a:prstGeom>
           <a:solidFill>
@@ -7496,8 +7496,8 @@
         </p:nvSpPr>
         <p:spPr>
           <a:xfrm>
-            <a:off x="1097280" y="2880360"/>
-            <a:ext cx="2468880" cy="1005840"/>
+            <a:off x="2468880" y="4480560"/>
+            <a:ext cx="2468880" cy="960120"/>
           </a:xfrm>
           <a:prstGeom prst="rect">
             <a:avLst/>
@@ -7529,7 +7529,87 @@
       </p:sp>
       <p:sp>
         <p:nvSpPr>
-          <p:cNvPr id="14" name="Text 12"/>
+          <p:cNvPr id="14" name="Shape 12"/>
+          <p:cNvSpPr/>
+          <p:nvPr/>
+        </p:nvSpPr>
+        <p:spPr>
+          <a:xfrm>
+            <a:off x="5897880" y="2651760"/>
+            <a:ext cx="310896" cy="219456"/>
+          </a:xfrm>
+          <a:prstGeom prst="rightArrow">
+            <a:avLst/>
+          </a:prstGeom>
+          <a:solidFill>
+            <a:srgbClr val="E8A33D"/>
+          </a:solidFill>
+          <a:ln/>
+        </p:spPr>
+      </p:sp>
+      <p:sp>
+        <p:nvSpPr>
+          <p:cNvPr id="15" name="Shape 13"/>
+          <p:cNvSpPr/>
+          <p:nvPr/>
+        </p:nvSpPr>
+        <p:spPr>
+          <a:xfrm rot="5400000">
+            <a:off x="8366760" y="3611880"/>
+            <a:ext cx="310896" cy="219456"/>
+          </a:xfrm>
+          <a:prstGeom prst="rightArrow">
+            <a:avLst/>
+          </a:prstGeom>
+          <a:solidFill>
+            <a:srgbClr val="E8A33D"/>
+          </a:solidFill>
+          <a:ln/>
+        </p:spPr>
+      </p:sp>
+      <p:sp>
+        <p:nvSpPr>
+          <p:cNvPr id="16" name="Shape 14"/>
+          <p:cNvSpPr/>
+          <p:nvPr/>
+        </p:nvSpPr>
+        <p:spPr>
+          <a:xfrm rot="10800000">
+            <a:off x="5897880" y="4800600"/>
+            <a:ext cx="310896" cy="219456"/>
+          </a:xfrm>
+          <a:prstGeom prst="rightArrow">
+            <a:avLst/>
+          </a:prstGeom>
+          <a:solidFill>
+            <a:srgbClr val="E8A33D"/>
+          </a:solidFill>
+          <a:ln/>
+        </p:spPr>
+      </p:sp>
+      <p:sp>
+        <p:nvSpPr>
+          <p:cNvPr id="17" name="Shape 15"/>
+          <p:cNvSpPr/>
+          <p:nvPr/>
+        </p:nvSpPr>
+        <p:spPr>
+          <a:xfrm rot="16200000">
+            <a:off x="3611880" y="3611880"/>
+            <a:ext cx="310896" cy="219456"/>
+          </a:xfrm>
+          <a:prstGeom prst="rightArrow">
+            <a:avLst/>
+          </a:prstGeom>
+          <a:solidFill>
+            <a:srgbClr val="E8A33D"/>
+          </a:solidFill>
+          <a:ln/>
+        </p:spPr>
+      </p:sp>
+      <p:sp>
+        <p:nvSpPr>
+          <p:cNvPr id="18" name="Text 16"/>
           <p:cNvSpPr/>
           <p:nvPr/>
         </p:nvSpPr>
@@ -7568,7 +7648,7 @@
       </p:sp>
       <p:sp>
         <p:nvSpPr>
-          <p:cNvPr id="15" name="Text 13"/>
+          <p:cNvPr id="19" name="Text 17"/>
           <p:cNvSpPr/>
           <p:nvPr/>
         </p:nvSpPr>
@@ -7607,7 +7687,7 @@
       </p:sp>
       <p:sp>
         <p:nvSpPr>
-          <p:cNvPr id="16" name="Text 14"/>
+          <p:cNvPr id="20" name="Text 18"/>
           <p:cNvSpPr/>
           <p:nvPr/>
         </p:nvSpPr>
@@ -9571,7 +9651,7 @@
                 <a:ea typeface="Cambria" pitchFamily="34" charset="-122"/>
                 <a:cs typeface="Cambria" pitchFamily="34" charset="-120"/>
               </a:rPr>
-              <a:t>Centinaia di mln (beachhead 0–3 anni)</a:t>
+              <a:t>Centinaia di mln</a:t>
             </a:r>
             <a:endParaRPr lang="en-US" sz="1700" dirty="0"/>
           </a:p>
@@ -9610,7 +9690,7 @@
                 <a:ea typeface="Calibri" pitchFamily="34" charset="-122"/>
                 <a:cs typeface="Calibri" pitchFamily="34" charset="-120"/>
               </a:rPr>
-              <a:t>Due diligence B2B su ~720k transazioni/anno: reti, notai, banche, fondi</a:t>
+              <a:t>Beachhead 0–3 anni: DD B2B per reti, notai, banche, fondi</a:t>
             </a:r>
             <a:endParaRPr lang="en-US" sz="1250" dirty="0"/>
           </a:p>

--- a/proptech-deck/Conforme_Pitch.pptx
+++ b/proptech-deck/Conforme_Pitch.pptx
@@ -17,9 +17,12 @@
     <p:sldId id="265" r:id="rId11"/>
     <p:sldId id="266" r:id="rId12"/>
     <p:sldId id="267" r:id="rId13"/>
+    <p:sldId id="268" r:id="rId14"/>
+    <p:sldId id="269" r:id="rId15"/>
+    <p:sldId id="270" r:id="rId16"/>
   </p:sldIdLst>
   <p:notesMasterIdLst>
-    <p:notesMasterId r:id="rId14"/>
+    <p:notesMasterId r:id="rId17"/>
   </p:notesMasterIdLst>
   <p:sldSz cx="12192000" cy="6858000"/>
   <p:notesSz cx="6858000" cy="12192000"/>
@@ -1330,6 +1333,270 @@
 </p:notes>
 </file>
 
+<file path=ppt/notesSlides/notesSlide13.xml><?xml version="1.0" encoding="utf-8"?>
+<p:notes xmlns:a="http://schemas.openxmlformats.org/drawingml/2006/main" xmlns:r="http://schemas.openxmlformats.org/officeDocument/2006/relationships" xmlns:p="http://schemas.openxmlformats.org/presentationml/2006/main">
+  <p:cSld>
+    <p:spTree>
+      <p:nvGrpSpPr>
+        <p:cNvPr id="1" name=""/>
+        <p:cNvGrpSpPr/>
+        <p:nvPr/>
+      </p:nvGrpSpPr>
+      <p:grpSpPr>
+        <a:xfrm>
+          <a:off x="0" y="0"/>
+          <a:ext cx="0" cy="0"/>
+          <a:chOff x="0" y="0"/>
+          <a:chExt cx="0" cy="0"/>
+        </a:xfrm>
+      </p:grpSpPr>
+      <p:sp>
+        <p:nvSpPr>
+          <p:cNvPr id="2" name="Slide Image Placeholder 1"/>
+          <p:cNvSpPr>
+            <a:spLocks noGrp="1" noRot="1" noChangeAspect="1"/>
+          </p:cNvSpPr>
+          <p:nvPr>
+            <p:ph type="sldImg"/>
+          </p:nvPr>
+        </p:nvSpPr>
+        <p:spPr/>
+      </p:sp>
+      <p:sp>
+        <p:nvSpPr>
+          <p:cNvPr id="3" name="Notes Placeholder 2"/>
+          <p:cNvSpPr>
+            <a:spLocks noGrp="1"/>
+          </p:cNvSpPr>
+          <p:nvPr>
+            <p:ph type="body" idx="1"/>
+          </p:nvPr>
+        </p:nvSpPr>
+        <p:spPr/>
+        <p:txBody>
+          <a:bodyPr/>
+          <a:lstStyle/>
+          <a:p>
+            <a:r>
+              <a:rPr lang="en-US" dirty="0"/>
+              <a:t/>
+            </a:r>
+            <a:endParaRPr lang="en-US" dirty="0"/>
+          </a:p>
+        </p:txBody>
+      </p:sp>
+      <p:sp>
+        <p:nvSpPr>
+          <p:cNvPr id="4" name="Slide Number Placeholder 3"/>
+          <p:cNvSpPr>
+            <a:spLocks noGrp="1"/>
+          </p:cNvSpPr>
+          <p:nvPr>
+            <p:ph type="sldNum" sz="quarter" idx="10"/>
+          </p:nvPr>
+        </p:nvSpPr>
+        <p:spPr/>
+        <p:txBody>
+          <a:bodyPr/>
+          <a:lstStyle/>
+          <a:p>
+            <a:fld id="{F7021451-1387-4CA6-816F-3879F97B5CBC}" type="slidenum">
+              <a:rPr lang="en-US"/>
+              <a:t>13</a:t>
+            </a:fld>
+            <a:endParaRPr lang="en-US"/>
+          </a:p>
+        </p:txBody>
+      </p:sp>
+    </p:spTree>
+    <p:extLst>
+      <p:ext uri="{BB962C8B-B14F-4D97-AF65-F5344CB8AC3E}">
+        <p14:creationId xmlns:p14="http://schemas.microsoft.com/office/powerpoint/2010/main" val="1024086991"/>
+      </p:ext>
+    </p:extLst>
+  </p:cSld>
+  <p:clrMapOvr>
+    <a:masterClrMapping/>
+  </p:clrMapOvr>
+</p:notes>
+</file>
+
+<file path=ppt/notesSlides/notesSlide14.xml><?xml version="1.0" encoding="utf-8"?>
+<p:notes xmlns:a="http://schemas.openxmlformats.org/drawingml/2006/main" xmlns:r="http://schemas.openxmlformats.org/officeDocument/2006/relationships" xmlns:p="http://schemas.openxmlformats.org/presentationml/2006/main">
+  <p:cSld>
+    <p:spTree>
+      <p:nvGrpSpPr>
+        <p:cNvPr id="1" name=""/>
+        <p:cNvGrpSpPr/>
+        <p:nvPr/>
+      </p:nvGrpSpPr>
+      <p:grpSpPr>
+        <a:xfrm>
+          <a:off x="0" y="0"/>
+          <a:ext cx="0" cy="0"/>
+          <a:chOff x="0" y="0"/>
+          <a:chExt cx="0" cy="0"/>
+        </a:xfrm>
+      </p:grpSpPr>
+      <p:sp>
+        <p:nvSpPr>
+          <p:cNvPr id="2" name="Slide Image Placeholder 1"/>
+          <p:cNvSpPr>
+            <a:spLocks noGrp="1" noRot="1" noChangeAspect="1"/>
+          </p:cNvSpPr>
+          <p:nvPr>
+            <p:ph type="sldImg"/>
+          </p:nvPr>
+        </p:nvSpPr>
+        <p:spPr/>
+      </p:sp>
+      <p:sp>
+        <p:nvSpPr>
+          <p:cNvPr id="3" name="Notes Placeholder 2"/>
+          <p:cNvSpPr>
+            <a:spLocks noGrp="1"/>
+          </p:cNvSpPr>
+          <p:nvPr>
+            <p:ph type="body" idx="1"/>
+          </p:nvPr>
+        </p:nvSpPr>
+        <p:spPr/>
+        <p:txBody>
+          <a:bodyPr/>
+          <a:lstStyle/>
+          <a:p>
+            <a:r>
+              <a:rPr lang="en-US" dirty="0"/>
+              <a:t/>
+            </a:r>
+            <a:endParaRPr lang="en-US" dirty="0"/>
+          </a:p>
+        </p:txBody>
+      </p:sp>
+      <p:sp>
+        <p:nvSpPr>
+          <p:cNvPr id="4" name="Slide Number Placeholder 3"/>
+          <p:cNvSpPr>
+            <a:spLocks noGrp="1"/>
+          </p:cNvSpPr>
+          <p:nvPr>
+            <p:ph type="sldNum" sz="quarter" idx="10"/>
+          </p:nvPr>
+        </p:nvSpPr>
+        <p:spPr/>
+        <p:txBody>
+          <a:bodyPr/>
+          <a:lstStyle/>
+          <a:p>
+            <a:fld id="{F7021451-1387-4CA6-816F-3879F97B5CBC}" type="slidenum">
+              <a:rPr lang="en-US"/>
+              <a:t>14</a:t>
+            </a:fld>
+            <a:endParaRPr lang="en-US"/>
+          </a:p>
+        </p:txBody>
+      </p:sp>
+    </p:spTree>
+    <p:extLst>
+      <p:ext uri="{BB962C8B-B14F-4D97-AF65-F5344CB8AC3E}">
+        <p14:creationId xmlns:p14="http://schemas.microsoft.com/office/powerpoint/2010/main" val="1024086991"/>
+      </p:ext>
+    </p:extLst>
+  </p:cSld>
+  <p:clrMapOvr>
+    <a:masterClrMapping/>
+  </p:clrMapOvr>
+</p:notes>
+</file>
+
+<file path=ppt/notesSlides/notesSlide15.xml><?xml version="1.0" encoding="utf-8"?>
+<p:notes xmlns:a="http://schemas.openxmlformats.org/drawingml/2006/main" xmlns:r="http://schemas.openxmlformats.org/officeDocument/2006/relationships" xmlns:p="http://schemas.openxmlformats.org/presentationml/2006/main">
+  <p:cSld>
+    <p:spTree>
+      <p:nvGrpSpPr>
+        <p:cNvPr id="1" name=""/>
+        <p:cNvGrpSpPr/>
+        <p:nvPr/>
+      </p:nvGrpSpPr>
+      <p:grpSpPr>
+        <a:xfrm>
+          <a:off x="0" y="0"/>
+          <a:ext cx="0" cy="0"/>
+          <a:chOff x="0" y="0"/>
+          <a:chExt cx="0" cy="0"/>
+        </a:xfrm>
+      </p:grpSpPr>
+      <p:sp>
+        <p:nvSpPr>
+          <p:cNvPr id="2" name="Slide Image Placeholder 1"/>
+          <p:cNvSpPr>
+            <a:spLocks noGrp="1" noRot="1" noChangeAspect="1"/>
+          </p:cNvSpPr>
+          <p:nvPr>
+            <p:ph type="sldImg"/>
+          </p:nvPr>
+        </p:nvSpPr>
+        <p:spPr/>
+      </p:sp>
+      <p:sp>
+        <p:nvSpPr>
+          <p:cNvPr id="3" name="Notes Placeholder 2"/>
+          <p:cNvSpPr>
+            <a:spLocks noGrp="1"/>
+          </p:cNvSpPr>
+          <p:nvPr>
+            <p:ph type="body" idx="1"/>
+          </p:nvPr>
+        </p:nvSpPr>
+        <p:spPr/>
+        <p:txBody>
+          <a:bodyPr/>
+          <a:lstStyle/>
+          <a:p>
+            <a:r>
+              <a:rPr lang="en-US" dirty="0"/>
+              <a:t/>
+            </a:r>
+            <a:endParaRPr lang="en-US" dirty="0"/>
+          </a:p>
+        </p:txBody>
+      </p:sp>
+      <p:sp>
+        <p:nvSpPr>
+          <p:cNvPr id="4" name="Slide Number Placeholder 3"/>
+          <p:cNvSpPr>
+            <a:spLocks noGrp="1"/>
+          </p:cNvSpPr>
+          <p:nvPr>
+            <p:ph type="sldNum" sz="quarter" idx="10"/>
+          </p:nvPr>
+        </p:nvSpPr>
+        <p:spPr/>
+        <p:txBody>
+          <a:bodyPr/>
+          <a:lstStyle/>
+          <a:p>
+            <a:fld id="{F7021451-1387-4CA6-816F-3879F97B5CBC}" type="slidenum">
+              <a:rPr lang="en-US"/>
+              <a:t>15</a:t>
+            </a:fld>
+            <a:endParaRPr lang="en-US"/>
+          </a:p>
+        </p:txBody>
+      </p:sp>
+    </p:spTree>
+    <p:extLst>
+      <p:ext uri="{BB962C8B-B14F-4D97-AF65-F5344CB8AC3E}">
+        <p14:creationId xmlns:p14="http://schemas.microsoft.com/office/powerpoint/2010/main" val="1024086991"/>
+      </p:ext>
+    </p:extLst>
+  </p:cSld>
+  <p:clrMapOvr>
+    <a:masterClrMapping/>
+  </p:clrMapOvr>
+</p:notes>
+</file>
+
 <file path=ppt/notesSlides/notesSlide2.xml><?xml version="1.0" encoding="utf-8"?>
 <p:notes xmlns:a="http://schemas.openxmlformats.org/drawingml/2006/main" xmlns:r="http://schemas.openxmlformats.org/officeDocument/2006/relationships" xmlns:p="http://schemas.openxmlformats.org/presentationml/2006/main">
   <p:cSld>
@@ -2649,7 +2916,7 @@
                 <a:ea typeface="Calibri" pitchFamily="34" charset="-122"/>
                 <a:cs typeface="Calibri" pitchFamily="34" charset="-120"/>
               </a:rPr>
-              <a:t>Pitch per investitore  ·  Luca Martino — Skylabs</a:t>
+              <a:t>Pitch per investitore  ·  Luca Martino · Skylabs</a:t>
             </a:r>
             <a:endParaRPr lang="en-US" sz="1300" dirty="0"/>
           </a:p>
@@ -2666,6 +2933,1761 @@
 <file path=ppt/slides/slide10.xml><?xml version="1.0" encoding="utf-8"?>
 <p:sld xmlns:a="http://schemas.openxmlformats.org/drawingml/2006/main" xmlns:r="http://schemas.openxmlformats.org/officeDocument/2006/relationships" xmlns:p="http://schemas.openxmlformats.org/presentationml/2006/main">
   <p:cSld name="Slide 10">
+    <p:bg>
+      <p:bgPr>
+        <a:solidFill>
+          <a:srgbClr val="FFFFFF"/>
+        </a:solidFill>
+      </p:bgPr>
+    </p:bg>
+    <p:spTree>
+      <p:nvGrpSpPr>
+        <p:cNvPr id="1" name=""/>
+        <p:cNvGrpSpPr/>
+        <p:nvPr/>
+      </p:nvGrpSpPr>
+      <p:grpSpPr>
+        <a:xfrm>
+          <a:off x="0" y="0"/>
+          <a:ext cx="0" cy="0"/>
+          <a:chOff x="0" y="0"/>
+          <a:chExt cx="0" cy="0"/>
+        </a:xfrm>
+      </p:grpSpPr>
+      <p:sp>
+        <p:nvSpPr>
+          <p:cNvPr id="2" name="Text 0"/>
+          <p:cNvSpPr/>
+          <p:nvPr/>
+        </p:nvSpPr>
+        <p:spPr>
+          <a:xfrm>
+            <a:off x="548640" y="457200"/>
+            <a:ext cx="5486400" cy="274320"/>
+          </a:xfrm>
+          <a:prstGeom prst="rect">
+            <a:avLst/>
+          </a:prstGeom>
+          <a:noFill/>
+          <a:ln/>
+        </p:spPr>
+        <p:txBody>
+          <a:bodyPr wrap="square" lIns="0" tIns="0" rIns="0" bIns="0" rtlCol="0" anchor="ctr"/>
+          <a:lstStyle/>
+          <a:p>
+            <a:pPr algn="l" indent="0" marL="0">
+              <a:buNone/>
+            </a:pPr>
+            <a:r>
+              <a:rPr lang="en-US" sz="1200" b="1" spc="300" kern="0" dirty="0">
+                <a:solidFill>
+                  <a:srgbClr val="E8A33D"/>
+                </a:solidFill>
+                <a:latin typeface="Calibri" pitchFamily="34" charset="0"/>
+                <a:ea typeface="Calibri" pitchFamily="34" charset="-122"/>
+                <a:cs typeface="Calibri" pitchFamily="34" charset="-120"/>
+              </a:rPr>
+              <a:t>ANALISI COMPETITIVA · DETTAGLIO</a:t>
+            </a:r>
+            <a:endParaRPr lang="en-US" sz="1200" dirty="0"/>
+          </a:p>
+        </p:txBody>
+      </p:sp>
+      <p:sp>
+        <p:nvSpPr>
+          <p:cNvPr id="3" name="Text 1"/>
+          <p:cNvSpPr/>
+          <p:nvPr/>
+        </p:nvSpPr>
+        <p:spPr>
+          <a:xfrm>
+            <a:off x="502920" y="749808"/>
+            <a:ext cx="11155680" cy="548640"/>
+          </a:xfrm>
+          <a:prstGeom prst="rect">
+            <a:avLst/>
+          </a:prstGeom>
+          <a:noFill/>
+          <a:ln/>
+        </p:spPr>
+        <p:txBody>
+          <a:bodyPr wrap="square" lIns="0" tIns="0" rIns="0" bIns="0" rtlCol="0" anchor="ctr"/>
+          <a:lstStyle/>
+          <a:p>
+            <a:pPr indent="0" marL="0">
+              <a:buNone/>
+            </a:pPr>
+            <a:r>
+              <a:rPr lang="en-US" sz="2700" b="1" dirty="0">
+                <a:solidFill>
+                  <a:srgbClr val="16233B"/>
+                </a:solidFill>
+                <a:latin typeface="Cambria" pitchFamily="34" charset="0"/>
+                <a:ea typeface="Cambria" pitchFamily="34" charset="-122"/>
+                <a:cs typeface="Cambria" pitchFamily="34" charset="-120"/>
+              </a:rPr>
+              <a:t>Chi fa cosa, e dove si ferma</a:t>
+            </a:r>
+            <a:endParaRPr lang="en-US" sz="2700" dirty="0"/>
+          </a:p>
+        </p:txBody>
+      </p:sp>
+      <p:sp>
+        <p:nvSpPr>
+          <p:cNvPr id="4" name="Shape 2"/>
+          <p:cNvSpPr/>
+          <p:nvPr/>
+        </p:nvSpPr>
+        <p:spPr>
+          <a:xfrm>
+            <a:off x="502920" y="1600200"/>
+            <a:ext cx="11155680" cy="457200"/>
+          </a:xfrm>
+          <a:prstGeom prst="roundRect">
+            <a:avLst>
+              <a:gd name="adj" fmla="val 12000"/>
+            </a:avLst>
+          </a:prstGeom>
+          <a:solidFill>
+            <a:srgbClr val="0E1E38"/>
+          </a:solidFill>
+          <a:ln/>
+        </p:spPr>
+      </p:sp>
+      <p:sp>
+        <p:nvSpPr>
+          <p:cNvPr id="5" name="Text 3"/>
+          <p:cNvSpPr/>
+          <p:nvPr/>
+        </p:nvSpPr>
+        <p:spPr>
+          <a:xfrm>
+            <a:off x="612648" y="1600200"/>
+            <a:ext cx="2194560" cy="457200"/>
+          </a:xfrm>
+          <a:prstGeom prst="rect">
+            <a:avLst/>
+          </a:prstGeom>
+          <a:noFill/>
+          <a:ln/>
+        </p:spPr>
+        <p:txBody>
+          <a:bodyPr wrap="square" lIns="0" tIns="0" rIns="0" bIns="0" rtlCol="0" anchor="ctr"/>
+          <a:lstStyle/>
+          <a:p>
+            <a:pPr indent="0" marL="0">
+              <a:buNone/>
+            </a:pPr>
+            <a:r>
+              <a:rPr lang="en-US" sz="1150" b="1" dirty="0">
+                <a:solidFill>
+                  <a:srgbClr val="FFFFFF"/>
+                </a:solidFill>
+                <a:latin typeface="Calibri" pitchFamily="34" charset="0"/>
+                <a:ea typeface="Calibri" pitchFamily="34" charset="-122"/>
+                <a:cs typeface="Calibri" pitchFamily="34" charset="-120"/>
+              </a:rPr>
+              <a:t>Player</a:t>
+            </a:r>
+            <a:endParaRPr lang="en-US" sz="1150" dirty="0"/>
+          </a:p>
+        </p:txBody>
+      </p:sp>
+      <p:sp>
+        <p:nvSpPr>
+          <p:cNvPr id="6" name="Text 4"/>
+          <p:cNvSpPr/>
+          <p:nvPr/>
+        </p:nvSpPr>
+        <p:spPr>
+          <a:xfrm>
+            <a:off x="2990088" y="1600200"/>
+            <a:ext cx="1463040" cy="457200"/>
+          </a:xfrm>
+          <a:prstGeom prst="rect">
+            <a:avLst/>
+          </a:prstGeom>
+          <a:noFill/>
+          <a:ln/>
+        </p:spPr>
+        <p:txBody>
+          <a:bodyPr wrap="square" lIns="0" tIns="0" rIns="0" bIns="0" rtlCol="0" anchor="ctr"/>
+          <a:lstStyle/>
+          <a:p>
+            <a:pPr indent="0" marL="0">
+              <a:buNone/>
+            </a:pPr>
+            <a:r>
+              <a:rPr lang="en-US" sz="1150" b="1" dirty="0">
+                <a:solidFill>
+                  <a:srgbClr val="FFFFFF"/>
+                </a:solidFill>
+                <a:latin typeface="Calibri" pitchFamily="34" charset="0"/>
+                <a:ea typeface="Calibri" pitchFamily="34" charset="-122"/>
+                <a:cs typeface="Calibri" pitchFamily="34" charset="-120"/>
+              </a:rPr>
+              <a:t>Categoria</a:t>
+            </a:r>
+            <a:endParaRPr lang="en-US" sz="1150" dirty="0"/>
+          </a:p>
+        </p:txBody>
+      </p:sp>
+      <p:sp>
+        <p:nvSpPr>
+          <p:cNvPr id="7" name="Text 5"/>
+          <p:cNvSpPr/>
+          <p:nvPr/>
+        </p:nvSpPr>
+        <p:spPr>
+          <a:xfrm>
+            <a:off x="4636008" y="1600200"/>
+            <a:ext cx="2651760" cy="457200"/>
+          </a:xfrm>
+          <a:prstGeom prst="rect">
+            <a:avLst/>
+          </a:prstGeom>
+          <a:noFill/>
+          <a:ln/>
+        </p:spPr>
+        <p:txBody>
+          <a:bodyPr wrap="square" lIns="0" tIns="0" rIns="0" bIns="0" rtlCol="0" anchor="ctr"/>
+          <a:lstStyle/>
+          <a:p>
+            <a:pPr indent="0" marL="0">
+              <a:buNone/>
+            </a:pPr>
+            <a:r>
+              <a:rPr lang="en-US" sz="1150" b="1" dirty="0">
+                <a:solidFill>
+                  <a:srgbClr val="FFFFFF"/>
+                </a:solidFill>
+                <a:latin typeface="Calibri" pitchFamily="34" charset="0"/>
+                <a:ea typeface="Calibri" pitchFamily="34" charset="-122"/>
+                <a:cs typeface="Calibri" pitchFamily="34" charset="-120"/>
+              </a:rPr>
+              <a:t>Punto di forza</a:t>
+            </a:r>
+            <a:endParaRPr lang="en-US" sz="1150" dirty="0"/>
+          </a:p>
+        </p:txBody>
+      </p:sp>
+      <p:sp>
+        <p:nvSpPr>
+          <p:cNvPr id="8" name="Text 6"/>
+          <p:cNvSpPr/>
+          <p:nvPr/>
+        </p:nvSpPr>
+        <p:spPr>
+          <a:xfrm>
+            <a:off x="7470648" y="1600200"/>
+            <a:ext cx="2514600" cy="457200"/>
+          </a:xfrm>
+          <a:prstGeom prst="rect">
+            <a:avLst/>
+          </a:prstGeom>
+          <a:noFill/>
+          <a:ln/>
+        </p:spPr>
+        <p:txBody>
+          <a:bodyPr wrap="square" lIns="0" tIns="0" rIns="0" bIns="0" rtlCol="0" anchor="ctr"/>
+          <a:lstStyle/>
+          <a:p>
+            <a:pPr indent="0" marL="0">
+              <a:buNone/>
+            </a:pPr>
+            <a:r>
+              <a:rPr lang="en-US" sz="1150" b="1" dirty="0">
+                <a:solidFill>
+                  <a:srgbClr val="FFFFFF"/>
+                </a:solidFill>
+                <a:latin typeface="Calibri" pitchFamily="34" charset="0"/>
+                <a:ea typeface="Calibri" pitchFamily="34" charset="-122"/>
+                <a:cs typeface="Calibri" pitchFamily="34" charset="-120"/>
+              </a:rPr>
+              <a:t>Dove si ferma</a:t>
+            </a:r>
+            <a:endParaRPr lang="en-US" sz="1150" dirty="0"/>
+          </a:p>
+        </p:txBody>
+      </p:sp>
+      <p:sp>
+        <p:nvSpPr>
+          <p:cNvPr id="9" name="Text 7"/>
+          <p:cNvSpPr/>
+          <p:nvPr/>
+        </p:nvSpPr>
+        <p:spPr>
+          <a:xfrm>
+            <a:off x="10168128" y="1600200"/>
+            <a:ext cx="1463040" cy="457200"/>
+          </a:xfrm>
+          <a:prstGeom prst="rect">
+            <a:avLst/>
+          </a:prstGeom>
+          <a:noFill/>
+          <a:ln/>
+        </p:spPr>
+        <p:txBody>
+          <a:bodyPr wrap="square" lIns="0" tIns="0" rIns="0" bIns="0" rtlCol="0" anchor="ctr"/>
+          <a:lstStyle/>
+          <a:p>
+            <a:pPr indent="0" marL="0">
+              <a:buNone/>
+            </a:pPr>
+            <a:r>
+              <a:rPr lang="en-US" sz="1150" b="1" dirty="0">
+                <a:solidFill>
+                  <a:srgbClr val="FFFFFF"/>
+                </a:solidFill>
+                <a:latin typeface="Calibri" pitchFamily="34" charset="0"/>
+                <a:ea typeface="Calibri" pitchFamily="34" charset="-122"/>
+                <a:cs typeface="Calibri" pitchFamily="34" charset="-120"/>
+              </a:rPr>
+              <a:t>Minaccia</a:t>
+            </a:r>
+            <a:endParaRPr lang="en-US" sz="1150" dirty="0"/>
+          </a:p>
+        </p:txBody>
+      </p:sp>
+      <p:sp>
+        <p:nvSpPr>
+          <p:cNvPr id="10" name="Text 8"/>
+          <p:cNvSpPr/>
+          <p:nvPr/>
+        </p:nvSpPr>
+        <p:spPr>
+          <a:xfrm>
+            <a:off x="612648" y="2103120"/>
+            <a:ext cx="2194560" cy="512064"/>
+          </a:xfrm>
+          <a:prstGeom prst="rect">
+            <a:avLst/>
+          </a:prstGeom>
+          <a:noFill/>
+          <a:ln/>
+        </p:spPr>
+        <p:txBody>
+          <a:bodyPr wrap="square" lIns="0" tIns="0" rIns="0" bIns="0" rtlCol="0" anchor="ctr"/>
+          <a:lstStyle/>
+          <a:p>
+            <a:pPr indent="0" marL="0">
+              <a:buNone/>
+            </a:pPr>
+            <a:r>
+              <a:rPr lang="en-US" sz="1100" b="1" dirty="0">
+                <a:solidFill>
+                  <a:srgbClr val="16233B"/>
+                </a:solidFill>
+                <a:latin typeface="Calibri" pitchFamily="34" charset="0"/>
+                <a:ea typeface="Calibri" pitchFamily="34" charset="-122"/>
+                <a:cs typeface="Calibri" pitchFamily="34" charset="-120"/>
+              </a:rPr>
+              <a:t>Immobiliare.it · Idealista</a:t>
+            </a:r>
+            <a:endParaRPr lang="en-US" sz="1100" dirty="0"/>
+          </a:p>
+        </p:txBody>
+      </p:sp>
+      <p:sp>
+        <p:nvSpPr>
+          <p:cNvPr id="11" name="Text 9"/>
+          <p:cNvSpPr/>
+          <p:nvPr/>
+        </p:nvSpPr>
+        <p:spPr>
+          <a:xfrm>
+            <a:off x="2990088" y="2103120"/>
+            <a:ext cx="1463040" cy="512064"/>
+          </a:xfrm>
+          <a:prstGeom prst="rect">
+            <a:avLst/>
+          </a:prstGeom>
+          <a:noFill/>
+          <a:ln/>
+        </p:spPr>
+        <p:txBody>
+          <a:bodyPr wrap="square" lIns="0" tIns="0" rIns="0" bIns="0" rtlCol="0" anchor="ctr"/>
+          <a:lstStyle/>
+          <a:p>
+            <a:pPr indent="0" marL="0">
+              <a:buNone/>
+            </a:pPr>
+            <a:r>
+              <a:rPr lang="en-US" sz="1050" dirty="0">
+                <a:solidFill>
+                  <a:srgbClr val="5C6C87"/>
+                </a:solidFill>
+                <a:latin typeface="Calibri" pitchFamily="34" charset="0"/>
+                <a:ea typeface="Calibri" pitchFamily="34" charset="-122"/>
+                <a:cs typeface="Calibri" pitchFamily="34" charset="-120"/>
+              </a:rPr>
+              <a:t>Portali annunci</a:t>
+            </a:r>
+            <a:endParaRPr lang="en-US" sz="1050" dirty="0"/>
+          </a:p>
+        </p:txBody>
+      </p:sp>
+      <p:sp>
+        <p:nvSpPr>
+          <p:cNvPr id="12" name="Text 10"/>
+          <p:cNvSpPr/>
+          <p:nvPr/>
+        </p:nvSpPr>
+        <p:spPr>
+          <a:xfrm>
+            <a:off x="4636008" y="2103120"/>
+            <a:ext cx="2651760" cy="512064"/>
+          </a:xfrm>
+          <a:prstGeom prst="rect">
+            <a:avLst/>
+          </a:prstGeom>
+          <a:noFill/>
+          <a:ln/>
+        </p:spPr>
+        <p:txBody>
+          <a:bodyPr wrap="square" lIns="0" tIns="0" rIns="0" bIns="0" rtlCol="0" anchor="ctr"/>
+          <a:lstStyle/>
+          <a:p>
+            <a:pPr indent="0" marL="0">
+              <a:buNone/>
+            </a:pPr>
+            <a:r>
+              <a:rPr lang="en-US" sz="1050" dirty="0">
+                <a:solidFill>
+                  <a:srgbClr val="5C6C87"/>
+                </a:solidFill>
+                <a:latin typeface="Calibri" pitchFamily="34" charset="0"/>
+                <a:ea typeface="Calibri" pitchFamily="34" charset="-122"/>
+                <a:cs typeface="Calibri" pitchFamily="34" charset="-120"/>
+              </a:rPr>
+              <a:t>Vetrina, lead e traffico dominante</a:t>
+            </a:r>
+            <a:endParaRPr lang="en-US" sz="1050" dirty="0"/>
+          </a:p>
+        </p:txBody>
+      </p:sp>
+      <p:sp>
+        <p:nvSpPr>
+          <p:cNvPr id="13" name="Text 11"/>
+          <p:cNvSpPr/>
+          <p:nvPr/>
+        </p:nvSpPr>
+        <p:spPr>
+          <a:xfrm>
+            <a:off x="7470648" y="2103120"/>
+            <a:ext cx="2514600" cy="512064"/>
+          </a:xfrm>
+          <a:prstGeom prst="rect">
+            <a:avLst/>
+          </a:prstGeom>
+          <a:noFill/>
+          <a:ln/>
+        </p:spPr>
+        <p:txBody>
+          <a:bodyPr wrap="square" lIns="0" tIns="0" rIns="0" bIns="0" rtlCol="0" anchor="ctr"/>
+          <a:lstStyle/>
+          <a:p>
+            <a:pPr indent="0" marL="0">
+              <a:buNone/>
+            </a:pPr>
+            <a:r>
+              <a:rPr lang="en-US" sz="1050" dirty="0">
+                <a:solidFill>
+                  <a:srgbClr val="5C6C87"/>
+                </a:solidFill>
+                <a:latin typeface="Calibri" pitchFamily="34" charset="0"/>
+                <a:ea typeface="Calibri" pitchFamily="34" charset="-122"/>
+                <a:cs typeface="Calibri" pitchFamily="34" charset="-120"/>
+              </a:rPr>
+              <a:t>Non toccano conformità né transazione</a:t>
+            </a:r>
+            <a:endParaRPr lang="en-US" sz="1050" dirty="0"/>
+          </a:p>
+        </p:txBody>
+      </p:sp>
+      <p:sp>
+        <p:nvSpPr>
+          <p:cNvPr id="14" name="Text 12"/>
+          <p:cNvSpPr/>
+          <p:nvPr/>
+        </p:nvSpPr>
+        <p:spPr>
+          <a:xfrm>
+            <a:off x="10168128" y="2103120"/>
+            <a:ext cx="1463040" cy="512064"/>
+          </a:xfrm>
+          <a:prstGeom prst="rect">
+            <a:avLst/>
+          </a:prstGeom>
+          <a:noFill/>
+          <a:ln/>
+        </p:spPr>
+        <p:txBody>
+          <a:bodyPr wrap="square" lIns="0" tIns="0" rIns="0" bIns="0" rtlCol="0" anchor="ctr"/>
+          <a:lstStyle/>
+          <a:p>
+            <a:pPr indent="0" marL="0">
+              <a:buNone/>
+            </a:pPr>
+            <a:r>
+              <a:rPr lang="en-US" sz="1050" b="1" dirty="0">
+                <a:solidFill>
+                  <a:srgbClr val="3E8E5A"/>
+                </a:solidFill>
+                <a:latin typeface="Calibri" pitchFamily="34" charset="0"/>
+                <a:ea typeface="Calibri" pitchFamily="34" charset="-122"/>
+                <a:cs typeface="Calibri" pitchFamily="34" charset="-120"/>
+              </a:rPr>
+              <a:t>Bassa</a:t>
+            </a:r>
+            <a:endParaRPr lang="en-US" sz="1050" dirty="0"/>
+          </a:p>
+        </p:txBody>
+      </p:sp>
+      <p:sp>
+        <p:nvSpPr>
+          <p:cNvPr id="15" name="Shape 13"/>
+          <p:cNvSpPr/>
+          <p:nvPr/>
+        </p:nvSpPr>
+        <p:spPr>
+          <a:xfrm>
+            <a:off x="502920" y="2615184"/>
+            <a:ext cx="11155680" cy="512064"/>
+          </a:xfrm>
+          <a:prstGeom prst="roundRect">
+            <a:avLst>
+              <a:gd name="adj" fmla="val 3571"/>
+            </a:avLst>
+          </a:prstGeom>
+          <a:solidFill>
+            <a:srgbClr val="EEF3FA"/>
+          </a:solidFill>
+          <a:ln/>
+        </p:spPr>
+      </p:sp>
+      <p:sp>
+        <p:nvSpPr>
+          <p:cNvPr id="16" name="Text 14"/>
+          <p:cNvSpPr/>
+          <p:nvPr/>
+        </p:nvSpPr>
+        <p:spPr>
+          <a:xfrm>
+            <a:off x="612648" y="2615184"/>
+            <a:ext cx="2194560" cy="512064"/>
+          </a:xfrm>
+          <a:prstGeom prst="rect">
+            <a:avLst/>
+          </a:prstGeom>
+          <a:noFill/>
+          <a:ln/>
+        </p:spPr>
+        <p:txBody>
+          <a:bodyPr wrap="square" lIns="0" tIns="0" rIns="0" bIns="0" rtlCol="0" anchor="ctr"/>
+          <a:lstStyle/>
+          <a:p>
+            <a:pPr indent="0" marL="0">
+              <a:buNone/>
+            </a:pPr>
+            <a:r>
+              <a:rPr lang="en-US" sz="1100" b="1" dirty="0">
+                <a:solidFill>
+                  <a:srgbClr val="16233B"/>
+                </a:solidFill>
+                <a:latin typeface="Calibri" pitchFamily="34" charset="0"/>
+                <a:ea typeface="Calibri" pitchFamily="34" charset="-122"/>
+                <a:cs typeface="Calibri" pitchFamily="34" charset="-120"/>
+              </a:rPr>
+              <a:t>Casavo</a:t>
+            </a:r>
+            <a:endParaRPr lang="en-US" sz="1100" dirty="0"/>
+          </a:p>
+        </p:txBody>
+      </p:sp>
+      <p:sp>
+        <p:nvSpPr>
+          <p:cNvPr id="17" name="Text 15"/>
+          <p:cNvSpPr/>
+          <p:nvPr/>
+        </p:nvSpPr>
+        <p:spPr>
+          <a:xfrm>
+            <a:off x="2990088" y="2615184"/>
+            <a:ext cx="1463040" cy="512064"/>
+          </a:xfrm>
+          <a:prstGeom prst="rect">
+            <a:avLst/>
+          </a:prstGeom>
+          <a:noFill/>
+          <a:ln/>
+        </p:spPr>
+        <p:txBody>
+          <a:bodyPr wrap="square" lIns="0" tIns="0" rIns="0" bIns="0" rtlCol="0" anchor="ctr"/>
+          <a:lstStyle/>
+          <a:p>
+            <a:pPr indent="0" marL="0">
+              <a:buNone/>
+            </a:pPr>
+            <a:r>
+              <a:rPr lang="en-US" sz="1050" dirty="0">
+                <a:solidFill>
+                  <a:srgbClr val="5C6C87"/>
+                </a:solidFill>
+                <a:latin typeface="Calibri" pitchFamily="34" charset="0"/>
+                <a:ea typeface="Calibri" pitchFamily="34" charset="-122"/>
+                <a:cs typeface="Calibri" pitchFamily="34" charset="-120"/>
+              </a:rPr>
+              <a:t>iBuyer</a:t>
+            </a:r>
+            <a:endParaRPr lang="en-US" sz="1050" dirty="0"/>
+          </a:p>
+        </p:txBody>
+      </p:sp>
+      <p:sp>
+        <p:nvSpPr>
+          <p:cNvPr id="18" name="Text 16"/>
+          <p:cNvSpPr/>
+          <p:nvPr/>
+        </p:nvSpPr>
+        <p:spPr>
+          <a:xfrm>
+            <a:off x="4636008" y="2615184"/>
+            <a:ext cx="2651760" cy="512064"/>
+          </a:xfrm>
+          <a:prstGeom prst="rect">
+            <a:avLst/>
+          </a:prstGeom>
+          <a:noFill/>
+          <a:ln/>
+        </p:spPr>
+        <p:txBody>
+          <a:bodyPr wrap="square" lIns="0" tIns="0" rIns="0" bIns="0" rtlCol="0" anchor="ctr"/>
+          <a:lstStyle/>
+          <a:p>
+            <a:pPr indent="0" marL="0">
+              <a:buNone/>
+            </a:pPr>
+            <a:r>
+              <a:rPr lang="en-US" sz="1050" dirty="0">
+                <a:solidFill>
+                  <a:srgbClr val="5C6C87"/>
+                </a:solidFill>
+                <a:latin typeface="Calibri" pitchFamily="34" charset="0"/>
+                <a:ea typeface="Calibri" pitchFamily="34" charset="-122"/>
+                <a:cs typeface="Calibri" pitchFamily="34" charset="-120"/>
+              </a:rPr>
+              <a:t>Liquidità in ~30 gg; €385M raccolti</a:t>
+            </a:r>
+            <a:endParaRPr lang="en-US" sz="1050" dirty="0"/>
+          </a:p>
+        </p:txBody>
+      </p:sp>
+      <p:sp>
+        <p:nvSpPr>
+          <p:cNvPr id="19" name="Text 17"/>
+          <p:cNvSpPr/>
+          <p:nvPr/>
+        </p:nvSpPr>
+        <p:spPr>
+          <a:xfrm>
+            <a:off x="7470648" y="2615184"/>
+            <a:ext cx="2514600" cy="512064"/>
+          </a:xfrm>
+          <a:prstGeom prst="rect">
+            <a:avLst/>
+          </a:prstGeom>
+          <a:noFill/>
+          <a:ln/>
+        </p:spPr>
+        <p:txBody>
+          <a:bodyPr wrap="square" lIns="0" tIns="0" rIns="0" bIns="0" rtlCol="0" anchor="ctr"/>
+          <a:lstStyle/>
+          <a:p>
+            <a:pPr indent="0" marL="0">
+              <a:buNone/>
+            </a:pPr>
+            <a:r>
+              <a:rPr lang="en-US" sz="1050" dirty="0">
+                <a:solidFill>
+                  <a:srgbClr val="5C6C87"/>
+                </a:solidFill>
+                <a:latin typeface="Calibri" pitchFamily="34" charset="0"/>
+                <a:ea typeface="Calibri" pitchFamily="34" charset="-122"/>
+                <a:cs typeface="Calibri" pitchFamily="34" charset="-120"/>
+              </a:rPr>
+              <a:t>DD interna, non è un prodotto; capital-heavy</a:t>
+            </a:r>
+            <a:endParaRPr lang="en-US" sz="1050" dirty="0"/>
+          </a:p>
+        </p:txBody>
+      </p:sp>
+      <p:sp>
+        <p:nvSpPr>
+          <p:cNvPr id="20" name="Text 18"/>
+          <p:cNvSpPr/>
+          <p:nvPr/>
+        </p:nvSpPr>
+        <p:spPr>
+          <a:xfrm>
+            <a:off x="10168128" y="2615184"/>
+            <a:ext cx="1463040" cy="512064"/>
+          </a:xfrm>
+          <a:prstGeom prst="rect">
+            <a:avLst/>
+          </a:prstGeom>
+          <a:noFill/>
+          <a:ln/>
+        </p:spPr>
+        <p:txBody>
+          <a:bodyPr wrap="square" lIns="0" tIns="0" rIns="0" bIns="0" rtlCol="0" anchor="ctr"/>
+          <a:lstStyle/>
+          <a:p>
+            <a:pPr indent="0" marL="0">
+              <a:buNone/>
+            </a:pPr>
+            <a:r>
+              <a:rPr lang="en-US" sz="1050" b="1" dirty="0">
+                <a:solidFill>
+                  <a:srgbClr val="C0563C"/>
+                </a:solidFill>
+                <a:latin typeface="Calibri" pitchFamily="34" charset="0"/>
+                <a:ea typeface="Calibri" pitchFamily="34" charset="-122"/>
+                <a:cs typeface="Calibri" pitchFamily="34" charset="-120"/>
+              </a:rPr>
+              <a:t>Media</a:t>
+            </a:r>
+            <a:endParaRPr lang="en-US" sz="1050" dirty="0"/>
+          </a:p>
+        </p:txBody>
+      </p:sp>
+      <p:sp>
+        <p:nvSpPr>
+          <p:cNvPr id="21" name="Text 19"/>
+          <p:cNvSpPr/>
+          <p:nvPr/>
+        </p:nvSpPr>
+        <p:spPr>
+          <a:xfrm>
+            <a:off x="612648" y="3127248"/>
+            <a:ext cx="2194560" cy="512064"/>
+          </a:xfrm>
+          <a:prstGeom prst="rect">
+            <a:avLst/>
+          </a:prstGeom>
+          <a:noFill/>
+          <a:ln/>
+        </p:spPr>
+        <p:txBody>
+          <a:bodyPr wrap="square" lIns="0" tIns="0" rIns="0" bIns="0" rtlCol="0" anchor="ctr"/>
+          <a:lstStyle/>
+          <a:p>
+            <a:pPr indent="0" marL="0">
+              <a:buNone/>
+            </a:pPr>
+            <a:r>
+              <a:rPr lang="en-US" sz="1100" b="1" dirty="0">
+                <a:solidFill>
+                  <a:srgbClr val="16233B"/>
+                </a:solidFill>
+                <a:latin typeface="Calibri" pitchFamily="34" charset="0"/>
+                <a:ea typeface="Calibri" pitchFamily="34" charset="-122"/>
+                <a:cs typeface="Calibri" pitchFamily="34" charset="-120"/>
+              </a:rPr>
+              <a:t>Reopla · CRIF RES · Nomisma</a:t>
+            </a:r>
+            <a:endParaRPr lang="en-US" sz="1100" dirty="0"/>
+          </a:p>
+        </p:txBody>
+      </p:sp>
+      <p:sp>
+        <p:nvSpPr>
+          <p:cNvPr id="22" name="Text 20"/>
+          <p:cNvSpPr/>
+          <p:nvPr/>
+        </p:nvSpPr>
+        <p:spPr>
+          <a:xfrm>
+            <a:off x="2990088" y="3127248"/>
+            <a:ext cx="1463040" cy="512064"/>
+          </a:xfrm>
+          <a:prstGeom prst="rect">
+            <a:avLst/>
+          </a:prstGeom>
+          <a:noFill/>
+          <a:ln/>
+        </p:spPr>
+        <p:txBody>
+          <a:bodyPr wrap="square" lIns="0" tIns="0" rIns="0" bIns="0" rtlCol="0" anchor="ctr"/>
+          <a:lstStyle/>
+          <a:p>
+            <a:pPr indent="0" marL="0">
+              <a:buNone/>
+            </a:pPr>
+            <a:r>
+              <a:rPr lang="en-US" sz="1050" dirty="0">
+                <a:solidFill>
+                  <a:srgbClr val="5C6C87"/>
+                </a:solidFill>
+                <a:latin typeface="Calibri" pitchFamily="34" charset="0"/>
+                <a:ea typeface="Calibri" pitchFamily="34" charset="-122"/>
+                <a:cs typeface="Calibri" pitchFamily="34" charset="-120"/>
+              </a:rPr>
+              <a:t>AVM / valutazione</a:t>
+            </a:r>
+            <a:endParaRPr lang="en-US" sz="1050" dirty="0"/>
+          </a:p>
+        </p:txBody>
+      </p:sp>
+      <p:sp>
+        <p:nvSpPr>
+          <p:cNvPr id="23" name="Text 21"/>
+          <p:cNvSpPr/>
+          <p:nvPr/>
+        </p:nvSpPr>
+        <p:spPr>
+          <a:xfrm>
+            <a:off x="4636008" y="3127248"/>
+            <a:ext cx="2651760" cy="512064"/>
+          </a:xfrm>
+          <a:prstGeom prst="rect">
+            <a:avLst/>
+          </a:prstGeom>
+          <a:noFill/>
+          <a:ln/>
+        </p:spPr>
+        <p:txBody>
+          <a:bodyPr wrap="square" lIns="0" tIns="0" rIns="0" bIns="0" rtlCol="0" anchor="ctr"/>
+          <a:lstStyle/>
+          <a:p>
+            <a:pPr indent="0" marL="0">
+              <a:buNone/>
+            </a:pPr>
+            <a:r>
+              <a:rPr lang="en-US" sz="1050" dirty="0">
+                <a:solidFill>
+                  <a:srgbClr val="5C6C87"/>
+                </a:solidFill>
+                <a:latin typeface="Calibri" pitchFamily="34" charset="0"/>
+                <a:ea typeface="Calibri" pitchFamily="34" charset="-122"/>
+                <a:cs typeface="Calibri" pitchFamily="34" charset="-120"/>
+              </a:rPr>
+              <a:t>Stime automatiche accurate, a scala</a:t>
+            </a:r>
+            <a:endParaRPr lang="en-US" sz="1050" dirty="0"/>
+          </a:p>
+        </p:txBody>
+      </p:sp>
+      <p:sp>
+        <p:nvSpPr>
+          <p:cNvPr id="24" name="Text 22"/>
+          <p:cNvSpPr/>
+          <p:nvPr/>
+        </p:nvSpPr>
+        <p:spPr>
+          <a:xfrm>
+            <a:off x="7470648" y="3127248"/>
+            <a:ext cx="2514600" cy="512064"/>
+          </a:xfrm>
+          <a:prstGeom prst="rect">
+            <a:avLst/>
+          </a:prstGeom>
+          <a:noFill/>
+          <a:ln/>
+        </p:spPr>
+        <p:txBody>
+          <a:bodyPr wrap="square" lIns="0" tIns="0" rIns="0" bIns="0" rtlCol="0" anchor="ctr"/>
+          <a:lstStyle/>
+          <a:p>
+            <a:pPr indent="0" marL="0">
+              <a:buNone/>
+            </a:pPr>
+            <a:r>
+              <a:rPr lang="en-US" sz="1050" dirty="0">
+                <a:solidFill>
+                  <a:srgbClr val="5C6C87"/>
+                </a:solidFill>
+                <a:latin typeface="Calibri" pitchFamily="34" charset="0"/>
+                <a:ea typeface="Calibri" pitchFamily="34" charset="-122"/>
+                <a:cs typeface="Calibri" pitchFamily="34" charset="-120"/>
+              </a:rPr>
+              <a:t>Solo il prezzo, non conformità/titolo</a:t>
+            </a:r>
+            <a:endParaRPr lang="en-US" sz="1050" dirty="0"/>
+          </a:p>
+        </p:txBody>
+      </p:sp>
+      <p:sp>
+        <p:nvSpPr>
+          <p:cNvPr id="25" name="Text 23"/>
+          <p:cNvSpPr/>
+          <p:nvPr/>
+        </p:nvSpPr>
+        <p:spPr>
+          <a:xfrm>
+            <a:off x="10168128" y="3127248"/>
+            <a:ext cx="1463040" cy="512064"/>
+          </a:xfrm>
+          <a:prstGeom prst="rect">
+            <a:avLst/>
+          </a:prstGeom>
+          <a:noFill/>
+          <a:ln/>
+        </p:spPr>
+        <p:txBody>
+          <a:bodyPr wrap="square" lIns="0" tIns="0" rIns="0" bIns="0" rtlCol="0" anchor="ctr"/>
+          <a:lstStyle/>
+          <a:p>
+            <a:pPr indent="0" marL="0">
+              <a:buNone/>
+            </a:pPr>
+            <a:r>
+              <a:rPr lang="en-US" sz="1050" b="1" dirty="0">
+                <a:solidFill>
+                  <a:srgbClr val="C0563C"/>
+                </a:solidFill>
+                <a:latin typeface="Calibri" pitchFamily="34" charset="0"/>
+                <a:ea typeface="Calibri" pitchFamily="34" charset="-122"/>
+                <a:cs typeface="Calibri" pitchFamily="34" charset="-120"/>
+              </a:rPr>
+              <a:t>Media</a:t>
+            </a:r>
+            <a:endParaRPr lang="en-US" sz="1050" dirty="0"/>
+          </a:p>
+        </p:txBody>
+      </p:sp>
+      <p:sp>
+        <p:nvSpPr>
+          <p:cNvPr id="26" name="Shape 24"/>
+          <p:cNvSpPr/>
+          <p:nvPr/>
+        </p:nvSpPr>
+        <p:spPr>
+          <a:xfrm>
+            <a:off x="502920" y="3639312"/>
+            <a:ext cx="11155680" cy="512064"/>
+          </a:xfrm>
+          <a:prstGeom prst="roundRect">
+            <a:avLst>
+              <a:gd name="adj" fmla="val 3571"/>
+            </a:avLst>
+          </a:prstGeom>
+          <a:solidFill>
+            <a:srgbClr val="EEF3FA"/>
+          </a:solidFill>
+          <a:ln/>
+        </p:spPr>
+      </p:sp>
+      <p:sp>
+        <p:nvSpPr>
+          <p:cNvPr id="27" name="Text 25"/>
+          <p:cNvSpPr/>
+          <p:nvPr/>
+        </p:nvSpPr>
+        <p:spPr>
+          <a:xfrm>
+            <a:off x="612648" y="3639312"/>
+            <a:ext cx="2194560" cy="512064"/>
+          </a:xfrm>
+          <a:prstGeom prst="rect">
+            <a:avLst/>
+          </a:prstGeom>
+          <a:noFill/>
+          <a:ln/>
+        </p:spPr>
+        <p:txBody>
+          <a:bodyPr wrap="square" lIns="0" tIns="0" rIns="0" bIns="0" rtlCol="0" anchor="ctr"/>
+          <a:lstStyle/>
+          <a:p>
+            <a:pPr indent="0" marL="0">
+              <a:buNone/>
+            </a:pPr>
+            <a:r>
+              <a:rPr lang="en-US" sz="1100" b="1" dirty="0">
+                <a:solidFill>
+                  <a:srgbClr val="16233B"/>
+                </a:solidFill>
+                <a:latin typeface="Calibri" pitchFamily="34" charset="0"/>
+                <a:ea typeface="Calibri" pitchFamily="34" charset="-122"/>
+                <a:cs typeface="Calibri" pitchFamily="34" charset="-120"/>
+              </a:rPr>
+              <a:t>Studi geometri/architetti</a:t>
+            </a:r>
+            <a:endParaRPr lang="en-US" sz="1100" dirty="0"/>
+          </a:p>
+        </p:txBody>
+      </p:sp>
+      <p:sp>
+        <p:nvSpPr>
+          <p:cNvPr id="28" name="Text 26"/>
+          <p:cNvSpPr/>
+          <p:nvPr/>
+        </p:nvSpPr>
+        <p:spPr>
+          <a:xfrm>
+            <a:off x="2990088" y="3639312"/>
+            <a:ext cx="1463040" cy="512064"/>
+          </a:xfrm>
+          <a:prstGeom prst="rect">
+            <a:avLst/>
+          </a:prstGeom>
+          <a:noFill/>
+          <a:ln/>
+        </p:spPr>
+        <p:txBody>
+          <a:bodyPr wrap="square" lIns="0" tIns="0" rIns="0" bIns="0" rtlCol="0" anchor="ctr"/>
+          <a:lstStyle/>
+          <a:p>
+            <a:pPr indent="0" marL="0">
+              <a:buNone/>
+            </a:pPr>
+            <a:r>
+              <a:rPr lang="en-US" sz="1050" dirty="0">
+                <a:solidFill>
+                  <a:srgbClr val="5C6C87"/>
+                </a:solidFill>
+                <a:latin typeface="Calibri" pitchFamily="34" charset="0"/>
+                <a:ea typeface="Calibri" pitchFamily="34" charset="-122"/>
+                <a:cs typeface="Calibri" pitchFamily="34" charset="-120"/>
+              </a:rPr>
+              <a:t>DD tradizionale</a:t>
+            </a:r>
+            <a:endParaRPr lang="en-US" sz="1050" dirty="0"/>
+          </a:p>
+        </p:txBody>
+      </p:sp>
+      <p:sp>
+        <p:nvSpPr>
+          <p:cNvPr id="29" name="Text 27"/>
+          <p:cNvSpPr/>
+          <p:nvPr/>
+        </p:nvSpPr>
+        <p:spPr>
+          <a:xfrm>
+            <a:off x="4636008" y="3639312"/>
+            <a:ext cx="2651760" cy="512064"/>
+          </a:xfrm>
+          <a:prstGeom prst="rect">
+            <a:avLst/>
+          </a:prstGeom>
+          <a:noFill/>
+          <a:ln/>
+        </p:spPr>
+        <p:txBody>
+          <a:bodyPr wrap="square" lIns="0" tIns="0" rIns="0" bIns="0" rtlCol="0" anchor="ctr"/>
+          <a:lstStyle/>
+          <a:p>
+            <a:pPr indent="0" marL="0">
+              <a:buNone/>
+            </a:pPr>
+            <a:r>
+              <a:rPr lang="en-US" sz="1050" dirty="0">
+                <a:solidFill>
+                  <a:srgbClr val="5C6C87"/>
+                </a:solidFill>
+                <a:latin typeface="Calibri" pitchFamily="34" charset="0"/>
+                <a:ea typeface="Calibri" pitchFamily="34" charset="-122"/>
+                <a:cs typeface="Calibri" pitchFamily="34" charset="-120"/>
+              </a:rPr>
+              <a:t>Competenza normativa profonda</a:t>
+            </a:r>
+            <a:endParaRPr lang="en-US" sz="1050" dirty="0"/>
+          </a:p>
+        </p:txBody>
+      </p:sp>
+      <p:sp>
+        <p:nvSpPr>
+          <p:cNvPr id="30" name="Text 28"/>
+          <p:cNvSpPr/>
+          <p:nvPr/>
+        </p:nvSpPr>
+        <p:spPr>
+          <a:xfrm>
+            <a:off x="7470648" y="3639312"/>
+            <a:ext cx="2514600" cy="512064"/>
+          </a:xfrm>
+          <a:prstGeom prst="rect">
+            <a:avLst/>
+          </a:prstGeom>
+          <a:noFill/>
+          <a:ln/>
+        </p:spPr>
+        <p:txBody>
+          <a:bodyPr wrap="square" lIns="0" tIns="0" rIns="0" bIns="0" rtlCol="0" anchor="ctr"/>
+          <a:lstStyle/>
+          <a:p>
+            <a:pPr indent="0" marL="0">
+              <a:buNone/>
+            </a:pPr>
+            <a:r>
+              <a:rPr lang="en-US" sz="1050" dirty="0">
+                <a:solidFill>
+                  <a:srgbClr val="5C6C87"/>
+                </a:solidFill>
+                <a:latin typeface="Calibri" pitchFamily="34" charset="0"/>
+                <a:ea typeface="Calibri" pitchFamily="34" charset="-122"/>
+                <a:cs typeface="Calibri" pitchFamily="34" charset="-120"/>
+              </a:rPr>
+              <a:t>Manuale, frammentata, non AI-native</a:t>
+            </a:r>
+            <a:endParaRPr lang="en-US" sz="1050" dirty="0"/>
+          </a:p>
+        </p:txBody>
+      </p:sp>
+      <p:sp>
+        <p:nvSpPr>
+          <p:cNvPr id="31" name="Text 29"/>
+          <p:cNvSpPr/>
+          <p:nvPr/>
+        </p:nvSpPr>
+        <p:spPr>
+          <a:xfrm>
+            <a:off x="10168128" y="3639312"/>
+            <a:ext cx="1463040" cy="512064"/>
+          </a:xfrm>
+          <a:prstGeom prst="rect">
+            <a:avLst/>
+          </a:prstGeom>
+          <a:noFill/>
+          <a:ln/>
+        </p:spPr>
+        <p:txBody>
+          <a:bodyPr wrap="square" lIns="0" tIns="0" rIns="0" bIns="0" rtlCol="0" anchor="ctr"/>
+          <a:lstStyle/>
+          <a:p>
+            <a:pPr indent="0" marL="0">
+              <a:buNone/>
+            </a:pPr>
+            <a:r>
+              <a:rPr lang="en-US" sz="1050" b="1" dirty="0">
+                <a:solidFill>
+                  <a:srgbClr val="3E8E5A"/>
+                </a:solidFill>
+                <a:latin typeface="Calibri" pitchFamily="34" charset="0"/>
+                <a:ea typeface="Calibri" pitchFamily="34" charset="-122"/>
+                <a:cs typeface="Calibri" pitchFamily="34" charset="-120"/>
+              </a:rPr>
+              <a:t>Bassa</a:t>
+            </a:r>
+            <a:endParaRPr lang="en-US" sz="1050" dirty="0"/>
+          </a:p>
+        </p:txBody>
+      </p:sp>
+      <p:sp>
+        <p:nvSpPr>
+          <p:cNvPr id="32" name="Text 30"/>
+          <p:cNvSpPr/>
+          <p:nvPr/>
+        </p:nvSpPr>
+        <p:spPr>
+          <a:xfrm>
+            <a:off x="612648" y="4151376"/>
+            <a:ext cx="2194560" cy="512064"/>
+          </a:xfrm>
+          <a:prstGeom prst="rect">
+            <a:avLst/>
+          </a:prstGeom>
+          <a:noFill/>
+          <a:ln/>
+        </p:spPr>
+        <p:txBody>
+          <a:bodyPr wrap="square" lIns="0" tIns="0" rIns="0" bIns="0" rtlCol="0" anchor="ctr"/>
+          <a:lstStyle/>
+          <a:p>
+            <a:pPr indent="0" marL="0">
+              <a:buNone/>
+            </a:pPr>
+            <a:r>
+              <a:rPr lang="en-US" sz="1100" b="1" dirty="0">
+                <a:solidFill>
+                  <a:srgbClr val="16233B"/>
+                </a:solidFill>
+                <a:latin typeface="Calibri" pitchFamily="34" charset="0"/>
+                <a:ea typeface="Calibri" pitchFamily="34" charset="-122"/>
+                <a:cs typeface="Calibri" pitchFamily="34" charset="-120"/>
+              </a:rPr>
+              <a:t>Deepki · piattaforme retrofit</a:t>
+            </a:r>
+            <a:endParaRPr lang="en-US" sz="1100" dirty="0"/>
+          </a:p>
+        </p:txBody>
+      </p:sp>
+      <p:sp>
+        <p:nvSpPr>
+          <p:cNvPr id="33" name="Text 31"/>
+          <p:cNvSpPr/>
+          <p:nvPr/>
+        </p:nvSpPr>
+        <p:spPr>
+          <a:xfrm>
+            <a:off x="2990088" y="4151376"/>
+            <a:ext cx="1463040" cy="512064"/>
+          </a:xfrm>
+          <a:prstGeom prst="rect">
+            <a:avLst/>
+          </a:prstGeom>
+          <a:noFill/>
+          <a:ln/>
+        </p:spPr>
+        <p:txBody>
+          <a:bodyPr wrap="square" lIns="0" tIns="0" rIns="0" bIns="0" rtlCol="0" anchor="ctr"/>
+          <a:lstStyle/>
+          <a:p>
+            <a:pPr indent="0" marL="0">
+              <a:buNone/>
+            </a:pPr>
+            <a:r>
+              <a:rPr lang="en-US" sz="1050" dirty="0">
+                <a:solidFill>
+                  <a:srgbClr val="5C6C87"/>
+                </a:solidFill>
+                <a:latin typeface="Calibri" pitchFamily="34" charset="0"/>
+                <a:ea typeface="Calibri" pitchFamily="34" charset="-122"/>
+                <a:cs typeface="Calibri" pitchFamily="34" charset="-120"/>
+              </a:rPr>
+              <a:t>Energy / Case Green</a:t>
+            </a:r>
+            <a:endParaRPr lang="en-US" sz="1050" dirty="0"/>
+          </a:p>
+        </p:txBody>
+      </p:sp>
+      <p:sp>
+        <p:nvSpPr>
+          <p:cNvPr id="34" name="Text 32"/>
+          <p:cNvSpPr/>
+          <p:nvPr/>
+        </p:nvSpPr>
+        <p:spPr>
+          <a:xfrm>
+            <a:off x="4636008" y="4151376"/>
+            <a:ext cx="2651760" cy="512064"/>
+          </a:xfrm>
+          <a:prstGeom prst="rect">
+            <a:avLst/>
+          </a:prstGeom>
+          <a:noFill/>
+          <a:ln/>
+        </p:spPr>
+        <p:txBody>
+          <a:bodyPr wrap="square" lIns="0" tIns="0" rIns="0" bIns="0" rtlCol="0" anchor="ctr"/>
+          <a:lstStyle/>
+          <a:p>
+            <a:pPr indent="0" marL="0">
+              <a:buNone/>
+            </a:pPr>
+            <a:r>
+              <a:rPr lang="en-US" sz="1050" dirty="0">
+                <a:solidFill>
+                  <a:srgbClr val="5C6C87"/>
+                </a:solidFill>
+                <a:latin typeface="Calibri" pitchFamily="34" charset="0"/>
+                <a:ea typeface="Calibri" pitchFamily="34" charset="-122"/>
+                <a:cs typeface="Calibri" pitchFamily="34" charset="-120"/>
+              </a:rPr>
+              <a:t>Dati energetici e ristrutturazione</a:t>
+            </a:r>
+            <a:endParaRPr lang="en-US" sz="1050" dirty="0"/>
+          </a:p>
+        </p:txBody>
+      </p:sp>
+      <p:sp>
+        <p:nvSpPr>
+          <p:cNvPr id="35" name="Text 33"/>
+          <p:cNvSpPr/>
+          <p:nvPr/>
+        </p:nvSpPr>
+        <p:spPr>
+          <a:xfrm>
+            <a:off x="7470648" y="4151376"/>
+            <a:ext cx="2514600" cy="512064"/>
+          </a:xfrm>
+          <a:prstGeom prst="rect">
+            <a:avLst/>
+          </a:prstGeom>
+          <a:noFill/>
+          <a:ln/>
+        </p:spPr>
+        <p:txBody>
+          <a:bodyPr wrap="square" lIns="0" tIns="0" rIns="0" bIns="0" rtlCol="0" anchor="ctr"/>
+          <a:lstStyle/>
+          <a:p>
+            <a:pPr indent="0" marL="0">
+              <a:buNone/>
+            </a:pPr>
+            <a:r>
+              <a:rPr lang="en-US" sz="1050" dirty="0">
+                <a:solidFill>
+                  <a:srgbClr val="5C6C87"/>
+                </a:solidFill>
+                <a:latin typeface="Calibri" pitchFamily="34" charset="0"/>
+                <a:ea typeface="Calibri" pitchFamily="34" charset="-122"/>
+                <a:cs typeface="Calibri" pitchFamily="34" charset="-120"/>
+              </a:rPr>
+              <a:t>Non toccano titolo né transazione</a:t>
+            </a:r>
+            <a:endParaRPr lang="en-US" sz="1050" dirty="0"/>
+          </a:p>
+        </p:txBody>
+      </p:sp>
+      <p:sp>
+        <p:nvSpPr>
+          <p:cNvPr id="36" name="Text 34"/>
+          <p:cNvSpPr/>
+          <p:nvPr/>
+        </p:nvSpPr>
+        <p:spPr>
+          <a:xfrm>
+            <a:off x="10168128" y="4151376"/>
+            <a:ext cx="1463040" cy="512064"/>
+          </a:xfrm>
+          <a:prstGeom prst="rect">
+            <a:avLst/>
+          </a:prstGeom>
+          <a:noFill/>
+          <a:ln/>
+        </p:spPr>
+        <p:txBody>
+          <a:bodyPr wrap="square" lIns="0" tIns="0" rIns="0" bIns="0" rtlCol="0" anchor="ctr"/>
+          <a:lstStyle/>
+          <a:p>
+            <a:pPr indent="0" marL="0">
+              <a:buNone/>
+            </a:pPr>
+            <a:r>
+              <a:rPr lang="en-US" sz="1050" b="1" dirty="0">
+                <a:solidFill>
+                  <a:srgbClr val="3E8E5A"/>
+                </a:solidFill>
+                <a:latin typeface="Calibri" pitchFamily="34" charset="0"/>
+                <a:ea typeface="Calibri" pitchFamily="34" charset="-122"/>
+                <a:cs typeface="Calibri" pitchFamily="34" charset="-120"/>
+              </a:rPr>
+              <a:t>Bassa</a:t>
+            </a:r>
+            <a:endParaRPr lang="en-US" sz="1050" dirty="0"/>
+          </a:p>
+        </p:txBody>
+      </p:sp>
+      <p:sp>
+        <p:nvSpPr>
+          <p:cNvPr id="37" name="Shape 35"/>
+          <p:cNvSpPr/>
+          <p:nvPr/>
+        </p:nvSpPr>
+        <p:spPr>
+          <a:xfrm>
+            <a:off x="502920" y="4663440"/>
+            <a:ext cx="11155680" cy="512064"/>
+          </a:xfrm>
+          <a:prstGeom prst="roundRect">
+            <a:avLst>
+              <a:gd name="adj" fmla="val 3571"/>
+            </a:avLst>
+          </a:prstGeom>
+          <a:solidFill>
+            <a:srgbClr val="EEF3FA"/>
+          </a:solidFill>
+          <a:ln/>
+        </p:spPr>
+      </p:sp>
+      <p:sp>
+        <p:nvSpPr>
+          <p:cNvPr id="38" name="Text 36"/>
+          <p:cNvSpPr/>
+          <p:nvPr/>
+        </p:nvSpPr>
+        <p:spPr>
+          <a:xfrm>
+            <a:off x="612648" y="4663440"/>
+            <a:ext cx="2194560" cy="512064"/>
+          </a:xfrm>
+          <a:prstGeom prst="rect">
+            <a:avLst/>
+          </a:prstGeom>
+          <a:noFill/>
+          <a:ln/>
+        </p:spPr>
+        <p:txBody>
+          <a:bodyPr wrap="square" lIns="0" tIns="0" rIns="0" bIns="0" rtlCol="0" anchor="ctr"/>
+          <a:lstStyle/>
+          <a:p>
+            <a:pPr indent="0" marL="0">
+              <a:buNone/>
+            </a:pPr>
+            <a:r>
+              <a:rPr lang="en-US" sz="1100" b="1" dirty="0">
+                <a:solidFill>
+                  <a:srgbClr val="16233B"/>
+                </a:solidFill>
+                <a:latin typeface="Calibri" pitchFamily="34" charset="0"/>
+                <a:ea typeface="Calibri" pitchFamily="34" charset="-122"/>
+                <a:cs typeface="Calibri" pitchFamily="34" charset="-120"/>
+              </a:rPr>
+              <a:t>Orbital (UK)</a:t>
+            </a:r>
+            <a:endParaRPr lang="en-US" sz="1100" dirty="0"/>
+          </a:p>
+        </p:txBody>
+      </p:sp>
+      <p:sp>
+        <p:nvSpPr>
+          <p:cNvPr id="39" name="Text 37"/>
+          <p:cNvSpPr/>
+          <p:nvPr/>
+        </p:nvSpPr>
+        <p:spPr>
+          <a:xfrm>
+            <a:off x="2990088" y="4663440"/>
+            <a:ext cx="1463040" cy="512064"/>
+          </a:xfrm>
+          <a:prstGeom prst="rect">
+            <a:avLst/>
+          </a:prstGeom>
+          <a:noFill/>
+          <a:ln/>
+        </p:spPr>
+        <p:txBody>
+          <a:bodyPr wrap="square" lIns="0" tIns="0" rIns="0" bIns="0" rtlCol="0" anchor="ctr"/>
+          <a:lstStyle/>
+          <a:p>
+            <a:pPr indent="0" marL="0">
+              <a:buNone/>
+            </a:pPr>
+            <a:r>
+              <a:rPr lang="en-US" sz="1050" dirty="0">
+                <a:solidFill>
+                  <a:srgbClr val="5C6C87"/>
+                </a:solidFill>
+                <a:latin typeface="Calibri" pitchFamily="34" charset="0"/>
+                <a:ea typeface="Calibri" pitchFamily="34" charset="-122"/>
+                <a:cs typeface="Calibri" pitchFamily="34" charset="-120"/>
+              </a:rPr>
+              <a:t>AI DD legale RE</a:t>
+            </a:r>
+            <a:endParaRPr lang="en-US" sz="1050" dirty="0"/>
+          </a:p>
+        </p:txBody>
+      </p:sp>
+      <p:sp>
+        <p:nvSpPr>
+          <p:cNvPr id="40" name="Text 38"/>
+          <p:cNvSpPr/>
+          <p:nvPr/>
+        </p:nvSpPr>
+        <p:spPr>
+          <a:xfrm>
+            <a:off x="4636008" y="4663440"/>
+            <a:ext cx="2651760" cy="512064"/>
+          </a:xfrm>
+          <a:prstGeom prst="rect">
+            <a:avLst/>
+          </a:prstGeom>
+          <a:noFill/>
+          <a:ln/>
+        </p:spPr>
+        <p:txBody>
+          <a:bodyPr wrap="square" lIns="0" tIns="0" rIns="0" bIns="0" rtlCol="0" anchor="ctr"/>
+          <a:lstStyle/>
+          <a:p>
+            <a:pPr indent="0" marL="0">
+              <a:buNone/>
+            </a:pPr>
+            <a:r>
+              <a:rPr lang="en-US" sz="1050" dirty="0">
+                <a:solidFill>
+                  <a:srgbClr val="5C6C87"/>
+                </a:solidFill>
+                <a:latin typeface="Calibri" pitchFamily="34" charset="0"/>
+                <a:ea typeface="Calibri" pitchFamily="34" charset="-122"/>
+                <a:cs typeface="Calibri" pitchFamily="34" charset="-120"/>
+              </a:rPr>
+              <a:t>$60M Series B; 200k transazioni/anno</a:t>
+            </a:r>
+            <a:endParaRPr lang="en-US" sz="1050" dirty="0"/>
+          </a:p>
+        </p:txBody>
+      </p:sp>
+      <p:sp>
+        <p:nvSpPr>
+          <p:cNvPr id="41" name="Text 39"/>
+          <p:cNvSpPr/>
+          <p:nvPr/>
+        </p:nvSpPr>
+        <p:spPr>
+          <a:xfrm>
+            <a:off x="7470648" y="4663440"/>
+            <a:ext cx="2514600" cy="512064"/>
+          </a:xfrm>
+          <a:prstGeom prst="rect">
+            <a:avLst/>
+          </a:prstGeom>
+          <a:noFill/>
+          <a:ln/>
+        </p:spPr>
+        <p:txBody>
+          <a:bodyPr wrap="square" lIns="0" tIns="0" rIns="0" bIns="0" rtlCol="0" anchor="ctr"/>
+          <a:lstStyle/>
+          <a:p>
+            <a:pPr indent="0" marL="0">
+              <a:buNone/>
+            </a:pPr>
+            <a:r>
+              <a:rPr lang="en-US" sz="1050" dirty="0">
+                <a:solidFill>
+                  <a:srgbClr val="5C6C87"/>
+                </a:solidFill>
+                <a:latin typeface="Calibri" pitchFamily="34" charset="0"/>
+                <a:ea typeface="Calibri" pitchFamily="34" charset="-122"/>
+                <a:cs typeface="Calibri" pitchFamily="34" charset="-120"/>
+              </a:rPr>
+              <a:t>Focus UK/US; catasto e conformità IT non replicabili</a:t>
+            </a:r>
+            <a:endParaRPr lang="en-US" sz="1050" dirty="0"/>
+          </a:p>
+        </p:txBody>
+      </p:sp>
+      <p:sp>
+        <p:nvSpPr>
+          <p:cNvPr id="42" name="Text 40"/>
+          <p:cNvSpPr/>
+          <p:nvPr/>
+        </p:nvSpPr>
+        <p:spPr>
+          <a:xfrm>
+            <a:off x="10168128" y="4663440"/>
+            <a:ext cx="1463040" cy="512064"/>
+          </a:xfrm>
+          <a:prstGeom prst="rect">
+            <a:avLst/>
+          </a:prstGeom>
+          <a:noFill/>
+          <a:ln/>
+        </p:spPr>
+        <p:txBody>
+          <a:bodyPr wrap="square" lIns="0" tIns="0" rIns="0" bIns="0" rtlCol="0" anchor="ctr"/>
+          <a:lstStyle/>
+          <a:p>
+            <a:pPr indent="0" marL="0">
+              <a:buNone/>
+            </a:pPr>
+            <a:r>
+              <a:rPr lang="en-US" sz="1050" b="1" dirty="0">
+                <a:solidFill>
+                  <a:srgbClr val="C0563C"/>
+                </a:solidFill>
+                <a:latin typeface="Calibri" pitchFamily="34" charset="0"/>
+                <a:ea typeface="Calibri" pitchFamily="34" charset="-122"/>
+                <a:cs typeface="Calibri" pitchFamily="34" charset="-120"/>
+              </a:rPr>
+              <a:t>Futura</a:t>
+            </a:r>
+            <a:endParaRPr lang="en-US" sz="1050" dirty="0"/>
+          </a:p>
+        </p:txBody>
+      </p:sp>
+      <p:sp>
+        <p:nvSpPr>
+          <p:cNvPr id="43" name="Shape 41"/>
+          <p:cNvSpPr/>
+          <p:nvPr/>
+        </p:nvSpPr>
+        <p:spPr>
+          <a:xfrm>
+            <a:off x="502920" y="5285232"/>
+            <a:ext cx="11155680" cy="566928"/>
+          </a:xfrm>
+          <a:prstGeom prst="roundRect">
+            <a:avLst>
+              <a:gd name="adj" fmla="val 9677"/>
+            </a:avLst>
+          </a:prstGeom>
+          <a:solidFill>
+            <a:srgbClr val="0E1E38"/>
+          </a:solidFill>
+          <a:ln/>
+        </p:spPr>
+      </p:sp>
+      <p:sp>
+        <p:nvSpPr>
+          <p:cNvPr id="44" name="Text 42"/>
+          <p:cNvSpPr/>
+          <p:nvPr/>
+        </p:nvSpPr>
+        <p:spPr>
+          <a:xfrm>
+            <a:off x="731520" y="5285232"/>
+            <a:ext cx="10972800" cy="566928"/>
+          </a:xfrm>
+          <a:prstGeom prst="rect">
+            <a:avLst/>
+          </a:prstGeom>
+          <a:noFill/>
+          <a:ln/>
+        </p:spPr>
+        <p:txBody>
+          <a:bodyPr wrap="square" lIns="0" tIns="0" rIns="0" bIns="0" rtlCol="0" anchor="ctr"/>
+          <a:lstStyle/>
+          <a:p>
+            <a:pPr indent="0" marL="0">
+              <a:buNone/>
+            </a:pPr>
+            <a:r>
+              <a:rPr lang="en-US" sz="1300" b="1" dirty="0">
+                <a:solidFill>
+                  <a:srgbClr val="E8A33D"/>
+                </a:solidFill>
+                <a:latin typeface="Calibri" pitchFamily="34" charset="0"/>
+                <a:ea typeface="Calibri" pitchFamily="34" charset="-122"/>
+                <a:cs typeface="Calibri" pitchFamily="34" charset="-120"/>
+              </a:rPr>
+              <a:t>Il quadrante conformità-AI su dati italiani è vuoto: </a:t>
+            </a:r>
+            <a:pPr indent="0" marL="0">
+              <a:buNone/>
+            </a:pPr>
+            <a:r>
+              <a:rPr lang="en-US" sz="1300" dirty="0">
+                <a:solidFill>
+                  <a:srgbClr val="EAF1FA"/>
+                </a:solidFill>
+                <a:latin typeface="Calibri" pitchFamily="34" charset="0"/>
+                <a:ea typeface="Calibri" pitchFamily="34" charset="-122"/>
+                <a:cs typeface="Calibri" pitchFamily="34" charset="-120"/>
+              </a:rPr>
+              <a:t>chi lo occupa per primo costruisce il data-moat che lo blinda, e diventa il layer su cui poggiano tutti gli altri.</a:t>
+            </a:r>
+            <a:endParaRPr lang="en-US" sz="1300" dirty="0"/>
+          </a:p>
+        </p:txBody>
+      </p:sp>
+      <p:sp>
+        <p:nvSpPr>
+          <p:cNvPr id="45" name="Text 43"/>
+          <p:cNvSpPr/>
+          <p:nvPr/>
+        </p:nvSpPr>
+        <p:spPr>
+          <a:xfrm>
+            <a:off x="502920" y="5998464"/>
+            <a:ext cx="11155680" cy="274320"/>
+          </a:xfrm>
+          <a:prstGeom prst="rect">
+            <a:avLst/>
+          </a:prstGeom>
+          <a:noFill/>
+          <a:ln/>
+        </p:spPr>
+        <p:txBody>
+          <a:bodyPr wrap="square" lIns="0" tIns="0" rIns="0" bIns="0" rtlCol="0" anchor="ctr"/>
+          <a:lstStyle/>
+          <a:p>
+            <a:pPr indent="0" marL="0">
+              <a:buNone/>
+            </a:pPr>
+            <a:r>
+              <a:rPr lang="en-US" sz="900" dirty="0">
+                <a:solidFill>
+                  <a:srgbClr val="5C6C87"/>
+                </a:solidFill>
+                <a:latin typeface="Calibri" pitchFamily="34" charset="0"/>
+                <a:ea typeface="Calibri" pitchFamily="34" charset="-122"/>
+                <a:cs typeface="Calibri" pitchFamily="34" charset="-120"/>
+              </a:rPr>
+              <a:t>Fonti: EU-Startups / Brighton Park (Orbital, Series B 2026); Economyup / Silicon Canals (Casavo, Reopla); CRIF RES. Dati a inizio 2026.</a:t>
+            </a:r>
+            <a:endParaRPr lang="en-US" sz="900" dirty="0"/>
+          </a:p>
+        </p:txBody>
+      </p:sp>
+      <p:sp>
+        <p:nvSpPr>
+          <p:cNvPr id="46" name="Text 44"/>
+          <p:cNvSpPr/>
+          <p:nvPr/>
+        </p:nvSpPr>
+        <p:spPr>
+          <a:xfrm>
+            <a:off x="11338560" y="6355080"/>
+            <a:ext cx="457200" cy="274320"/>
+          </a:xfrm>
+          <a:prstGeom prst="rect">
+            <a:avLst/>
+          </a:prstGeom>
+          <a:noFill/>
+          <a:ln/>
+        </p:spPr>
+        <p:txBody>
+          <a:bodyPr wrap="square" lIns="0" tIns="0" rIns="0" bIns="0" rtlCol="0" anchor="ctr"/>
+          <a:lstStyle/>
+          <a:p>
+            <a:pPr algn="r" indent="0" marL="0">
+              <a:buNone/>
+            </a:pPr>
+            <a:r>
+              <a:rPr lang="en-US" sz="1000" dirty="0">
+                <a:solidFill>
+                  <a:srgbClr val="5C6C87"/>
+                </a:solidFill>
+                <a:latin typeface="Calibri" pitchFamily="34" charset="0"/>
+                <a:ea typeface="Calibri" pitchFamily="34" charset="-122"/>
+                <a:cs typeface="Calibri" pitchFamily="34" charset="-120"/>
+              </a:rPr>
+              <a:t>10</a:t>
+            </a:r>
+            <a:endParaRPr lang="en-US" sz="1000" dirty="0"/>
+          </a:p>
+        </p:txBody>
+      </p:sp>
+      <p:sp>
+        <p:nvSpPr>
+          <p:cNvPr id="47" name="Text 45"/>
+          <p:cNvSpPr/>
+          <p:nvPr/>
+        </p:nvSpPr>
+        <p:spPr>
+          <a:xfrm>
+            <a:off x="548640" y="6355080"/>
+            <a:ext cx="2743200" cy="274320"/>
+          </a:xfrm>
+          <a:prstGeom prst="rect">
+            <a:avLst/>
+          </a:prstGeom>
+          <a:noFill/>
+          <a:ln/>
+        </p:spPr>
+        <p:txBody>
+          <a:bodyPr wrap="square" lIns="0" tIns="0" rIns="0" bIns="0" rtlCol="0" anchor="ctr"/>
+          <a:lstStyle/>
+          <a:p>
+            <a:pPr algn="l" indent="0" marL="0">
+              <a:buNone/>
+            </a:pPr>
+            <a:r>
+              <a:rPr lang="en-US" sz="1000" b="1" spc="200" kern="0" dirty="0">
+                <a:solidFill>
+                  <a:srgbClr val="5C6C87"/>
+                </a:solidFill>
+                <a:latin typeface="Calibri" pitchFamily="34" charset="0"/>
+                <a:ea typeface="Calibri" pitchFamily="34" charset="-122"/>
+                <a:cs typeface="Calibri" pitchFamily="34" charset="-120"/>
+              </a:rPr>
+              <a:t>CONFORME</a:t>
+            </a:r>
+            <a:endParaRPr lang="en-US" sz="1000" dirty="0"/>
+          </a:p>
+        </p:txBody>
+      </p:sp>
+    </p:spTree>
+  </p:cSld>
+  <p:clrMapOvr>
+    <a:masterClrMapping/>
+  </p:clrMapOvr>
+</p:sld>
+</file>
+
+<file path=ppt/slides/slide11.xml><?xml version="1.0" encoding="utf-8"?>
+<p:sld xmlns:a="http://schemas.openxmlformats.org/drawingml/2006/main" xmlns:r="http://schemas.openxmlformats.org/officeDocument/2006/relationships" xmlns:p="http://schemas.openxmlformats.org/presentationml/2006/main">
+  <p:cSld name="Slide 11">
     <p:bg>
       <p:bgPr>
         <a:solidFill>
@@ -2695,7 +4717,7 @@
         </p:nvSpPr>
         <p:spPr>
           <a:xfrm>
-            <a:off x="548640" y="502920"/>
+            <a:off x="548640" y="457200"/>
             <a:ext cx="5486400" cy="274320"/>
           </a:xfrm>
           <a:prstGeom prst="rect">
@@ -2720,7 +4742,7 @@
                 <a:ea typeface="Calibri" pitchFamily="34" charset="-122"/>
                 <a:cs typeface="Calibri" pitchFamily="34" charset="-120"/>
               </a:rPr>
-              <a:t>PERCHÉ NOI</a:t>
+              <a:t>VALIDAZIONE INTERNAZIONALE</a:t>
             </a:r>
             <a:endParaRPr lang="en-US" sz="1200" dirty="0"/>
           </a:p>
@@ -2734,24 +4756,24 @@
         </p:nvSpPr>
         <p:spPr>
           <a:xfrm>
-            <a:off x="502920" y="822960"/>
-            <a:ext cx="11155680" cy="1097280"/>
-          </a:xfrm>
-          <a:prstGeom prst="rect">
-            <a:avLst/>
-          </a:prstGeom>
-          <a:noFill/>
-          <a:ln/>
-        </p:spPr>
-        <p:txBody>
-          <a:bodyPr wrap="square" lIns="0" tIns="0" rIns="0" bIns="0" rtlCol="0" anchor="ctr"/>
-          <a:lstStyle/>
-          <a:p>
-            <a:pPr indent="0" marL="0">
-              <a:buNone/>
-            </a:pPr>
-            <a:r>
-              <a:rPr lang="en-US" sz="2600" b="1" dirty="0">
+            <a:off x="502920" y="713232"/>
+            <a:ext cx="11155680" cy="914400"/>
+          </a:xfrm>
+          <a:prstGeom prst="rect">
+            <a:avLst/>
+          </a:prstGeom>
+          <a:noFill/>
+          <a:ln/>
+        </p:spPr>
+        <p:txBody>
+          <a:bodyPr wrap="square" lIns="0" tIns="0" rIns="0" bIns="0" rtlCol="0" anchor="ctr"/>
+          <a:lstStyle/>
+          <a:p>
+            <a:pPr indent="0" marL="0">
+              <a:buNone/>
+            </a:pPr>
+            <a:r>
+              <a:rPr lang="en-US" sz="2500" b="1" dirty="0">
                 <a:solidFill>
                   <a:srgbClr val="FFFFFF"/>
                 </a:solidFill>
@@ -2759,26 +4781,65 @@
                 <a:ea typeface="Cambria" pitchFamily="34" charset="-122"/>
                 <a:cs typeface="Cambria" pitchFamily="34" charset="-120"/>
               </a:rPr>
-              <a:t>Non scommettiamo sull'AI da costruire. Verticalizziamo una piattaforma che già esiste.</a:t>
-            </a:r>
-            <a:endParaRPr lang="en-US" sz="2600" dirty="0"/>
-          </a:p>
-        </p:txBody>
-      </p:sp>
-      <p:sp>
-        <p:nvSpPr>
-          <p:cNvPr id="4" name="Shape 2"/>
-          <p:cNvSpPr/>
-          <p:nvPr/>
-        </p:nvSpPr>
-        <p:spPr>
-          <a:xfrm>
-            <a:off x="502920" y="2468880"/>
-            <a:ext cx="5852160" cy="1097280"/>
+              <a:t>Il modello funziona già all'estero. In Italia il campo è aperto.</a:t>
+            </a:r>
+            <a:endParaRPr lang="en-US" sz="2500" dirty="0"/>
+          </a:p>
+        </p:txBody>
+      </p:sp>
+      <p:sp>
+        <p:nvSpPr>
+          <p:cNvPr id="4" name="Text 2"/>
+          <p:cNvSpPr/>
+          <p:nvPr/>
+        </p:nvSpPr>
+        <p:spPr>
+          <a:xfrm>
+            <a:off x="502920" y="1755648"/>
+            <a:ext cx="11155680" cy="365760"/>
+          </a:xfrm>
+          <a:prstGeom prst="rect">
+            <a:avLst/>
+          </a:prstGeom>
+          <a:noFill/>
+          <a:ln/>
+        </p:spPr>
+        <p:txBody>
+          <a:bodyPr wrap="square" lIns="0" tIns="0" rIns="0" bIns="0" rtlCol="0" anchor="ctr"/>
+          <a:lstStyle/>
+          <a:p>
+            <a:pPr indent="0" marL="0">
+              <a:buNone/>
+            </a:pPr>
+            <a:r>
+              <a:rPr lang="en-US" sz="1400" dirty="0">
+                <a:solidFill>
+                  <a:srgbClr val="9DB0CC"/>
+                </a:solidFill>
+                <a:latin typeface="Calibri" pitchFamily="34" charset="0"/>
+                <a:ea typeface="Calibri" pitchFamily="34" charset="-122"/>
+                <a:cs typeface="Calibri" pitchFamily="34" charset="-120"/>
+              </a:rPr>
+              <a:t>Chi digitalizza conformità e transazione immobiliare, fuori dall'Italia, diventa unicorno o monopolio quotato.</a:t>
+            </a:r>
+            <a:endParaRPr lang="en-US" sz="1400" dirty="0"/>
+          </a:p>
+        </p:txBody>
+      </p:sp>
+      <p:sp>
+        <p:nvSpPr>
+          <p:cNvPr id="5" name="Shape 3"/>
+          <p:cNvSpPr/>
+          <p:nvPr/>
+        </p:nvSpPr>
+        <p:spPr>
+          <a:xfrm>
+            <a:off x="502920" y="2286000"/>
+            <a:ext cx="3611880" cy="2606040"/>
           </a:xfrm>
           <a:prstGeom prst="roundRect">
             <a:avLst>
-              <a:gd name="adj" fmla="val 7500"/>
+              <a:gd name="adj" fmla="val 3509"/>
             </a:avLst>
           </a:prstGeom>
           <a:solidFill>
@@ -2794,69 +4855,147 @@
       </p:sp>
       <p:sp>
         <p:nvSpPr>
-          <p:cNvPr id="5" name="Text 3"/>
-          <p:cNvSpPr/>
-          <p:nvPr/>
-        </p:nvSpPr>
-        <p:spPr>
-          <a:xfrm>
-            <a:off x="777240" y="2615184"/>
-            <a:ext cx="5303520" cy="411480"/>
-          </a:xfrm>
-          <a:prstGeom prst="rect">
-            <a:avLst/>
-          </a:prstGeom>
-          <a:noFill/>
-          <a:ln/>
-        </p:spPr>
-        <p:txBody>
-          <a:bodyPr wrap="square" lIns="0" tIns="0" rIns="0" bIns="0" rtlCol="0" anchor="ctr"/>
-          <a:lstStyle/>
-          <a:p>
-            <a:pPr indent="0" marL="0">
-              <a:buNone/>
-            </a:pPr>
-            <a:r>
-              <a:rPr lang="en-US" sz="1800" b="1" dirty="0">
+          <p:cNvPr id="6" name="Text 4"/>
+          <p:cNvSpPr/>
+          <p:nvPr/>
+        </p:nvSpPr>
+        <p:spPr>
+          <a:xfrm>
+            <a:off x="731520" y="2496312"/>
+            <a:ext cx="3108960" cy="274320"/>
+          </a:xfrm>
+          <a:prstGeom prst="rect">
+            <a:avLst/>
+          </a:prstGeom>
+          <a:noFill/>
+          <a:ln/>
+        </p:spPr>
+        <p:txBody>
+          <a:bodyPr wrap="square" lIns="0" tIns="0" rIns="0" bIns="0" rtlCol="0" anchor="ctr"/>
+          <a:lstStyle/>
+          <a:p>
+            <a:pPr indent="0" marL="0">
+              <a:buNone/>
+            </a:pPr>
+            <a:r>
+              <a:rPr lang="en-US" sz="1100" b="1" spc="150" kern="0" dirty="0">
                 <a:solidFill>
                   <a:srgbClr val="E8A33D"/>
+                </a:solidFill>
+                <a:latin typeface="Calibri" pitchFamily="34" charset="0"/>
+                <a:ea typeface="Calibri" pitchFamily="34" charset="-122"/>
+                <a:cs typeface="Calibri" pitchFamily="34" charset="-120"/>
+              </a:rPr>
+              <a:t>REGNO UNITO</a:t>
+            </a:r>
+            <a:endParaRPr lang="en-US" sz="1100" dirty="0"/>
+          </a:p>
+        </p:txBody>
+      </p:sp>
+      <p:sp>
+        <p:nvSpPr>
+          <p:cNvPr id="7" name="Text 5"/>
+          <p:cNvSpPr/>
+          <p:nvPr/>
+        </p:nvSpPr>
+        <p:spPr>
+          <a:xfrm>
+            <a:off x="731520" y="2788920"/>
+            <a:ext cx="3108960" cy="457200"/>
+          </a:xfrm>
+          <a:prstGeom prst="rect">
+            <a:avLst/>
+          </a:prstGeom>
+          <a:noFill/>
+          <a:ln/>
+        </p:spPr>
+        <p:txBody>
+          <a:bodyPr wrap="square" lIns="0" tIns="0" rIns="0" bIns="0" rtlCol="0" anchor="ctr"/>
+          <a:lstStyle/>
+          <a:p>
+            <a:pPr indent="0" marL="0">
+              <a:buNone/>
+            </a:pPr>
+            <a:r>
+              <a:rPr lang="en-US" sz="2000" b="1" dirty="0">
+                <a:solidFill>
+                  <a:srgbClr val="FFFFFF"/>
                 </a:solidFill>
                 <a:latin typeface="Cambria" pitchFamily="34" charset="0"/>
                 <a:ea typeface="Cambria" pitchFamily="34" charset="-122"/>
                 <a:cs typeface="Cambria" pitchFamily="34" charset="-120"/>
               </a:rPr>
-              <a:t>Universe</a:t>
-            </a:r>
-            <a:endParaRPr lang="en-US" sz="1800" dirty="0"/>
-          </a:p>
-        </p:txBody>
-      </p:sp>
-      <p:sp>
-        <p:nvSpPr>
-          <p:cNvPr id="6" name="Text 4"/>
-          <p:cNvSpPr/>
-          <p:nvPr/>
-        </p:nvSpPr>
-        <p:spPr>
-          <a:xfrm>
-            <a:off x="777240" y="3017520"/>
-            <a:ext cx="5394960" cy="502920"/>
-          </a:xfrm>
-          <a:prstGeom prst="rect">
-            <a:avLst/>
-          </a:prstGeom>
-          <a:noFill/>
-          <a:ln/>
-        </p:spPr>
-        <p:txBody>
-          <a:bodyPr wrap="square" lIns="0" tIns="0" rIns="0" bIns="0" rtlCol="0" anchor="ctr"/>
-          <a:lstStyle/>
-          <a:p>
-            <a:pPr indent="0" marL="0">
-              <a:buNone/>
-            </a:pPr>
-            <a:r>
-              <a:rPr lang="en-US" sz="1300" dirty="0">
+              <a:t>Orbital</a:t>
+            </a:r>
+            <a:endParaRPr lang="en-US" sz="2000" dirty="0"/>
+          </a:p>
+        </p:txBody>
+      </p:sp>
+      <p:sp>
+        <p:nvSpPr>
+          <p:cNvPr id="8" name="Text 6"/>
+          <p:cNvSpPr/>
+          <p:nvPr/>
+        </p:nvSpPr>
+        <p:spPr>
+          <a:xfrm>
+            <a:off x="731520" y="3355848"/>
+            <a:ext cx="3200400" cy="640080"/>
+          </a:xfrm>
+          <a:prstGeom prst="rect">
+            <a:avLst/>
+          </a:prstGeom>
+          <a:noFill/>
+          <a:ln/>
+        </p:spPr>
+        <p:txBody>
+          <a:bodyPr wrap="square" lIns="0" tIns="0" rIns="0" bIns="0" rtlCol="0" anchor="ctr"/>
+          <a:lstStyle/>
+          <a:p>
+            <a:pPr indent="0" marL="0">
+              <a:buNone/>
+            </a:pPr>
+            <a:r>
+              <a:rPr lang="en-US" sz="3400" b="1" dirty="0">
+                <a:solidFill>
+                  <a:srgbClr val="E8A33D"/>
+                </a:solidFill>
+                <a:latin typeface="Cambria" pitchFamily="34" charset="0"/>
+                <a:ea typeface="Cambria" pitchFamily="34" charset="-122"/>
+                <a:cs typeface="Cambria" pitchFamily="34" charset="-120"/>
+              </a:rPr>
+              <a:t>$60M</a:t>
+            </a:r>
+            <a:endParaRPr lang="en-US" sz="3400" dirty="0"/>
+          </a:p>
+        </p:txBody>
+      </p:sp>
+      <p:sp>
+        <p:nvSpPr>
+          <p:cNvPr id="9" name="Text 7"/>
+          <p:cNvSpPr/>
+          <p:nvPr/>
+        </p:nvSpPr>
+        <p:spPr>
+          <a:xfrm>
+            <a:off x="731520" y="4114800"/>
+            <a:ext cx="3200400" cy="731520"/>
+          </a:xfrm>
+          <a:prstGeom prst="rect">
+            <a:avLst/>
+          </a:prstGeom>
+          <a:noFill/>
+          <a:ln/>
+        </p:spPr>
+        <p:txBody>
+          <a:bodyPr wrap="square" lIns="0" tIns="0" rIns="0" bIns="0" rtlCol="0" anchor="ctr"/>
+          <a:lstStyle/>
+          <a:p>
+            <a:pPr indent="0" marL="0">
+              <a:buNone/>
+            </a:pPr>
+            <a:r>
+              <a:rPr lang="en-US" sz="1250" dirty="0">
                 <a:solidFill>
                   <a:srgbClr val="EAF1FA"/>
                 </a:solidFill>
@@ -2864,26 +5003,26 @@
                 <a:ea typeface="Calibri" pitchFamily="34" charset="-122"/>
                 <a:cs typeface="Calibri" pitchFamily="34" charset="-120"/>
               </a:rPr>
-              <a:t>La piattaforma agentica di Skylabs: l'infrastruttura AI è già in produzione, non da inventare.</a:t>
-            </a:r>
-            <a:endParaRPr lang="en-US" sz="1300" dirty="0"/>
-          </a:p>
-        </p:txBody>
-      </p:sp>
-      <p:sp>
-        <p:nvSpPr>
-          <p:cNvPr id="7" name="Shape 5"/>
-          <p:cNvSpPr/>
-          <p:nvPr/>
-        </p:nvSpPr>
-        <p:spPr>
-          <a:xfrm>
-            <a:off x="502920" y="3703320"/>
-            <a:ext cx="5852160" cy="1097280"/>
+              <a:t>Series B (2026) per l'AI di due diligence legale immobiliare. ~200k transazioni/anno.</a:t>
+            </a:r>
+            <a:endParaRPr lang="en-US" sz="1250" dirty="0"/>
+          </a:p>
+        </p:txBody>
+      </p:sp>
+      <p:sp>
+        <p:nvSpPr>
+          <p:cNvPr id="10" name="Shape 8"/>
+          <p:cNvSpPr/>
+          <p:nvPr/>
+        </p:nvSpPr>
+        <p:spPr>
+          <a:xfrm>
+            <a:off x="4297680" y="2286000"/>
+            <a:ext cx="3611880" cy="2606040"/>
           </a:xfrm>
           <a:prstGeom prst="roundRect">
             <a:avLst>
-              <a:gd name="adj" fmla="val 7500"/>
+              <a:gd name="adj" fmla="val 3509"/>
             </a:avLst>
           </a:prstGeom>
           <a:solidFill>
@@ -2899,69 +5038,147 @@
       </p:sp>
       <p:sp>
         <p:nvSpPr>
-          <p:cNvPr id="8" name="Text 6"/>
-          <p:cNvSpPr/>
-          <p:nvPr/>
-        </p:nvSpPr>
-        <p:spPr>
-          <a:xfrm>
-            <a:off x="777240" y="3849624"/>
-            <a:ext cx="5303520" cy="411480"/>
-          </a:xfrm>
-          <a:prstGeom prst="rect">
-            <a:avLst/>
-          </a:prstGeom>
-          <a:noFill/>
-          <a:ln/>
-        </p:spPr>
-        <p:txBody>
-          <a:bodyPr wrap="square" lIns="0" tIns="0" rIns="0" bIns="0" rtlCol="0" anchor="ctr"/>
-          <a:lstStyle/>
-          <a:p>
-            <a:pPr indent="0" marL="0">
-              <a:buNone/>
-            </a:pPr>
-            <a:r>
-              <a:rPr lang="en-US" sz="1800" b="1" dirty="0">
+          <p:cNvPr id="11" name="Text 9"/>
+          <p:cNvSpPr/>
+          <p:nvPr/>
+        </p:nvSpPr>
+        <p:spPr>
+          <a:xfrm>
+            <a:off x="4526280" y="2496312"/>
+            <a:ext cx="3108960" cy="274320"/>
+          </a:xfrm>
+          <a:prstGeom prst="rect">
+            <a:avLst/>
+          </a:prstGeom>
+          <a:noFill/>
+          <a:ln/>
+        </p:spPr>
+        <p:txBody>
+          <a:bodyPr wrap="square" lIns="0" tIns="0" rIns="0" bIns="0" rtlCol="0" anchor="ctr"/>
+          <a:lstStyle/>
+          <a:p>
+            <a:pPr indent="0" marL="0">
+              <a:buNone/>
+            </a:pPr>
+            <a:r>
+              <a:rPr lang="en-US" sz="1100" b="1" spc="150" kern="0" dirty="0">
                 <a:solidFill>
                   <a:srgbClr val="E8A33D"/>
+                </a:solidFill>
+                <a:latin typeface="Calibri" pitchFamily="34" charset="0"/>
+                <a:ea typeface="Calibri" pitchFamily="34" charset="-122"/>
+                <a:cs typeface="Calibri" pitchFamily="34" charset="-120"/>
+              </a:rPr>
+              <a:t>USA</a:t>
+            </a:r>
+            <a:endParaRPr lang="en-US" sz="1100" dirty="0"/>
+          </a:p>
+        </p:txBody>
+      </p:sp>
+      <p:sp>
+        <p:nvSpPr>
+          <p:cNvPr id="12" name="Text 10"/>
+          <p:cNvSpPr/>
+          <p:nvPr/>
+        </p:nvSpPr>
+        <p:spPr>
+          <a:xfrm>
+            <a:off x="4526280" y="2788920"/>
+            <a:ext cx="3108960" cy="457200"/>
+          </a:xfrm>
+          <a:prstGeom prst="rect">
+            <a:avLst/>
+          </a:prstGeom>
+          <a:noFill/>
+          <a:ln/>
+        </p:spPr>
+        <p:txBody>
+          <a:bodyPr wrap="square" lIns="0" tIns="0" rIns="0" bIns="0" rtlCol="0" anchor="ctr"/>
+          <a:lstStyle/>
+          <a:p>
+            <a:pPr indent="0" marL="0">
+              <a:buNone/>
+            </a:pPr>
+            <a:r>
+              <a:rPr lang="en-US" sz="2000" b="1" dirty="0">
+                <a:solidFill>
+                  <a:srgbClr val="FFFFFF"/>
                 </a:solidFill>
                 <a:latin typeface="Cambria" pitchFamily="34" charset="0"/>
                 <a:ea typeface="Cambria" pitchFamily="34" charset="-122"/>
                 <a:cs typeface="Cambria" pitchFamily="34" charset="-120"/>
               </a:rPr>
-              <a:t>Skylabs / SAE</a:t>
-            </a:r>
-            <a:endParaRPr lang="en-US" sz="1800" dirty="0"/>
-          </a:p>
-        </p:txBody>
-      </p:sp>
-      <p:sp>
-        <p:nvSpPr>
-          <p:cNvPr id="9" name="Text 7"/>
-          <p:cNvSpPr/>
-          <p:nvPr/>
-        </p:nvSpPr>
-        <p:spPr>
-          <a:xfrm>
-            <a:off x="777240" y="4251960"/>
-            <a:ext cx="5394960" cy="502920"/>
-          </a:xfrm>
-          <a:prstGeom prst="rect">
-            <a:avLst/>
-          </a:prstGeom>
-          <a:noFill/>
-          <a:ln/>
-        </p:spPr>
-        <p:txBody>
-          <a:bodyPr wrap="square" lIns="0" tIns="0" rIns="0" bIns="0" rtlCol="0" anchor="ctr"/>
-          <a:lstStyle/>
-          <a:p>
-            <a:pPr indent="0" marL="0">
-              <a:buNone/>
-            </a:pPr>
-            <a:r>
-              <a:rPr lang="en-US" sz="1300" dirty="0">
+              <a:t>Qualia</a:t>
+            </a:r>
+            <a:endParaRPr lang="en-US" sz="2000" dirty="0"/>
+          </a:p>
+        </p:txBody>
+      </p:sp>
+      <p:sp>
+        <p:nvSpPr>
+          <p:cNvPr id="13" name="Text 11"/>
+          <p:cNvSpPr/>
+          <p:nvPr/>
+        </p:nvSpPr>
+        <p:spPr>
+          <a:xfrm>
+            <a:off x="4526280" y="3355848"/>
+            <a:ext cx="3200400" cy="640080"/>
+          </a:xfrm>
+          <a:prstGeom prst="rect">
+            <a:avLst/>
+          </a:prstGeom>
+          <a:noFill/>
+          <a:ln/>
+        </p:spPr>
+        <p:txBody>
+          <a:bodyPr wrap="square" lIns="0" tIns="0" rIns="0" bIns="0" rtlCol="0" anchor="ctr"/>
+          <a:lstStyle/>
+          <a:p>
+            <a:pPr indent="0" marL="0">
+              <a:buNone/>
+            </a:pPr>
+            <a:r>
+              <a:rPr lang="en-US" sz="3400" b="1" dirty="0">
+                <a:solidFill>
+                  <a:srgbClr val="E8A33D"/>
+                </a:solidFill>
+                <a:latin typeface="Cambria" pitchFamily="34" charset="0"/>
+                <a:ea typeface="Cambria" pitchFamily="34" charset="-122"/>
+                <a:cs typeface="Cambria" pitchFamily="34" charset="-120"/>
+              </a:rPr>
+              <a:t>~$1 mld</a:t>
+            </a:r>
+            <a:endParaRPr lang="en-US" sz="3400" dirty="0"/>
+          </a:p>
+        </p:txBody>
+      </p:sp>
+      <p:sp>
+        <p:nvSpPr>
+          <p:cNvPr id="14" name="Text 12"/>
+          <p:cNvSpPr/>
+          <p:nvPr/>
+        </p:nvSpPr>
+        <p:spPr>
+          <a:xfrm>
+            <a:off x="4526280" y="4114800"/>
+            <a:ext cx="3200400" cy="731520"/>
+          </a:xfrm>
+          <a:prstGeom prst="rect">
+            <a:avLst/>
+          </a:prstGeom>
+          <a:noFill/>
+          <a:ln/>
+        </p:spPr>
+        <p:txBody>
+          <a:bodyPr wrap="square" lIns="0" tIns="0" rIns="0" bIns="0" rtlCol="0" anchor="ctr"/>
+          <a:lstStyle/>
+          <a:p>
+            <a:pPr indent="0" marL="0">
+              <a:buNone/>
+            </a:pPr>
+            <a:r>
+              <a:rPr lang="en-US" sz="1250" dirty="0">
                 <a:solidFill>
                   <a:srgbClr val="EAF1FA"/>
                 </a:solidFill>
@@ -2969,26 +5186,26 @@
                 <a:ea typeface="Calibri" pitchFamily="34" charset="-122"/>
                 <a:cs typeface="Calibri" pitchFamily="34" charset="-120"/>
               </a:rPr>
-              <a:t>Competenza consolidata di AI enterprise e integrazione su processi complessi.</a:t>
-            </a:r>
-            <a:endParaRPr lang="en-US" sz="1300" dirty="0"/>
-          </a:p>
-        </p:txBody>
-      </p:sp>
-      <p:sp>
-        <p:nvSpPr>
-          <p:cNvPr id="10" name="Shape 8"/>
-          <p:cNvSpPr/>
-          <p:nvPr/>
-        </p:nvSpPr>
-        <p:spPr>
-          <a:xfrm>
-            <a:off x="502920" y="4937760"/>
-            <a:ext cx="5852160" cy="1097280"/>
+              <a:t>Valutazione da unicorno; infrastruttura di title &amp; closing. ~$207M raccolti.</a:t>
+            </a:r>
+            <a:endParaRPr lang="en-US" sz="1250" dirty="0"/>
+          </a:p>
+        </p:txBody>
+      </p:sp>
+      <p:sp>
+        <p:nvSpPr>
+          <p:cNvPr id="15" name="Shape 13"/>
+          <p:cNvSpPr/>
+          <p:nvPr/>
+        </p:nvSpPr>
+        <p:spPr>
+          <a:xfrm>
+            <a:off x="8092440" y="2286000"/>
+            <a:ext cx="3611880" cy="2606040"/>
           </a:xfrm>
           <a:prstGeom prst="roundRect">
             <a:avLst>
-              <a:gd name="adj" fmla="val 7500"/>
+              <a:gd name="adj" fmla="val 3509"/>
             </a:avLst>
           </a:prstGeom>
           <a:solidFill>
@@ -3004,266 +5221,178 @@
       </p:sp>
       <p:sp>
         <p:nvSpPr>
-          <p:cNvPr id="11" name="Text 9"/>
-          <p:cNvSpPr/>
-          <p:nvPr/>
-        </p:nvSpPr>
-        <p:spPr>
-          <a:xfrm>
-            <a:off x="777240" y="5084064"/>
-            <a:ext cx="5303520" cy="411480"/>
-          </a:xfrm>
-          <a:prstGeom prst="rect">
-            <a:avLst/>
-          </a:prstGeom>
-          <a:noFill/>
-          <a:ln/>
-        </p:spPr>
-        <p:txBody>
-          <a:bodyPr wrap="square" lIns="0" tIns="0" rIns="0" bIns="0" rtlCol="0" anchor="ctr"/>
-          <a:lstStyle/>
-          <a:p>
-            <a:pPr indent="0" marL="0">
-              <a:buNone/>
-            </a:pPr>
-            <a:r>
-              <a:rPr lang="en-US" sz="1800" b="1" dirty="0">
+          <p:cNvPr id="16" name="Text 14"/>
+          <p:cNvSpPr/>
+          <p:nvPr/>
+        </p:nvSpPr>
+        <p:spPr>
+          <a:xfrm>
+            <a:off x="8321040" y="2496312"/>
+            <a:ext cx="3108960" cy="274320"/>
+          </a:xfrm>
+          <a:prstGeom prst="rect">
+            <a:avLst/>
+          </a:prstGeom>
+          <a:noFill/>
+          <a:ln/>
+        </p:spPr>
+        <p:txBody>
+          <a:bodyPr wrap="square" lIns="0" tIns="0" rIns="0" bIns="0" rtlCol="0" anchor="ctr"/>
+          <a:lstStyle/>
+          <a:p>
+            <a:pPr indent="0" marL="0">
+              <a:buNone/>
+            </a:pPr>
+            <a:r>
+              <a:rPr lang="en-US" sz="1100" b="1" spc="150" kern="0" dirty="0">
                 <a:solidFill>
                   <a:srgbClr val="E8A33D"/>
+                </a:solidFill>
+                <a:latin typeface="Calibri" pitchFamily="34" charset="0"/>
+                <a:ea typeface="Calibri" pitchFamily="34" charset="-122"/>
+                <a:cs typeface="Calibri" pitchFamily="34" charset="-120"/>
+              </a:rPr>
+              <a:t>AUSTRALIA</a:t>
+            </a:r>
+            <a:endParaRPr lang="en-US" sz="1100" dirty="0"/>
+          </a:p>
+        </p:txBody>
+      </p:sp>
+      <p:sp>
+        <p:nvSpPr>
+          <p:cNvPr id="17" name="Text 15"/>
+          <p:cNvSpPr/>
+          <p:nvPr/>
+        </p:nvSpPr>
+        <p:spPr>
+          <a:xfrm>
+            <a:off x="8321040" y="2788920"/>
+            <a:ext cx="3108960" cy="457200"/>
+          </a:xfrm>
+          <a:prstGeom prst="rect">
+            <a:avLst/>
+          </a:prstGeom>
+          <a:noFill/>
+          <a:ln/>
+        </p:spPr>
+        <p:txBody>
+          <a:bodyPr wrap="square" lIns="0" tIns="0" rIns="0" bIns="0" rtlCol="0" anchor="ctr"/>
+          <a:lstStyle/>
+          <a:p>
+            <a:pPr indent="0" marL="0">
+              <a:buNone/>
+            </a:pPr>
+            <a:r>
+              <a:rPr lang="en-US" sz="2000" b="1" dirty="0">
+                <a:solidFill>
+                  <a:srgbClr val="FFFFFF"/>
                 </a:solidFill>
                 <a:latin typeface="Cambria" pitchFamily="34" charset="0"/>
                 <a:ea typeface="Cambria" pitchFamily="34" charset="-122"/>
                 <a:cs typeface="Cambria" pitchFamily="34" charset="-120"/>
               </a:rPr>
-              <a:t>Time-to-market</a:t>
-            </a:r>
-            <a:endParaRPr lang="en-US" sz="1800" dirty="0"/>
-          </a:p>
-        </p:txBody>
-      </p:sp>
-      <p:sp>
-        <p:nvSpPr>
-          <p:cNvPr id="12" name="Text 10"/>
-          <p:cNvSpPr/>
-          <p:nvPr/>
-        </p:nvSpPr>
-        <p:spPr>
-          <a:xfrm>
-            <a:off x="777240" y="5486400"/>
-            <a:ext cx="5394960" cy="502920"/>
-          </a:xfrm>
-          <a:prstGeom prst="rect">
-            <a:avLst/>
-          </a:prstGeom>
-          <a:noFill/>
-          <a:ln/>
-        </p:spPr>
-        <p:txBody>
-          <a:bodyPr wrap="square" lIns="0" tIns="0" rIns="0" bIns="0" rtlCol="0" anchor="ctr"/>
-          <a:lstStyle/>
-          <a:p>
-            <a:pPr indent="0" marL="0">
-              <a:buNone/>
-            </a:pPr>
-            <a:r>
-              <a:rPr lang="en-US" sz="1300" dirty="0">
-                <a:solidFill>
-                  <a:srgbClr val="EAF1FA"/>
-                </a:solidFill>
-                <a:latin typeface="Calibri" pitchFamily="34" charset="0"/>
-                <a:ea typeface="Calibri" pitchFamily="34" charset="-122"/>
-                <a:cs typeface="Calibri" pitchFamily="34" charset="-120"/>
-              </a:rPr>
-              <a:t>Partiamo da una vertical application su un mercato rotto — non da un foglio bianco.</a:t>
-            </a:r>
-            <a:endParaRPr lang="en-US" sz="1300" dirty="0"/>
-          </a:p>
-        </p:txBody>
-      </p:sp>
-      <p:sp>
-        <p:nvSpPr>
-          <p:cNvPr id="13" name="Shape 11"/>
-          <p:cNvSpPr/>
-          <p:nvPr/>
-        </p:nvSpPr>
-        <p:spPr>
-          <a:xfrm>
-            <a:off x="6858000" y="2468880"/>
-            <a:ext cx="4800600" cy="3566160"/>
-          </a:xfrm>
-          <a:prstGeom prst="roundRect">
-            <a:avLst>
-              <a:gd name="adj" fmla="val 2564"/>
-            </a:avLst>
-          </a:prstGeom>
-          <a:solidFill>
-            <a:srgbClr val="0A1730"/>
-          </a:solidFill>
-          <a:ln w="12700">
-            <a:solidFill>
-              <a:srgbClr val="27406B"/>
-            </a:solidFill>
-            <a:prstDash val="solid"/>
-          </a:ln>
-        </p:spPr>
-      </p:sp>
-      <p:sp>
-        <p:nvSpPr>
-          <p:cNvPr id="14" name="Text 12"/>
-          <p:cNvSpPr/>
-          <p:nvPr/>
-        </p:nvSpPr>
-        <p:spPr>
-          <a:xfrm>
-            <a:off x="7132320" y="2651760"/>
-            <a:ext cx="3657600" cy="365760"/>
-          </a:xfrm>
-          <a:prstGeom prst="rect">
-            <a:avLst/>
-          </a:prstGeom>
-          <a:noFill/>
-          <a:ln/>
-        </p:spPr>
-        <p:txBody>
-          <a:bodyPr wrap="square" lIns="0" tIns="0" rIns="0" bIns="0" rtlCol="0" anchor="ctr"/>
-          <a:lstStyle/>
-          <a:p>
-            <a:pPr indent="0" marL="0">
-              <a:buNone/>
-            </a:pPr>
-            <a:r>
-              <a:rPr lang="en-US" sz="1500" b="1" dirty="0">
-                <a:solidFill>
-                  <a:srgbClr val="9DB0CC"/>
+              <a:t>PEXA</a:t>
+            </a:r>
+            <a:endParaRPr lang="en-US" sz="2000" dirty="0"/>
+          </a:p>
+        </p:txBody>
+      </p:sp>
+      <p:sp>
+        <p:nvSpPr>
+          <p:cNvPr id="18" name="Text 16"/>
+          <p:cNvSpPr/>
+          <p:nvPr/>
+        </p:nvSpPr>
+        <p:spPr>
+          <a:xfrm>
+            <a:off x="8321040" y="3355848"/>
+            <a:ext cx="3200400" cy="640080"/>
+          </a:xfrm>
+          <a:prstGeom prst="rect">
+            <a:avLst/>
+          </a:prstGeom>
+          <a:noFill/>
+          <a:ln/>
+        </p:spPr>
+        <p:txBody>
+          <a:bodyPr wrap="square" lIns="0" tIns="0" rIns="0" bIns="0" rtlCol="0" anchor="ctr"/>
+          <a:lstStyle/>
+          <a:p>
+            <a:pPr indent="0" marL="0">
+              <a:buNone/>
+            </a:pPr>
+            <a:r>
+              <a:rPr lang="en-US" sz="3400" b="1" dirty="0">
+                <a:solidFill>
+                  <a:srgbClr val="E8A33D"/>
                 </a:solidFill>
                 <a:latin typeface="Cambria" pitchFamily="34" charset="0"/>
                 <a:ea typeface="Cambria" pitchFamily="34" charset="-122"/>
                 <a:cs typeface="Cambria" pitchFamily="34" charset="-120"/>
               </a:rPr>
-              <a:t>Lo stack</a:t>
-            </a:r>
-            <a:endParaRPr lang="en-US" sz="1500" dirty="0"/>
-          </a:p>
-        </p:txBody>
-      </p:sp>
-      <p:sp>
-        <p:nvSpPr>
-          <p:cNvPr id="15" name="Shape 13"/>
-          <p:cNvSpPr/>
-          <p:nvPr/>
-        </p:nvSpPr>
-        <p:spPr>
-          <a:xfrm>
-            <a:off x="7178040" y="3108960"/>
-            <a:ext cx="4160520" cy="868680"/>
+              <a:t>~AU$2 mld</a:t>
+            </a:r>
+            <a:endParaRPr lang="en-US" sz="3400" dirty="0"/>
+          </a:p>
+        </p:txBody>
+      </p:sp>
+      <p:sp>
+        <p:nvSpPr>
+          <p:cNvPr id="19" name="Text 17"/>
+          <p:cNvSpPr/>
+          <p:nvPr/>
+        </p:nvSpPr>
+        <p:spPr>
+          <a:xfrm>
+            <a:off x="8321040" y="4114800"/>
+            <a:ext cx="3200400" cy="731520"/>
+          </a:xfrm>
+          <a:prstGeom prst="rect">
+            <a:avLst/>
+          </a:prstGeom>
+          <a:noFill/>
+          <a:ln/>
+        </p:spPr>
+        <p:txBody>
+          <a:bodyPr wrap="square" lIns="0" tIns="0" rIns="0" bIns="0" rtlCol="0" anchor="ctr"/>
+          <a:lstStyle/>
+          <a:p>
+            <a:pPr indent="0" marL="0">
+              <a:buNone/>
+            </a:pPr>
+            <a:r>
+              <a:rPr lang="en-US" sz="1250" dirty="0">
+                <a:solidFill>
+                  <a:srgbClr val="EAF1FA"/>
+                </a:solidFill>
+                <a:latin typeface="Calibri" pitchFamily="34" charset="0"/>
+                <a:ea typeface="Calibri" pitchFamily="34" charset="-122"/>
+                <a:cs typeface="Calibri" pitchFamily="34" charset="-120"/>
+              </a:rPr>
+              <a:t>Capitalizzazione in borsa (ASX); ~90% delle transazioni immobiliari nazionali sul suo exchange.</a:t>
+            </a:r>
+            <a:endParaRPr lang="en-US" sz="1250" dirty="0"/>
+          </a:p>
+        </p:txBody>
+      </p:sp>
+      <p:sp>
+        <p:nvSpPr>
+          <p:cNvPr id="20" name="Shape 18"/>
+          <p:cNvSpPr/>
+          <p:nvPr/>
+        </p:nvSpPr>
+        <p:spPr>
+          <a:xfrm>
+            <a:off x="502920" y="5029200"/>
+            <a:ext cx="11155680" cy="749808"/>
           </a:xfrm>
           <a:prstGeom prst="roundRect">
             <a:avLst>
-              <a:gd name="adj" fmla="val 8421"/>
+              <a:gd name="adj" fmla="val 9756"/>
             </a:avLst>
           </a:prstGeom>
           <a:solidFill>
-            <a:srgbClr val="E8A33D"/>
-          </a:solidFill>
-          <a:ln/>
-        </p:spPr>
-      </p:sp>
-      <p:sp>
-        <p:nvSpPr>
-          <p:cNvPr id="16" name="Text 14"/>
-          <p:cNvSpPr/>
-          <p:nvPr/>
-        </p:nvSpPr>
-        <p:spPr>
-          <a:xfrm>
-            <a:off x="7178040" y="3200400"/>
-            <a:ext cx="4160520" cy="365760"/>
-          </a:xfrm>
-          <a:prstGeom prst="rect">
-            <a:avLst/>
-          </a:prstGeom>
-          <a:noFill/>
-          <a:ln/>
-        </p:spPr>
-        <p:txBody>
-          <a:bodyPr wrap="square" lIns="0" tIns="0" rIns="0" bIns="0" rtlCol="0" anchor="ctr"/>
-          <a:lstStyle/>
-          <a:p>
-            <a:pPr algn="ctr" indent="0" marL="0">
-              <a:buNone/>
-            </a:pPr>
-            <a:r>
-              <a:rPr lang="en-US" sz="1800" b="1" dirty="0">
-                <a:solidFill>
-                  <a:srgbClr val="0E1E38"/>
-                </a:solidFill>
-                <a:latin typeface="Cambria" pitchFamily="34" charset="0"/>
-                <a:ea typeface="Cambria" pitchFamily="34" charset="-122"/>
-                <a:cs typeface="Cambria" pitchFamily="34" charset="-120"/>
-              </a:rPr>
-              <a:t>Conforme</a:t>
-            </a:r>
-            <a:endParaRPr lang="en-US" sz="1800" dirty="0"/>
-          </a:p>
-        </p:txBody>
-      </p:sp>
-      <p:sp>
-        <p:nvSpPr>
-          <p:cNvPr id="17" name="Text 15"/>
-          <p:cNvSpPr/>
-          <p:nvPr/>
-        </p:nvSpPr>
-        <p:spPr>
-          <a:xfrm>
-            <a:off x="7178040" y="3584448"/>
-            <a:ext cx="4160520" cy="320040"/>
-          </a:xfrm>
-          <a:prstGeom prst="rect">
-            <a:avLst/>
-          </a:prstGeom>
-          <a:noFill/>
-          <a:ln/>
-        </p:spPr>
-        <p:txBody>
-          <a:bodyPr wrap="square" lIns="0" tIns="0" rIns="0" bIns="0" rtlCol="0" anchor="ctr"/>
-          <a:lstStyle/>
-          <a:p>
-            <a:pPr algn="ctr" indent="0" marL="0">
-              <a:buNone/>
-            </a:pPr>
-            <a:r>
-              <a:rPr lang="en-US" sz="1100" dirty="0">
-                <a:solidFill>
-                  <a:srgbClr val="0E1E38"/>
-                </a:solidFill>
-                <a:latin typeface="Calibri" pitchFamily="34" charset="0"/>
-                <a:ea typeface="Calibri" pitchFamily="34" charset="-122"/>
-                <a:cs typeface="Calibri" pitchFamily="34" charset="-120"/>
-              </a:rPr>
-              <a:t>vertical app — real estate Italia</a:t>
-            </a:r>
-            <a:endParaRPr lang="en-US" sz="1100" dirty="0"/>
-          </a:p>
-        </p:txBody>
-      </p:sp>
-      <p:sp>
-        <p:nvSpPr>
-          <p:cNvPr id="18" name="Shape 16"/>
-          <p:cNvSpPr/>
-          <p:nvPr/>
-        </p:nvSpPr>
-        <p:spPr>
-          <a:xfrm>
-            <a:off x="7178040" y="4160520"/>
-            <a:ext cx="4160520" cy="777240"/>
-          </a:xfrm>
-          <a:prstGeom prst="roundRect">
-            <a:avLst>
-              <a:gd name="adj" fmla="val 9412"/>
-            </a:avLst>
-          </a:prstGeom>
-          <a:solidFill>
-            <a:srgbClr val="17294A"/>
+            <a:srgbClr val="0A1730"/>
           </a:solidFill>
           <a:ln w="12700">
             <a:solidFill>
@@ -3275,38 +5404,52 @@
       </p:sp>
       <p:sp>
         <p:nvSpPr>
-          <p:cNvPr id="19" name="Text 17"/>
-          <p:cNvSpPr/>
-          <p:nvPr/>
-        </p:nvSpPr>
-        <p:spPr>
-          <a:xfrm>
-            <a:off x="7178040" y="4160520"/>
-            <a:ext cx="4160520" cy="777240"/>
-          </a:xfrm>
-          <a:prstGeom prst="rect">
-            <a:avLst/>
-          </a:prstGeom>
-          <a:noFill/>
-          <a:ln/>
-        </p:spPr>
-        <p:txBody>
-          <a:bodyPr wrap="square" lIns="0" tIns="0" rIns="0" bIns="0" rtlCol="0" anchor="ctr"/>
-          <a:lstStyle/>
-          <a:p>
-            <a:pPr algn="ctr" indent="0" marL="0">
+          <p:cNvPr id="21" name="Text 19"/>
+          <p:cNvSpPr/>
+          <p:nvPr/>
+        </p:nvSpPr>
+        <p:spPr>
+          <a:xfrm>
+            <a:off x="777240" y="5029200"/>
+            <a:ext cx="10607040" cy="749808"/>
+          </a:xfrm>
+          <a:prstGeom prst="rect">
+            <a:avLst/>
+          </a:prstGeom>
+          <a:noFill/>
+          <a:ln/>
+        </p:spPr>
+        <p:txBody>
+          <a:bodyPr wrap="square" lIns="0" tIns="0" rIns="0" bIns="0" rtlCol="0" anchor="ctr"/>
+          <a:lstStyle/>
+          <a:p>
+            <a:pPr indent="0" marL="0">
               <a:buNone/>
             </a:pPr>
             <a:r>
               <a:rPr lang="en-US" sz="1400" b="1" dirty="0">
                 <a:solidFill>
-                  <a:srgbClr val="FFFFFF"/>
-                </a:solidFill>
-                <a:latin typeface="Cambria" pitchFamily="34" charset="0"/>
-                <a:ea typeface="Cambria" pitchFamily="34" charset="-122"/>
-                <a:cs typeface="Cambria" pitchFamily="34" charset="-120"/>
-              </a:rPr>
-              <a:t>Universe — piattaforma agentica</a:t>
+                  <a:srgbClr val="E8A33D"/>
+                </a:solidFill>
+                <a:latin typeface="Calibri" pitchFamily="34" charset="0"/>
+                <a:ea typeface="Calibri" pitchFamily="34" charset="-122"/>
+                <a:cs typeface="Calibri" pitchFamily="34" charset="-120"/>
+              </a:rPr>
+              <a:t>In Italia non esiste nessuno di questi. </a:t>
+            </a:r>
+            <a:pPr indent="0" marL="0">
+              <a:buNone/>
+            </a:pPr>
+            <a:r>
+              <a:rPr lang="en-US" sz="1400" dirty="0">
+                <a:solidFill>
+                  <a:srgbClr val="EAF1FA"/>
+                </a:solidFill>
+                <a:latin typeface="Calibri" pitchFamily="34" charset="0"/>
+                <a:ea typeface="Calibri" pitchFamily="34" charset="-122"/>
+                <a:cs typeface="Calibri" pitchFamily="34" charset="-120"/>
+              </a:rPr>
+              <a:t>E il problema, conformità e catasto, è più grande: noi replichiamo il modello e lo adattiamo, per essere il primo player italiano.</a:t>
             </a:r>
             <a:endParaRPr lang="en-US" sz="1400" dirty="0"/>
           </a:p>
@@ -3314,73 +5457,46 @@
       </p:sp>
       <p:sp>
         <p:nvSpPr>
-          <p:cNvPr id="20" name="Shape 18"/>
-          <p:cNvSpPr/>
-          <p:nvPr/>
-        </p:nvSpPr>
-        <p:spPr>
-          <a:xfrm>
-            <a:off x="7178040" y="5074920"/>
-            <a:ext cx="4160520" cy="731520"/>
-          </a:xfrm>
-          <a:prstGeom prst="roundRect">
-            <a:avLst>
-              <a:gd name="adj" fmla="val 10000"/>
-            </a:avLst>
-          </a:prstGeom>
-          <a:solidFill>
-            <a:srgbClr val="0E2140"/>
-          </a:solidFill>
-          <a:ln w="12700">
-            <a:solidFill>
-              <a:srgbClr val="27406B"/>
-            </a:solidFill>
-            <a:prstDash val="solid"/>
-          </a:ln>
-        </p:spPr>
-      </p:sp>
-      <p:sp>
-        <p:nvSpPr>
-          <p:cNvPr id="21" name="Text 19"/>
-          <p:cNvSpPr/>
-          <p:nvPr/>
-        </p:nvSpPr>
-        <p:spPr>
-          <a:xfrm>
-            <a:off x="7178040" y="5074920"/>
-            <a:ext cx="4160520" cy="731520"/>
-          </a:xfrm>
-          <a:prstGeom prst="rect">
-            <a:avLst/>
-          </a:prstGeom>
-          <a:noFill/>
-          <a:ln/>
-        </p:spPr>
-        <p:txBody>
-          <a:bodyPr wrap="square" lIns="0" tIns="0" rIns="0" bIns="0" rtlCol="0" anchor="ctr"/>
-          <a:lstStyle/>
-          <a:p>
-            <a:pPr algn="ctr" indent="0" marL="0">
-              <a:buNone/>
-            </a:pPr>
-            <a:r>
-              <a:rPr lang="en-US" sz="1300" dirty="0">
-                <a:solidFill>
-                  <a:srgbClr val="EAF1FA"/>
-                </a:solidFill>
-                <a:latin typeface="Calibri" pitchFamily="34" charset="0"/>
-                <a:ea typeface="Calibri" pitchFamily="34" charset="-122"/>
-                <a:cs typeface="Calibri" pitchFamily="34" charset="-120"/>
-              </a:rPr>
-              <a:t>Skylabs / SAE — AI enterprise</a:t>
-            </a:r>
-            <a:endParaRPr lang="en-US" sz="1300" dirty="0"/>
-          </a:p>
-        </p:txBody>
-      </p:sp>
-      <p:sp>
-        <p:nvSpPr>
           <p:cNvPr id="22" name="Text 20"/>
+          <p:cNvSpPr/>
+          <p:nvPr/>
+        </p:nvSpPr>
+        <p:spPr>
+          <a:xfrm>
+            <a:off x="502920" y="5943600"/>
+            <a:ext cx="11155680" cy="274320"/>
+          </a:xfrm>
+          <a:prstGeom prst="rect">
+            <a:avLst/>
+          </a:prstGeom>
+          <a:noFill/>
+          <a:ln/>
+        </p:spPr>
+        <p:txBody>
+          <a:bodyPr wrap="square" lIns="0" tIns="0" rIns="0" bIns="0" rtlCol="0" anchor="ctr"/>
+          <a:lstStyle/>
+          <a:p>
+            <a:pPr indent="0" marL="0">
+              <a:buNone/>
+            </a:pPr>
+            <a:r>
+              <a:rPr lang="en-US" sz="900" dirty="0">
+                <a:solidFill>
+                  <a:srgbClr val="9DB0CC"/>
+                </a:solidFill>
+                <a:latin typeface="Calibri" pitchFamily="34" charset="0"/>
+                <a:ea typeface="Calibri" pitchFamily="34" charset="-122"/>
+                <a:cs typeface="Calibri" pitchFamily="34" charset="-120"/>
+              </a:rPr>
+              <a:t>Fonti: Orbital / Brighton Park (Series B 2026); Qualia (Series D, unicorno ~$1 mld); PEXA Group (ASX: PXA). Cifre indicative.</a:t>
+            </a:r>
+            <a:endParaRPr lang="en-US" sz="900" dirty="0"/>
+          </a:p>
+        </p:txBody>
+      </p:sp>
+      <p:sp>
+        <p:nvSpPr>
+          <p:cNvPr id="23" name="Text 21"/>
           <p:cNvSpPr/>
           <p:nvPr/>
         </p:nvSpPr>
@@ -3405,13 +5521,13 @@
             <a:r>
               <a:rPr lang="en-US" sz="1000" dirty="0">
                 <a:solidFill>
-                  <a:srgbClr val="9DB0CC"/>
-                </a:solidFill>
-                <a:latin typeface="Calibri" pitchFamily="34" charset="0"/>
-                <a:ea typeface="Calibri" pitchFamily="34" charset="-122"/>
-                <a:cs typeface="Calibri" pitchFamily="34" charset="-120"/>
-              </a:rPr>
-              <a:t>10</a:t>
+                  <a:srgbClr val="5C6C87"/>
+                </a:solidFill>
+                <a:latin typeface="Calibri" pitchFamily="34" charset="0"/>
+                <a:ea typeface="Calibri" pitchFamily="34" charset="-122"/>
+                <a:cs typeface="Calibri" pitchFamily="34" charset="-120"/>
+              </a:rPr>
+              <a:t>11</a:t>
             </a:r>
             <a:endParaRPr lang="en-US" sz="1000" dirty="0"/>
           </a:p>
@@ -3419,7 +5535,7 @@
       </p:sp>
       <p:sp>
         <p:nvSpPr>
-          <p:cNvPr id="23" name="Text 21"/>
+          <p:cNvPr id="24" name="Text 22"/>
           <p:cNvSpPr/>
           <p:nvPr/>
         </p:nvSpPr>
@@ -3444,7 +5560,7 @@
             <a:r>
               <a:rPr lang="en-US" sz="1000" b="1" spc="200" kern="0" dirty="0">
                 <a:solidFill>
-                  <a:srgbClr val="9DB0CC"/>
+                  <a:srgbClr val="5C6C87"/>
                 </a:solidFill>
                 <a:latin typeface="Calibri" pitchFamily="34" charset="0"/>
                 <a:ea typeface="Calibri" pitchFamily="34" charset="-122"/>
@@ -3464,9 +5580,9 @@
 </p:sld>
 </file>
 
-<file path=ppt/slides/slide11.xml><?xml version="1.0" encoding="utf-8"?>
+<file path=ppt/slides/slide12.xml><?xml version="1.0" encoding="utf-8"?>
 <p:sld xmlns:a="http://schemas.openxmlformats.org/drawingml/2006/main" xmlns:r="http://schemas.openxmlformats.org/officeDocument/2006/relationships" xmlns:p="http://schemas.openxmlformats.org/presentationml/2006/main">
-  <p:cSld name="Slide 11">
+  <p:cSld name="Slide 12">
     <p:bg>
       <p:bgPr>
         <a:solidFill>
@@ -3521,7 +5637,7 @@
                 <a:ea typeface="Calibri" pitchFamily="34" charset="-122"/>
                 <a:cs typeface="Calibri" pitchFamily="34" charset="-120"/>
               </a:rPr>
-              <a:t>ROADMAP</a:t>
+              <a:t>PERCHÉ ADESSO</a:t>
             </a:r>
             <a:endParaRPr lang="en-US" sz="1200" dirty="0"/>
           </a:p>
@@ -3560,7 +5676,7 @@
                 <a:ea typeface="Cambria" pitchFamily="34" charset="-122"/>
                 <a:cs typeface="Cambria" pitchFamily="34" charset="-120"/>
               </a:rPr>
-              <a:t>Dal wedge alla piattaforma, in tre fasi</a:t>
+              <a:t>Tre venti a favore convergono nel 2026</a:t>
             </a:r>
             <a:endParaRPr lang="en-US" sz="2800" dirty="0"/>
           </a:p>
@@ -3575,216 +5691,11 @@
         <p:spPr>
           <a:xfrm>
             <a:off x="502920" y="2148840"/>
-            <a:ext cx="3611880" cy="3566160"/>
+            <a:ext cx="11155680" cy="1234440"/>
           </a:xfrm>
           <a:prstGeom prst="roundRect">
             <a:avLst>
-              <a:gd name="adj" fmla="val 2564"/>
-            </a:avLst>
-          </a:prstGeom>
-          <a:solidFill>
-            <a:srgbClr val="0E1E38"/>
-          </a:solidFill>
-          <a:ln w="12700">
-            <a:solidFill>
-              <a:srgbClr val="0E1E38"/>
-            </a:solidFill>
-            <a:prstDash val="solid"/>
-          </a:ln>
-        </p:spPr>
-      </p:sp>
-      <p:sp>
-        <p:nvSpPr>
-          <p:cNvPr id="5" name="Shape 3"/>
-          <p:cNvSpPr/>
-          <p:nvPr/>
-        </p:nvSpPr>
-        <p:spPr>
-          <a:xfrm>
-            <a:off x="777240" y="2468880"/>
-            <a:ext cx="1554480" cy="457200"/>
-          </a:xfrm>
-          <a:prstGeom prst="roundRect">
-            <a:avLst>
-              <a:gd name="adj" fmla="val 50000"/>
-            </a:avLst>
-          </a:prstGeom>
-          <a:solidFill>
-            <a:srgbClr val="C0563C"/>
-          </a:solidFill>
-          <a:ln/>
-        </p:spPr>
-      </p:sp>
-      <p:sp>
-        <p:nvSpPr>
-          <p:cNvPr id="6" name="Text 4"/>
-          <p:cNvSpPr/>
-          <p:nvPr/>
-        </p:nvSpPr>
-        <p:spPr>
-          <a:xfrm>
-            <a:off x="777240" y="2468880"/>
-            <a:ext cx="1554480" cy="457200"/>
-          </a:xfrm>
-          <a:prstGeom prst="rect">
-            <a:avLst/>
-          </a:prstGeom>
-          <a:noFill/>
-          <a:ln/>
-        </p:spPr>
-        <p:txBody>
-          <a:bodyPr wrap="square" lIns="0" tIns="0" rIns="0" bIns="0" rtlCol="0" anchor="ctr"/>
-          <a:lstStyle/>
-          <a:p>
-            <a:pPr algn="ctr" indent="0" marL="0">
-              <a:buNone/>
-            </a:pPr>
-            <a:r>
-              <a:rPr lang="en-US" sz="1500" b="1" dirty="0">
-                <a:solidFill>
-                  <a:srgbClr val="FFFFFF"/>
-                </a:solidFill>
-                <a:latin typeface="Cambria" pitchFamily="34" charset="0"/>
-                <a:ea typeface="Cambria" pitchFamily="34" charset="-122"/>
-                <a:cs typeface="Cambria" pitchFamily="34" charset="-120"/>
-              </a:rPr>
-              <a:t>Fase 1</a:t>
-            </a:r>
-            <a:endParaRPr lang="en-US" sz="1500" dirty="0"/>
-          </a:p>
-        </p:txBody>
-      </p:sp>
-      <p:sp>
-        <p:nvSpPr>
-          <p:cNvPr id="7" name="Text 5"/>
-          <p:cNvSpPr/>
-          <p:nvPr/>
-        </p:nvSpPr>
-        <p:spPr>
-          <a:xfrm>
-            <a:off x="777240" y="3063240"/>
-            <a:ext cx="3063240" cy="320040"/>
-          </a:xfrm>
-          <a:prstGeom prst="rect">
-            <a:avLst/>
-          </a:prstGeom>
-          <a:noFill/>
-          <a:ln/>
-        </p:spPr>
-        <p:txBody>
-          <a:bodyPr wrap="square" lIns="0" tIns="0" rIns="0" bIns="0" rtlCol="0" anchor="ctr"/>
-          <a:lstStyle/>
-          <a:p>
-            <a:pPr indent="0" marL="0">
-              <a:buNone/>
-            </a:pPr>
-            <a:r>
-              <a:rPr lang="en-US" sz="1200" b="1" spc="100" kern="0" dirty="0">
-                <a:solidFill>
-                  <a:srgbClr val="E8A33D"/>
-                </a:solidFill>
-                <a:latin typeface="Calibri" pitchFamily="34" charset="0"/>
-                <a:ea typeface="Calibri" pitchFamily="34" charset="-122"/>
-                <a:cs typeface="Calibri" pitchFamily="34" charset="-120"/>
-              </a:rPr>
-              <a:t>0 – 18 mesi</a:t>
-            </a:r>
-            <a:endParaRPr lang="en-US" sz="1200" dirty="0"/>
-          </a:p>
-        </p:txBody>
-      </p:sp>
-      <p:sp>
-        <p:nvSpPr>
-          <p:cNvPr id="8" name="Text 6"/>
-          <p:cNvSpPr/>
-          <p:nvPr/>
-        </p:nvSpPr>
-        <p:spPr>
-          <a:xfrm>
-            <a:off x="777240" y="3429000"/>
-            <a:ext cx="3063240" cy="548640"/>
-          </a:xfrm>
-          <a:prstGeom prst="rect">
-            <a:avLst/>
-          </a:prstGeom>
-          <a:noFill/>
-          <a:ln/>
-        </p:spPr>
-        <p:txBody>
-          <a:bodyPr wrap="square" lIns="0" tIns="0" rIns="0" bIns="0" rtlCol="0" anchor="ctr"/>
-          <a:lstStyle/>
-          <a:p>
-            <a:pPr indent="0" marL="0">
-              <a:buNone/>
-            </a:pPr>
-            <a:r>
-              <a:rPr lang="en-US" sz="1900" b="1" dirty="0">
-                <a:solidFill>
-                  <a:srgbClr val="FFFFFF"/>
-                </a:solidFill>
-                <a:latin typeface="Cambria" pitchFamily="34" charset="0"/>
-                <a:ea typeface="Cambria" pitchFamily="34" charset="-122"/>
-                <a:cs typeface="Cambria" pitchFamily="34" charset="-120"/>
-              </a:rPr>
-              <a:t>Il wedge</a:t>
-            </a:r>
-            <a:endParaRPr lang="en-US" sz="1900" dirty="0"/>
-          </a:p>
-        </p:txBody>
-      </p:sp>
-      <p:sp>
-        <p:nvSpPr>
-          <p:cNvPr id="9" name="Text 7"/>
-          <p:cNvSpPr/>
-          <p:nvPr/>
-        </p:nvSpPr>
-        <p:spPr>
-          <a:xfrm>
-            <a:off x="777240" y="4023360"/>
-            <a:ext cx="3063240" cy="1463040"/>
-          </a:xfrm>
-          <a:prstGeom prst="rect">
-            <a:avLst/>
-          </a:prstGeom>
-          <a:noFill/>
-          <a:ln/>
-        </p:spPr>
-        <p:txBody>
-          <a:bodyPr wrap="square" lIns="0" tIns="0" rIns="0" bIns="0" rtlCol="0" anchor="ctr"/>
-          <a:lstStyle/>
-          <a:p>
-            <a:pPr indent="0" marL="0">
-              <a:buNone/>
-            </a:pPr>
-            <a:r>
-              <a:rPr lang="en-US" sz="1300" dirty="0">
-                <a:solidFill>
-                  <a:srgbClr val="EAF1FA"/>
-                </a:solidFill>
-                <a:latin typeface="Calibri" pitchFamily="34" charset="0"/>
-                <a:ea typeface="Calibri" pitchFamily="34" charset="-122"/>
-                <a:cs typeface="Calibri" pitchFamily="34" charset="-120"/>
-              </a:rPr>
-              <a:t>Agente di due diligence in produzione. Primi clienti B2B: reti, notai, banche. Costruzione del dataset proprietario.</a:t>
-            </a:r>
-            <a:endParaRPr lang="en-US" sz="1300" dirty="0"/>
-          </a:p>
-        </p:txBody>
-      </p:sp>
-      <p:sp>
-        <p:nvSpPr>
-          <p:cNvPr id="10" name="Shape 8"/>
-          <p:cNvSpPr/>
-          <p:nvPr/>
-        </p:nvSpPr>
-        <p:spPr>
-          <a:xfrm>
-            <a:off x="4370832" y="2148840"/>
-            <a:ext cx="3611880" cy="3566160"/>
-          </a:xfrm>
-          <a:prstGeom prst="roundRect">
-            <a:avLst>
-              <a:gd name="adj" fmla="val 2564"/>
+              <a:gd name="adj" fmla="val 6667"/>
             </a:avLst>
           </a:prstGeom>
           <a:solidFill>
@@ -3800,36 +5711,34 @@
       </p:sp>
       <p:sp>
         <p:nvSpPr>
-          <p:cNvPr id="11" name="Shape 9"/>
-          <p:cNvSpPr/>
-          <p:nvPr/>
-        </p:nvSpPr>
-        <p:spPr>
-          <a:xfrm>
-            <a:off x="4645152" y="2468880"/>
-            <a:ext cx="1554480" cy="457200"/>
-          </a:xfrm>
-          <a:prstGeom prst="roundRect">
-            <a:avLst>
-              <a:gd name="adj" fmla="val 50000"/>
-            </a:avLst>
+          <p:cNvPr id="5" name="Shape 3"/>
+          <p:cNvSpPr/>
+          <p:nvPr/>
+        </p:nvSpPr>
+        <p:spPr>
+          <a:xfrm>
+            <a:off x="777240" y="2487168"/>
+            <a:ext cx="566928" cy="566928"/>
+          </a:xfrm>
+          <a:prstGeom prst="ellipse">
+            <a:avLst/>
           </a:prstGeom>
           <a:solidFill>
-            <a:srgbClr val="0E1E38"/>
+            <a:srgbClr val="C0563C"/>
           </a:solidFill>
           <a:ln/>
         </p:spPr>
       </p:sp>
       <p:sp>
         <p:nvSpPr>
-          <p:cNvPr id="12" name="Text 10"/>
-          <p:cNvSpPr/>
-          <p:nvPr/>
-        </p:nvSpPr>
-        <p:spPr>
-          <a:xfrm>
-            <a:off x="4645152" y="2468880"/>
-            <a:ext cx="1554480" cy="457200"/>
+          <p:cNvPr id="6" name="Text 4"/>
+          <p:cNvSpPr/>
+          <p:nvPr/>
+        </p:nvSpPr>
+        <p:spPr>
+          <a:xfrm>
+            <a:off x="777240" y="2487168"/>
+            <a:ext cx="566928" cy="566928"/>
           </a:xfrm>
           <a:prstGeom prst="rect">
             <a:avLst/>
@@ -3845,7 +5754,7 @@
               <a:buNone/>
             </a:pPr>
             <a:r>
-              <a:rPr lang="en-US" sz="1500" b="1" dirty="0">
+              <a:rPr lang="en-US" sz="1800" b="1" dirty="0">
                 <a:solidFill>
                   <a:srgbClr val="FFFFFF"/>
                 </a:solidFill>
@@ -3853,77 +5762,38 @@
                 <a:ea typeface="Cambria" pitchFamily="34" charset="-122"/>
                 <a:cs typeface="Cambria" pitchFamily="34" charset="-120"/>
               </a:rPr>
-              <a:t>Fase 2</a:t>
-            </a:r>
-            <a:endParaRPr lang="en-US" sz="1500" dirty="0"/>
-          </a:p>
-        </p:txBody>
-      </p:sp>
-      <p:sp>
-        <p:nvSpPr>
-          <p:cNvPr id="13" name="Text 11"/>
-          <p:cNvSpPr/>
-          <p:nvPr/>
-        </p:nvSpPr>
-        <p:spPr>
-          <a:xfrm>
-            <a:off x="4645152" y="3063240"/>
-            <a:ext cx="3063240" cy="320040"/>
-          </a:xfrm>
-          <a:prstGeom prst="rect">
-            <a:avLst/>
-          </a:prstGeom>
-          <a:noFill/>
-          <a:ln/>
-        </p:spPr>
-        <p:txBody>
-          <a:bodyPr wrap="square" lIns="0" tIns="0" rIns="0" bIns="0" rtlCol="0" anchor="ctr"/>
-          <a:lstStyle/>
-          <a:p>
-            <a:pPr indent="0" marL="0">
-              <a:buNone/>
-            </a:pPr>
-            <a:r>
-              <a:rPr lang="en-US" sz="1200" b="1" spc="100" kern="0" dirty="0">
-                <a:solidFill>
-                  <a:srgbClr val="5C6C87"/>
-                </a:solidFill>
-                <a:latin typeface="Calibri" pitchFamily="34" charset="0"/>
-                <a:ea typeface="Calibri" pitchFamily="34" charset="-122"/>
-                <a:cs typeface="Calibri" pitchFamily="34" charset="-120"/>
-              </a:rPr>
-              <a:t>18 – 36 mesi</a:t>
-            </a:r>
-            <a:endParaRPr lang="en-US" sz="1200" dirty="0"/>
-          </a:p>
-        </p:txBody>
-      </p:sp>
-      <p:sp>
-        <p:nvSpPr>
-          <p:cNvPr id="14" name="Text 12"/>
-          <p:cNvSpPr/>
-          <p:nvPr/>
-        </p:nvSpPr>
-        <p:spPr>
-          <a:xfrm>
-            <a:off x="4645152" y="3429000"/>
-            <a:ext cx="3063240" cy="548640"/>
-          </a:xfrm>
-          <a:prstGeom prst="rect">
-            <a:avLst/>
-          </a:prstGeom>
-          <a:noFill/>
-          <a:ln/>
-        </p:spPr>
-        <p:txBody>
-          <a:bodyPr wrap="square" lIns="0" tIns="0" rIns="0" bIns="0" rtlCol="0" anchor="ctr"/>
-          <a:lstStyle/>
-          <a:p>
-            <a:pPr indent="0" marL="0">
-              <a:buNone/>
-            </a:pPr>
-            <a:r>
-              <a:rPr lang="en-US" sz="1900" b="1" dirty="0">
+              <a:t>1</a:t>
+            </a:r>
+            <a:endParaRPr lang="en-US" sz="1800" dirty="0"/>
+          </a:p>
+        </p:txBody>
+      </p:sp>
+      <p:sp>
+        <p:nvSpPr>
+          <p:cNvPr id="7" name="Text 5"/>
+          <p:cNvSpPr/>
+          <p:nvPr/>
+        </p:nvSpPr>
+        <p:spPr>
+          <a:xfrm>
+            <a:off x="1600200" y="2331720"/>
+            <a:ext cx="4114800" cy="868680"/>
+          </a:xfrm>
+          <a:prstGeom prst="rect">
+            <a:avLst/>
+          </a:prstGeom>
+          <a:noFill/>
+          <a:ln/>
+        </p:spPr>
+        <p:txBody>
+          <a:bodyPr wrap="square" lIns="0" tIns="0" rIns="0" bIns="0" rtlCol="0" anchor="ctr"/>
+          <a:lstStyle/>
+          <a:p>
+            <a:pPr indent="0" marL="0">
+              <a:buNone/>
+            </a:pPr>
+            <a:r>
+              <a:rPr lang="en-US" sz="1800" b="1" dirty="0">
                 <a:solidFill>
                   <a:srgbClr val="16233B"/>
                 </a:solidFill>
@@ -3931,38 +5801,38 @@
                 <a:ea typeface="Cambria" pitchFamily="34" charset="-122"/>
                 <a:cs typeface="Cambria" pitchFamily="34" charset="-120"/>
               </a:rPr>
-              <a:t>Dati &amp; transazione</a:t>
-            </a:r>
-            <a:endParaRPr lang="en-US" sz="1900" dirty="0"/>
-          </a:p>
-        </p:txBody>
-      </p:sp>
-      <p:sp>
-        <p:nvSpPr>
-          <p:cNvPr id="15" name="Text 13"/>
-          <p:cNvSpPr/>
-          <p:nvPr/>
-        </p:nvSpPr>
-        <p:spPr>
-          <a:xfrm>
-            <a:off x="4645152" y="4023360"/>
-            <a:ext cx="3063240" cy="1463040"/>
-          </a:xfrm>
-          <a:prstGeom prst="rect">
-            <a:avLst/>
-          </a:prstGeom>
-          <a:noFill/>
-          <a:ln/>
-        </p:spPr>
-        <p:txBody>
-          <a:bodyPr wrap="square" lIns="0" tIns="0" rIns="0" bIns="0" rtlCol="0" anchor="ctr"/>
-          <a:lstStyle/>
-          <a:p>
-            <a:pPr indent="0" marL="0">
-              <a:buNone/>
-            </a:pPr>
-            <a:r>
-              <a:rPr lang="en-US" sz="1300" dirty="0">
+              <a:t>Direttiva UE “Case Green”</a:t>
+            </a:r>
+            <a:endParaRPr lang="en-US" sz="1800" dirty="0"/>
+          </a:p>
+        </p:txBody>
+      </p:sp>
+      <p:sp>
+        <p:nvSpPr>
+          <p:cNvPr id="8" name="Text 6"/>
+          <p:cNvSpPr/>
+          <p:nvPr/>
+        </p:nvSpPr>
+        <p:spPr>
+          <a:xfrm>
+            <a:off x="5806440" y="2313432"/>
+            <a:ext cx="5669280" cy="914400"/>
+          </a:xfrm>
+          <a:prstGeom prst="rect">
+            <a:avLst/>
+          </a:prstGeom>
+          <a:noFill/>
+          <a:ln/>
+        </p:spPr>
+        <p:txBody>
+          <a:bodyPr wrap="square" lIns="0" tIns="0" rIns="0" bIns="0" rtlCol="0" anchor="ctr"/>
+          <a:lstStyle/>
+          <a:p>
+            <a:pPr indent="0" marL="0">
+              <a:buNone/>
+            </a:pPr>
+            <a:r>
+              <a:rPr lang="en-US" sz="1350" dirty="0">
                 <a:solidFill>
                   <a:srgbClr val="5C6C87"/>
                 </a:solidFill>
@@ -3970,26 +5840,26 @@
                 <a:ea typeface="Calibri" pitchFamily="34" charset="-122"/>
                 <a:cs typeface="Calibri" pitchFamily="34" charset="-120"/>
               </a:rPr>
-              <a:t>AVM proprietario, rails della transazione digitale, sblocco degli immobili fermi. Il data-moat diventa prodotto.</a:t>
-            </a:r>
-            <a:endParaRPr lang="en-US" sz="1300" dirty="0"/>
-          </a:p>
-        </p:txBody>
-      </p:sp>
-      <p:sp>
-        <p:nvSpPr>
-          <p:cNvPr id="16" name="Shape 14"/>
-          <p:cNvSpPr/>
-          <p:nvPr/>
-        </p:nvSpPr>
-        <p:spPr>
-          <a:xfrm>
-            <a:off x="8238744" y="2148840"/>
-            <a:ext cx="3611880" cy="3566160"/>
+              <a:t>La EPBD (recepimento entro maggio 2026) impone l'adeguamento di ~500.000 abitazioni/anno: ~€85 mld di investimenti entro il 2030. Domanda forzata e finanziabile.</a:t>
+            </a:r>
+            <a:endParaRPr lang="en-US" sz="1350" dirty="0"/>
+          </a:p>
+        </p:txBody>
+      </p:sp>
+      <p:sp>
+        <p:nvSpPr>
+          <p:cNvPr id="9" name="Shape 7"/>
+          <p:cNvSpPr/>
+          <p:nvPr/>
+        </p:nvSpPr>
+        <p:spPr>
+          <a:xfrm>
+            <a:off x="502920" y="3520440"/>
+            <a:ext cx="11155680" cy="1234440"/>
           </a:xfrm>
           <a:prstGeom prst="roundRect">
             <a:avLst>
-              <a:gd name="adj" fmla="val 2564"/>
+              <a:gd name="adj" fmla="val 6667"/>
             </a:avLst>
           </a:prstGeom>
           <a:solidFill>
@@ -4005,19 +5875,181 @@
       </p:sp>
       <p:sp>
         <p:nvSpPr>
-          <p:cNvPr id="17" name="Shape 15"/>
-          <p:cNvSpPr/>
-          <p:nvPr/>
-        </p:nvSpPr>
-        <p:spPr>
-          <a:xfrm>
-            <a:off x="8513064" y="2468880"/>
-            <a:ext cx="1554480" cy="457200"/>
+          <p:cNvPr id="10" name="Shape 8"/>
+          <p:cNvSpPr/>
+          <p:nvPr/>
+        </p:nvSpPr>
+        <p:spPr>
+          <a:xfrm>
+            <a:off x="777240" y="3858768"/>
+            <a:ext cx="566928" cy="566928"/>
+          </a:xfrm>
+          <a:prstGeom prst="ellipse">
+            <a:avLst/>
+          </a:prstGeom>
+          <a:solidFill>
+            <a:srgbClr val="0E1E38"/>
+          </a:solidFill>
+          <a:ln/>
+        </p:spPr>
+      </p:sp>
+      <p:sp>
+        <p:nvSpPr>
+          <p:cNvPr id="11" name="Text 9"/>
+          <p:cNvSpPr/>
+          <p:nvPr/>
+        </p:nvSpPr>
+        <p:spPr>
+          <a:xfrm>
+            <a:off x="777240" y="3858768"/>
+            <a:ext cx="566928" cy="566928"/>
+          </a:xfrm>
+          <a:prstGeom prst="rect">
+            <a:avLst/>
+          </a:prstGeom>
+          <a:noFill/>
+          <a:ln/>
+        </p:spPr>
+        <p:txBody>
+          <a:bodyPr wrap="square" lIns="0" tIns="0" rIns="0" bIns="0" rtlCol="0" anchor="ctr"/>
+          <a:lstStyle/>
+          <a:p>
+            <a:pPr algn="ctr" indent="0" marL="0">
+              <a:buNone/>
+            </a:pPr>
+            <a:r>
+              <a:rPr lang="en-US" sz="1800" b="1" dirty="0">
+                <a:solidFill>
+                  <a:srgbClr val="FFFFFF"/>
+                </a:solidFill>
+                <a:latin typeface="Cambria" pitchFamily="34" charset="0"/>
+                <a:ea typeface="Cambria" pitchFamily="34" charset="-122"/>
+                <a:cs typeface="Cambria" pitchFamily="34" charset="-120"/>
+              </a:rPr>
+              <a:t>2</a:t>
+            </a:r>
+            <a:endParaRPr lang="en-US" sz="1800" dirty="0"/>
+          </a:p>
+        </p:txBody>
+      </p:sp>
+      <p:sp>
+        <p:nvSpPr>
+          <p:cNvPr id="12" name="Text 10"/>
+          <p:cNvSpPr/>
+          <p:nvPr/>
+        </p:nvSpPr>
+        <p:spPr>
+          <a:xfrm>
+            <a:off x="1600200" y="3703320"/>
+            <a:ext cx="4114800" cy="868680"/>
+          </a:xfrm>
+          <a:prstGeom prst="rect">
+            <a:avLst/>
+          </a:prstGeom>
+          <a:noFill/>
+          <a:ln/>
+        </p:spPr>
+        <p:txBody>
+          <a:bodyPr wrap="square" lIns="0" tIns="0" rIns="0" bIns="0" rtlCol="0" anchor="ctr"/>
+          <a:lstStyle/>
+          <a:p>
+            <a:pPr indent="0" marL="0">
+              <a:buNone/>
+            </a:pPr>
+            <a:r>
+              <a:rPr lang="en-US" sz="1800" b="1" dirty="0">
+                <a:solidFill>
+                  <a:srgbClr val="16233B"/>
+                </a:solidFill>
+                <a:latin typeface="Cambria" pitchFamily="34" charset="0"/>
+                <a:ea typeface="Cambria" pitchFamily="34" charset="-122"/>
+                <a:cs typeface="Cambria" pitchFamily="34" charset="-120"/>
+              </a:rPr>
+              <a:t>Agenti AI finalmente maturi</a:t>
+            </a:r>
+            <a:endParaRPr lang="en-US" sz="1800" dirty="0"/>
+          </a:p>
+        </p:txBody>
+      </p:sp>
+      <p:sp>
+        <p:nvSpPr>
+          <p:cNvPr id="13" name="Text 11"/>
+          <p:cNvSpPr/>
+          <p:nvPr/>
+        </p:nvSpPr>
+        <p:spPr>
+          <a:xfrm>
+            <a:off x="5806440" y="3685032"/>
+            <a:ext cx="5669280" cy="914400"/>
+          </a:xfrm>
+          <a:prstGeom prst="rect">
+            <a:avLst/>
+          </a:prstGeom>
+          <a:noFill/>
+          <a:ln/>
+        </p:spPr>
+        <p:txBody>
+          <a:bodyPr wrap="square" lIns="0" tIns="0" rIns="0" bIns="0" rtlCol="0" anchor="ctr"/>
+          <a:lstStyle/>
+          <a:p>
+            <a:pPr indent="0" marL="0">
+              <a:buNone/>
+            </a:pPr>
+            <a:r>
+              <a:rPr lang="en-US" sz="1350" dirty="0">
+                <a:solidFill>
+                  <a:srgbClr val="5C6C87"/>
+                </a:solidFill>
+                <a:latin typeface="Calibri" pitchFamily="34" charset="0"/>
+                <a:ea typeface="Calibri" pitchFamily="34" charset="-122"/>
+                <a:cs typeface="Calibri" pitchFamily="34" charset="-120"/>
+              </a:rPr>
+              <a:t>I compiti document-heavy e rule-heavy, come leggere visure, incrociare planimetrie e verificare regole, sono ora automatizzabili con affidabilità.</a:t>
+            </a:r>
+            <a:endParaRPr lang="en-US" sz="1350" dirty="0"/>
+          </a:p>
+        </p:txBody>
+      </p:sp>
+      <p:sp>
+        <p:nvSpPr>
+          <p:cNvPr id="14" name="Shape 12"/>
+          <p:cNvSpPr/>
+          <p:nvPr/>
+        </p:nvSpPr>
+        <p:spPr>
+          <a:xfrm>
+            <a:off x="502920" y="4892040"/>
+            <a:ext cx="11155680" cy="1234440"/>
           </a:xfrm>
           <a:prstGeom prst="roundRect">
             <a:avLst>
-              <a:gd name="adj" fmla="val 50000"/>
+              <a:gd name="adj" fmla="val 6667"/>
             </a:avLst>
+          </a:prstGeom>
+          <a:solidFill>
+            <a:srgbClr val="F4F7FC"/>
+          </a:solidFill>
+          <a:ln w="12700">
+            <a:solidFill>
+              <a:srgbClr val="D9E2EF"/>
+            </a:solidFill>
+            <a:prstDash val="solid"/>
+          </a:ln>
+        </p:spPr>
+      </p:sp>
+      <p:sp>
+        <p:nvSpPr>
+          <p:cNvPr id="15" name="Shape 13"/>
+          <p:cNvSpPr/>
+          <p:nvPr/>
+        </p:nvSpPr>
+        <p:spPr>
+          <a:xfrm>
+            <a:off x="777240" y="5230368"/>
+            <a:ext cx="566928" cy="566928"/>
+          </a:xfrm>
+          <a:prstGeom prst="ellipse">
+            <a:avLst/>
           </a:prstGeom>
           <a:solidFill>
             <a:srgbClr val="E8A33D"/>
@@ -4027,14 +6059,14 @@
       </p:sp>
       <p:sp>
         <p:nvSpPr>
-          <p:cNvPr id="18" name="Text 16"/>
-          <p:cNvSpPr/>
-          <p:nvPr/>
-        </p:nvSpPr>
-        <p:spPr>
-          <a:xfrm>
-            <a:off x="8513064" y="2468880"/>
-            <a:ext cx="1554480" cy="457200"/>
+          <p:cNvPr id="16" name="Text 14"/>
+          <p:cNvSpPr/>
+          <p:nvPr/>
+        </p:nvSpPr>
+        <p:spPr>
+          <a:xfrm>
+            <a:off x="777240" y="5230368"/>
+            <a:ext cx="566928" cy="566928"/>
           </a:xfrm>
           <a:prstGeom prst="rect">
             <a:avLst/>
@@ -4050,7 +6082,7 @@
               <a:buNone/>
             </a:pPr>
             <a:r>
-              <a:rPr lang="en-US" sz="1500" b="1" dirty="0">
+              <a:rPr lang="en-US" sz="1800" b="1" dirty="0">
                 <a:solidFill>
                   <a:srgbClr val="0E1E38"/>
                 </a:solidFill>
@@ -4058,77 +6090,38 @@
                 <a:ea typeface="Cambria" pitchFamily="34" charset="-122"/>
                 <a:cs typeface="Cambria" pitchFamily="34" charset="-120"/>
               </a:rPr>
-              <a:t>Fase 3</a:t>
-            </a:r>
-            <a:endParaRPr lang="en-US" sz="1500" dirty="0"/>
-          </a:p>
-        </p:txBody>
-      </p:sp>
-      <p:sp>
-        <p:nvSpPr>
-          <p:cNvPr id="19" name="Text 17"/>
-          <p:cNvSpPr/>
-          <p:nvPr/>
-        </p:nvSpPr>
-        <p:spPr>
-          <a:xfrm>
-            <a:off x="8513064" y="3063240"/>
-            <a:ext cx="3063240" cy="320040"/>
-          </a:xfrm>
-          <a:prstGeom prst="rect">
-            <a:avLst/>
-          </a:prstGeom>
-          <a:noFill/>
-          <a:ln/>
-        </p:spPr>
-        <p:txBody>
-          <a:bodyPr wrap="square" lIns="0" tIns="0" rIns="0" bIns="0" rtlCol="0" anchor="ctr"/>
-          <a:lstStyle/>
-          <a:p>
-            <a:pPr indent="0" marL="0">
-              <a:buNone/>
-            </a:pPr>
-            <a:r>
-              <a:rPr lang="en-US" sz="1200" b="1" spc="100" kern="0" dirty="0">
-                <a:solidFill>
-                  <a:srgbClr val="5C6C87"/>
-                </a:solidFill>
-                <a:latin typeface="Calibri" pitchFamily="34" charset="0"/>
-                <a:ea typeface="Calibri" pitchFamily="34" charset="-122"/>
-                <a:cs typeface="Calibri" pitchFamily="34" charset="-120"/>
-              </a:rPr>
-              <a:t>36 mesi +</a:t>
-            </a:r>
-            <a:endParaRPr lang="en-US" sz="1200" dirty="0"/>
-          </a:p>
-        </p:txBody>
-      </p:sp>
-      <p:sp>
-        <p:nvSpPr>
-          <p:cNvPr id="20" name="Text 18"/>
-          <p:cNvSpPr/>
-          <p:nvPr/>
-        </p:nvSpPr>
-        <p:spPr>
-          <a:xfrm>
-            <a:off x="8513064" y="3429000"/>
-            <a:ext cx="3063240" cy="548640"/>
-          </a:xfrm>
-          <a:prstGeom prst="rect">
-            <a:avLst/>
-          </a:prstGeom>
-          <a:noFill/>
-          <a:ln/>
-        </p:spPr>
-        <p:txBody>
-          <a:bodyPr wrap="square" lIns="0" tIns="0" rIns="0" bIns="0" rtlCol="0" anchor="ctr"/>
-          <a:lstStyle/>
-          <a:p>
-            <a:pPr indent="0" marL="0">
-              <a:buNone/>
-            </a:pPr>
-            <a:r>
-              <a:rPr lang="en-US" sz="1900" b="1" dirty="0">
+              <a:t>3</a:t>
+            </a:r>
+            <a:endParaRPr lang="en-US" sz="1800" dirty="0"/>
+          </a:p>
+        </p:txBody>
+      </p:sp>
+      <p:sp>
+        <p:nvSpPr>
+          <p:cNvPr id="17" name="Text 15"/>
+          <p:cNvSpPr/>
+          <p:nvPr/>
+        </p:nvSpPr>
+        <p:spPr>
+          <a:xfrm>
+            <a:off x="1600200" y="5074920"/>
+            <a:ext cx="4114800" cy="868680"/>
+          </a:xfrm>
+          <a:prstGeom prst="rect">
+            <a:avLst/>
+          </a:prstGeom>
+          <a:noFill/>
+          <a:ln/>
+        </p:spPr>
+        <p:txBody>
+          <a:bodyPr wrap="square" lIns="0" tIns="0" rIns="0" bIns="0" rtlCol="0" anchor="ctr"/>
+          <a:lstStyle/>
+          <a:p>
+            <a:pPr indent="0" marL="0">
+              <a:buNone/>
+            </a:pPr>
+            <a:r>
+              <a:rPr lang="en-US" sz="1800" b="1" dirty="0">
                 <a:solidFill>
                   <a:srgbClr val="16233B"/>
                 </a:solidFill>
@@ -4136,38 +6129,38 @@
                 <a:ea typeface="Cambria" pitchFamily="34" charset="-122"/>
                 <a:cs typeface="Cambria" pitchFamily="34" charset="-120"/>
               </a:rPr>
-              <a:t>Piattaforma 360°</a:t>
-            </a:r>
-            <a:endParaRPr lang="en-US" sz="1900" dirty="0"/>
-          </a:p>
-        </p:txBody>
-      </p:sp>
-      <p:sp>
-        <p:nvSpPr>
-          <p:cNvPr id="21" name="Text 19"/>
-          <p:cNvSpPr/>
-          <p:nvPr/>
-        </p:nvSpPr>
-        <p:spPr>
-          <a:xfrm>
-            <a:off x="8513064" y="4023360"/>
-            <a:ext cx="3063240" cy="1463040"/>
-          </a:xfrm>
-          <a:prstGeom prst="rect">
-            <a:avLst/>
-          </a:prstGeom>
-          <a:noFill/>
-          <a:ln/>
-        </p:spPr>
-        <p:txBody>
-          <a:bodyPr wrap="square" lIns="0" tIns="0" rIns="0" bIns="0" rtlCol="0" anchor="ctr"/>
-          <a:lstStyle/>
-          <a:p>
-            <a:pPr indent="0" marL="0">
-              <a:buNone/>
-            </a:pPr>
-            <a:r>
-              <a:rPr lang="en-US" sz="1300" dirty="0">
+              <a:t>Eredità del Superbonus</a:t>
+            </a:r>
+            <a:endParaRPr lang="en-US" sz="1800" dirty="0"/>
+          </a:p>
+        </p:txBody>
+      </p:sp>
+      <p:sp>
+        <p:nvSpPr>
+          <p:cNvPr id="18" name="Text 16"/>
+          <p:cNvSpPr/>
+          <p:nvPr/>
+        </p:nvSpPr>
+        <p:spPr>
+          <a:xfrm>
+            <a:off x="5806440" y="5056632"/>
+            <a:ext cx="5669280" cy="914400"/>
+          </a:xfrm>
+          <a:prstGeom prst="rect">
+            <a:avLst/>
+          </a:prstGeom>
+          <a:noFill/>
+          <a:ln/>
+        </p:spPr>
+        <p:txBody>
+          <a:bodyPr wrap="square" lIns="0" tIns="0" rIns="0" bIns="0" rtlCol="0" anchor="ctr"/>
+          <a:lstStyle/>
+          <a:p>
+            <a:pPr indent="0" marL="0">
+              <a:buNone/>
+            </a:pPr>
+            <a:r>
+              <a:rPr lang="en-US" sz="1350" dirty="0">
                 <a:solidFill>
                   <a:srgbClr val="5C6C87"/>
                 </a:solidFill>
@@ -4175,15 +6168,15 @@
                 <a:ea typeface="Calibri" pitchFamily="34" charset="-122"/>
                 <a:cs typeface="Calibri" pitchFamily="34" charset="-120"/>
               </a:rPr>
-              <a:t>Intelligence energetica Case Green e marketplace finanziario. Scala nazionale, poi replicabilità europea.</a:t>
-            </a:r>
-            <a:endParaRPr lang="en-US" sz="1300" dirty="0"/>
-          </a:p>
-        </p:txBody>
-      </p:sp>
-      <p:sp>
-        <p:nvSpPr>
-          <p:cNvPr id="22" name="Text 20"/>
+              <a:t>Un ecosistema di dati, cantieri e pratiche edilizie mai visto prima, oggi disponibile per essere strutturato.</a:t>
+            </a:r>
+            <a:endParaRPr lang="en-US" sz="1350" dirty="0"/>
+          </a:p>
+        </p:txBody>
+      </p:sp>
+      <p:sp>
+        <p:nvSpPr>
+          <p:cNvPr id="19" name="Text 17"/>
           <p:cNvSpPr/>
           <p:nvPr/>
         </p:nvSpPr>
@@ -4214,7 +6207,7 @@
                 <a:ea typeface="Calibri" pitchFamily="34" charset="-122"/>
                 <a:cs typeface="Calibri" pitchFamily="34" charset="-120"/>
               </a:rPr>
-              <a:t>11</a:t>
+              <a:t>12</a:t>
             </a:r>
             <a:endParaRPr lang="en-US" sz="1000" dirty="0"/>
           </a:p>
@@ -4222,7 +6215,7 @@
       </p:sp>
       <p:sp>
         <p:nvSpPr>
-          <p:cNvPr id="23" name="Text 21"/>
+          <p:cNvPr id="20" name="Text 18"/>
           <p:cNvSpPr/>
           <p:nvPr/>
         </p:nvSpPr>
@@ -4267,9 +6260,9 @@
 </p:sld>
 </file>
 
-<file path=ppt/slides/slide12.xml><?xml version="1.0" encoding="utf-8"?>
+<file path=ppt/slides/slide13.xml><?xml version="1.0" encoding="utf-8"?>
 <p:sld xmlns:a="http://schemas.openxmlformats.org/drawingml/2006/main" xmlns:r="http://schemas.openxmlformats.org/officeDocument/2006/relationships" xmlns:p="http://schemas.openxmlformats.org/presentationml/2006/main">
-  <p:cSld name="Slide 12">
+  <p:cSld name="Slide 13">
     <p:bg>
       <p:bgPr>
         <a:solidFill>
@@ -4293,6 +6286,1610 @@
       </p:grpSpPr>
       <p:sp>
         <p:nvSpPr>
+          <p:cNvPr id="2" name="Text 0"/>
+          <p:cNvSpPr/>
+          <p:nvPr/>
+        </p:nvSpPr>
+        <p:spPr>
+          <a:xfrm>
+            <a:off x="548640" y="502920"/>
+            <a:ext cx="5486400" cy="274320"/>
+          </a:xfrm>
+          <a:prstGeom prst="rect">
+            <a:avLst/>
+          </a:prstGeom>
+          <a:noFill/>
+          <a:ln/>
+        </p:spPr>
+        <p:txBody>
+          <a:bodyPr wrap="square" lIns="0" tIns="0" rIns="0" bIns="0" rtlCol="0" anchor="ctr"/>
+          <a:lstStyle/>
+          <a:p>
+            <a:pPr algn="l" indent="0" marL="0">
+              <a:buNone/>
+            </a:pPr>
+            <a:r>
+              <a:rPr lang="en-US" sz="1200" b="1" spc="300" kern="0" dirty="0">
+                <a:solidFill>
+                  <a:srgbClr val="E8A33D"/>
+                </a:solidFill>
+                <a:latin typeface="Calibri" pitchFamily="34" charset="0"/>
+                <a:ea typeface="Calibri" pitchFamily="34" charset="-122"/>
+                <a:cs typeface="Calibri" pitchFamily="34" charset="-120"/>
+              </a:rPr>
+              <a:t>PERCHÉ NOI</a:t>
+            </a:r>
+            <a:endParaRPr lang="en-US" sz="1200" dirty="0"/>
+          </a:p>
+        </p:txBody>
+      </p:sp>
+      <p:sp>
+        <p:nvSpPr>
+          <p:cNvPr id="3" name="Text 1"/>
+          <p:cNvSpPr/>
+          <p:nvPr/>
+        </p:nvSpPr>
+        <p:spPr>
+          <a:xfrm>
+            <a:off x="502920" y="822960"/>
+            <a:ext cx="11155680" cy="1097280"/>
+          </a:xfrm>
+          <a:prstGeom prst="rect">
+            <a:avLst/>
+          </a:prstGeom>
+          <a:noFill/>
+          <a:ln/>
+        </p:spPr>
+        <p:txBody>
+          <a:bodyPr wrap="square" lIns="0" tIns="0" rIns="0" bIns="0" rtlCol="0" anchor="ctr"/>
+          <a:lstStyle/>
+          <a:p>
+            <a:pPr indent="0" marL="0">
+              <a:buNone/>
+            </a:pPr>
+            <a:r>
+              <a:rPr lang="en-US" sz="2600" b="1" dirty="0">
+                <a:solidFill>
+                  <a:srgbClr val="FFFFFF"/>
+                </a:solidFill>
+                <a:latin typeface="Cambria" pitchFamily="34" charset="0"/>
+                <a:ea typeface="Cambria" pitchFamily="34" charset="-122"/>
+                <a:cs typeface="Cambria" pitchFamily="34" charset="-120"/>
+              </a:rPr>
+              <a:t>Non scommettiamo sull'AI da costruire. Verticalizziamo una piattaforma che già esiste.</a:t>
+            </a:r>
+            <a:endParaRPr lang="en-US" sz="2600" dirty="0"/>
+          </a:p>
+        </p:txBody>
+      </p:sp>
+      <p:sp>
+        <p:nvSpPr>
+          <p:cNvPr id="4" name="Shape 2"/>
+          <p:cNvSpPr/>
+          <p:nvPr/>
+        </p:nvSpPr>
+        <p:spPr>
+          <a:xfrm>
+            <a:off x="502920" y="2468880"/>
+            <a:ext cx="5852160" cy="1097280"/>
+          </a:xfrm>
+          <a:prstGeom prst="roundRect">
+            <a:avLst>
+              <a:gd name="adj" fmla="val 7500"/>
+            </a:avLst>
+          </a:prstGeom>
+          <a:solidFill>
+            <a:srgbClr val="17294A"/>
+          </a:solidFill>
+          <a:ln w="12700">
+            <a:solidFill>
+              <a:srgbClr val="27406B"/>
+            </a:solidFill>
+            <a:prstDash val="solid"/>
+          </a:ln>
+        </p:spPr>
+      </p:sp>
+      <p:sp>
+        <p:nvSpPr>
+          <p:cNvPr id="5" name="Text 3"/>
+          <p:cNvSpPr/>
+          <p:nvPr/>
+        </p:nvSpPr>
+        <p:spPr>
+          <a:xfrm>
+            <a:off x="777240" y="2615184"/>
+            <a:ext cx="5303520" cy="411480"/>
+          </a:xfrm>
+          <a:prstGeom prst="rect">
+            <a:avLst/>
+          </a:prstGeom>
+          <a:noFill/>
+          <a:ln/>
+        </p:spPr>
+        <p:txBody>
+          <a:bodyPr wrap="square" lIns="0" tIns="0" rIns="0" bIns="0" rtlCol="0" anchor="ctr"/>
+          <a:lstStyle/>
+          <a:p>
+            <a:pPr indent="0" marL="0">
+              <a:buNone/>
+            </a:pPr>
+            <a:r>
+              <a:rPr lang="en-US" sz="1800" b="1" dirty="0">
+                <a:solidFill>
+                  <a:srgbClr val="E8A33D"/>
+                </a:solidFill>
+                <a:latin typeface="Cambria" pitchFamily="34" charset="0"/>
+                <a:ea typeface="Cambria" pitchFamily="34" charset="-122"/>
+                <a:cs typeface="Cambria" pitchFamily="34" charset="-120"/>
+              </a:rPr>
+              <a:t>Universe</a:t>
+            </a:r>
+            <a:endParaRPr lang="en-US" sz="1800" dirty="0"/>
+          </a:p>
+        </p:txBody>
+      </p:sp>
+      <p:sp>
+        <p:nvSpPr>
+          <p:cNvPr id="6" name="Text 4"/>
+          <p:cNvSpPr/>
+          <p:nvPr/>
+        </p:nvSpPr>
+        <p:spPr>
+          <a:xfrm>
+            <a:off x="777240" y="3017520"/>
+            <a:ext cx="5394960" cy="502920"/>
+          </a:xfrm>
+          <a:prstGeom prst="rect">
+            <a:avLst/>
+          </a:prstGeom>
+          <a:noFill/>
+          <a:ln/>
+        </p:spPr>
+        <p:txBody>
+          <a:bodyPr wrap="square" lIns="0" tIns="0" rIns="0" bIns="0" rtlCol="0" anchor="ctr"/>
+          <a:lstStyle/>
+          <a:p>
+            <a:pPr indent="0" marL="0">
+              <a:buNone/>
+            </a:pPr>
+            <a:r>
+              <a:rPr lang="en-US" sz="1300" dirty="0">
+                <a:solidFill>
+                  <a:srgbClr val="EAF1FA"/>
+                </a:solidFill>
+                <a:latin typeface="Calibri" pitchFamily="34" charset="0"/>
+                <a:ea typeface="Calibri" pitchFamily="34" charset="-122"/>
+                <a:cs typeface="Calibri" pitchFamily="34" charset="-120"/>
+              </a:rPr>
+              <a:t>La piattaforma agentica di Skylabs: l'infrastruttura AI è già in produzione, non da inventare.</a:t>
+            </a:r>
+            <a:endParaRPr lang="en-US" sz="1300" dirty="0"/>
+          </a:p>
+        </p:txBody>
+      </p:sp>
+      <p:sp>
+        <p:nvSpPr>
+          <p:cNvPr id="7" name="Shape 5"/>
+          <p:cNvSpPr/>
+          <p:nvPr/>
+        </p:nvSpPr>
+        <p:spPr>
+          <a:xfrm>
+            <a:off x="502920" y="3703320"/>
+            <a:ext cx="5852160" cy="1097280"/>
+          </a:xfrm>
+          <a:prstGeom prst="roundRect">
+            <a:avLst>
+              <a:gd name="adj" fmla="val 7500"/>
+            </a:avLst>
+          </a:prstGeom>
+          <a:solidFill>
+            <a:srgbClr val="17294A"/>
+          </a:solidFill>
+          <a:ln w="12700">
+            <a:solidFill>
+              <a:srgbClr val="27406B"/>
+            </a:solidFill>
+            <a:prstDash val="solid"/>
+          </a:ln>
+        </p:spPr>
+      </p:sp>
+      <p:sp>
+        <p:nvSpPr>
+          <p:cNvPr id="8" name="Text 6"/>
+          <p:cNvSpPr/>
+          <p:nvPr/>
+        </p:nvSpPr>
+        <p:spPr>
+          <a:xfrm>
+            <a:off x="777240" y="3849624"/>
+            <a:ext cx="5303520" cy="411480"/>
+          </a:xfrm>
+          <a:prstGeom prst="rect">
+            <a:avLst/>
+          </a:prstGeom>
+          <a:noFill/>
+          <a:ln/>
+        </p:spPr>
+        <p:txBody>
+          <a:bodyPr wrap="square" lIns="0" tIns="0" rIns="0" bIns="0" rtlCol="0" anchor="ctr"/>
+          <a:lstStyle/>
+          <a:p>
+            <a:pPr indent="0" marL="0">
+              <a:buNone/>
+            </a:pPr>
+            <a:r>
+              <a:rPr lang="en-US" sz="1800" b="1" dirty="0">
+                <a:solidFill>
+                  <a:srgbClr val="E8A33D"/>
+                </a:solidFill>
+                <a:latin typeface="Cambria" pitchFamily="34" charset="0"/>
+                <a:ea typeface="Cambria" pitchFamily="34" charset="-122"/>
+                <a:cs typeface="Cambria" pitchFamily="34" charset="-120"/>
+              </a:rPr>
+              <a:t>Skylabs / SAE</a:t>
+            </a:r>
+            <a:endParaRPr lang="en-US" sz="1800" dirty="0"/>
+          </a:p>
+        </p:txBody>
+      </p:sp>
+      <p:sp>
+        <p:nvSpPr>
+          <p:cNvPr id="9" name="Text 7"/>
+          <p:cNvSpPr/>
+          <p:nvPr/>
+        </p:nvSpPr>
+        <p:spPr>
+          <a:xfrm>
+            <a:off x="777240" y="4251960"/>
+            <a:ext cx="5394960" cy="502920"/>
+          </a:xfrm>
+          <a:prstGeom prst="rect">
+            <a:avLst/>
+          </a:prstGeom>
+          <a:noFill/>
+          <a:ln/>
+        </p:spPr>
+        <p:txBody>
+          <a:bodyPr wrap="square" lIns="0" tIns="0" rIns="0" bIns="0" rtlCol="0" anchor="ctr"/>
+          <a:lstStyle/>
+          <a:p>
+            <a:pPr indent="0" marL="0">
+              <a:buNone/>
+            </a:pPr>
+            <a:r>
+              <a:rPr lang="en-US" sz="1300" dirty="0">
+                <a:solidFill>
+                  <a:srgbClr val="EAF1FA"/>
+                </a:solidFill>
+                <a:latin typeface="Calibri" pitchFamily="34" charset="0"/>
+                <a:ea typeface="Calibri" pitchFamily="34" charset="-122"/>
+                <a:cs typeface="Calibri" pitchFamily="34" charset="-120"/>
+              </a:rPr>
+              <a:t>Competenza consolidata di AI enterprise e integrazione su processi complessi.</a:t>
+            </a:r>
+            <a:endParaRPr lang="en-US" sz="1300" dirty="0"/>
+          </a:p>
+        </p:txBody>
+      </p:sp>
+      <p:sp>
+        <p:nvSpPr>
+          <p:cNvPr id="10" name="Shape 8"/>
+          <p:cNvSpPr/>
+          <p:nvPr/>
+        </p:nvSpPr>
+        <p:spPr>
+          <a:xfrm>
+            <a:off x="502920" y="4937760"/>
+            <a:ext cx="5852160" cy="1097280"/>
+          </a:xfrm>
+          <a:prstGeom prst="roundRect">
+            <a:avLst>
+              <a:gd name="adj" fmla="val 7500"/>
+            </a:avLst>
+          </a:prstGeom>
+          <a:solidFill>
+            <a:srgbClr val="17294A"/>
+          </a:solidFill>
+          <a:ln w="12700">
+            <a:solidFill>
+              <a:srgbClr val="27406B"/>
+            </a:solidFill>
+            <a:prstDash val="solid"/>
+          </a:ln>
+        </p:spPr>
+      </p:sp>
+      <p:sp>
+        <p:nvSpPr>
+          <p:cNvPr id="11" name="Text 9"/>
+          <p:cNvSpPr/>
+          <p:nvPr/>
+        </p:nvSpPr>
+        <p:spPr>
+          <a:xfrm>
+            <a:off x="777240" y="5084064"/>
+            <a:ext cx="5303520" cy="411480"/>
+          </a:xfrm>
+          <a:prstGeom prst="rect">
+            <a:avLst/>
+          </a:prstGeom>
+          <a:noFill/>
+          <a:ln/>
+        </p:spPr>
+        <p:txBody>
+          <a:bodyPr wrap="square" lIns="0" tIns="0" rIns="0" bIns="0" rtlCol="0" anchor="ctr"/>
+          <a:lstStyle/>
+          <a:p>
+            <a:pPr indent="0" marL="0">
+              <a:buNone/>
+            </a:pPr>
+            <a:r>
+              <a:rPr lang="en-US" sz="1800" b="1" dirty="0">
+                <a:solidFill>
+                  <a:srgbClr val="E8A33D"/>
+                </a:solidFill>
+                <a:latin typeface="Cambria" pitchFamily="34" charset="0"/>
+                <a:ea typeface="Cambria" pitchFamily="34" charset="-122"/>
+                <a:cs typeface="Cambria" pitchFamily="34" charset="-120"/>
+              </a:rPr>
+              <a:t>Time-to-market</a:t>
+            </a:r>
+            <a:endParaRPr lang="en-US" sz="1800" dirty="0"/>
+          </a:p>
+        </p:txBody>
+      </p:sp>
+      <p:sp>
+        <p:nvSpPr>
+          <p:cNvPr id="12" name="Text 10"/>
+          <p:cNvSpPr/>
+          <p:nvPr/>
+        </p:nvSpPr>
+        <p:spPr>
+          <a:xfrm>
+            <a:off x="777240" y="5486400"/>
+            <a:ext cx="5394960" cy="502920"/>
+          </a:xfrm>
+          <a:prstGeom prst="rect">
+            <a:avLst/>
+          </a:prstGeom>
+          <a:noFill/>
+          <a:ln/>
+        </p:spPr>
+        <p:txBody>
+          <a:bodyPr wrap="square" lIns="0" tIns="0" rIns="0" bIns="0" rtlCol="0" anchor="ctr"/>
+          <a:lstStyle/>
+          <a:p>
+            <a:pPr indent="0" marL="0">
+              <a:buNone/>
+            </a:pPr>
+            <a:r>
+              <a:rPr lang="en-US" sz="1300" dirty="0">
+                <a:solidFill>
+                  <a:srgbClr val="EAF1FA"/>
+                </a:solidFill>
+                <a:latin typeface="Calibri" pitchFamily="34" charset="0"/>
+                <a:ea typeface="Calibri" pitchFamily="34" charset="-122"/>
+                <a:cs typeface="Calibri" pitchFamily="34" charset="-120"/>
+              </a:rPr>
+              <a:t>Partiamo da una vertical application su un mercato rotto, non da un foglio bianco.</a:t>
+            </a:r>
+            <a:endParaRPr lang="en-US" sz="1300" dirty="0"/>
+          </a:p>
+        </p:txBody>
+      </p:sp>
+      <p:sp>
+        <p:nvSpPr>
+          <p:cNvPr id="13" name="Shape 11"/>
+          <p:cNvSpPr/>
+          <p:nvPr/>
+        </p:nvSpPr>
+        <p:spPr>
+          <a:xfrm>
+            <a:off x="6858000" y="2468880"/>
+            <a:ext cx="4800600" cy="3566160"/>
+          </a:xfrm>
+          <a:prstGeom prst="roundRect">
+            <a:avLst>
+              <a:gd name="adj" fmla="val 2564"/>
+            </a:avLst>
+          </a:prstGeom>
+          <a:solidFill>
+            <a:srgbClr val="0A1730"/>
+          </a:solidFill>
+          <a:ln w="12700">
+            <a:solidFill>
+              <a:srgbClr val="27406B"/>
+            </a:solidFill>
+            <a:prstDash val="solid"/>
+          </a:ln>
+        </p:spPr>
+      </p:sp>
+      <p:sp>
+        <p:nvSpPr>
+          <p:cNvPr id="14" name="Text 12"/>
+          <p:cNvSpPr/>
+          <p:nvPr/>
+        </p:nvSpPr>
+        <p:spPr>
+          <a:xfrm>
+            <a:off x="7132320" y="2651760"/>
+            <a:ext cx="3657600" cy="365760"/>
+          </a:xfrm>
+          <a:prstGeom prst="rect">
+            <a:avLst/>
+          </a:prstGeom>
+          <a:noFill/>
+          <a:ln/>
+        </p:spPr>
+        <p:txBody>
+          <a:bodyPr wrap="square" lIns="0" tIns="0" rIns="0" bIns="0" rtlCol="0" anchor="ctr"/>
+          <a:lstStyle/>
+          <a:p>
+            <a:pPr indent="0" marL="0">
+              <a:buNone/>
+            </a:pPr>
+            <a:r>
+              <a:rPr lang="en-US" sz="1500" b="1" dirty="0">
+                <a:solidFill>
+                  <a:srgbClr val="9DB0CC"/>
+                </a:solidFill>
+                <a:latin typeface="Cambria" pitchFamily="34" charset="0"/>
+                <a:ea typeface="Cambria" pitchFamily="34" charset="-122"/>
+                <a:cs typeface="Cambria" pitchFamily="34" charset="-120"/>
+              </a:rPr>
+              <a:t>Lo stack</a:t>
+            </a:r>
+            <a:endParaRPr lang="en-US" sz="1500" dirty="0"/>
+          </a:p>
+        </p:txBody>
+      </p:sp>
+      <p:sp>
+        <p:nvSpPr>
+          <p:cNvPr id="15" name="Shape 13"/>
+          <p:cNvSpPr/>
+          <p:nvPr/>
+        </p:nvSpPr>
+        <p:spPr>
+          <a:xfrm>
+            <a:off x="7178040" y="3108960"/>
+            <a:ext cx="4160520" cy="868680"/>
+          </a:xfrm>
+          <a:prstGeom prst="roundRect">
+            <a:avLst>
+              <a:gd name="adj" fmla="val 8421"/>
+            </a:avLst>
+          </a:prstGeom>
+          <a:solidFill>
+            <a:srgbClr val="E8A33D"/>
+          </a:solidFill>
+          <a:ln/>
+        </p:spPr>
+      </p:sp>
+      <p:sp>
+        <p:nvSpPr>
+          <p:cNvPr id="16" name="Text 14"/>
+          <p:cNvSpPr/>
+          <p:nvPr/>
+        </p:nvSpPr>
+        <p:spPr>
+          <a:xfrm>
+            <a:off x="7178040" y="3200400"/>
+            <a:ext cx="4160520" cy="365760"/>
+          </a:xfrm>
+          <a:prstGeom prst="rect">
+            <a:avLst/>
+          </a:prstGeom>
+          <a:noFill/>
+          <a:ln/>
+        </p:spPr>
+        <p:txBody>
+          <a:bodyPr wrap="square" lIns="0" tIns="0" rIns="0" bIns="0" rtlCol="0" anchor="ctr"/>
+          <a:lstStyle/>
+          <a:p>
+            <a:pPr algn="ctr" indent="0" marL="0">
+              <a:buNone/>
+            </a:pPr>
+            <a:r>
+              <a:rPr lang="en-US" sz="1800" b="1" dirty="0">
+                <a:solidFill>
+                  <a:srgbClr val="0E1E38"/>
+                </a:solidFill>
+                <a:latin typeface="Cambria" pitchFamily="34" charset="0"/>
+                <a:ea typeface="Cambria" pitchFamily="34" charset="-122"/>
+                <a:cs typeface="Cambria" pitchFamily="34" charset="-120"/>
+              </a:rPr>
+              <a:t>Conforme</a:t>
+            </a:r>
+            <a:endParaRPr lang="en-US" sz="1800" dirty="0"/>
+          </a:p>
+        </p:txBody>
+      </p:sp>
+      <p:sp>
+        <p:nvSpPr>
+          <p:cNvPr id="17" name="Text 15"/>
+          <p:cNvSpPr/>
+          <p:nvPr/>
+        </p:nvSpPr>
+        <p:spPr>
+          <a:xfrm>
+            <a:off x="7178040" y="3584448"/>
+            <a:ext cx="4160520" cy="320040"/>
+          </a:xfrm>
+          <a:prstGeom prst="rect">
+            <a:avLst/>
+          </a:prstGeom>
+          <a:noFill/>
+          <a:ln/>
+        </p:spPr>
+        <p:txBody>
+          <a:bodyPr wrap="square" lIns="0" tIns="0" rIns="0" bIns="0" rtlCol="0" anchor="ctr"/>
+          <a:lstStyle/>
+          <a:p>
+            <a:pPr algn="ctr" indent="0" marL="0">
+              <a:buNone/>
+            </a:pPr>
+            <a:r>
+              <a:rPr lang="en-US" sz="1100" dirty="0">
+                <a:solidFill>
+                  <a:srgbClr val="0E1E38"/>
+                </a:solidFill>
+                <a:latin typeface="Calibri" pitchFamily="34" charset="0"/>
+                <a:ea typeface="Calibri" pitchFamily="34" charset="-122"/>
+                <a:cs typeface="Calibri" pitchFamily="34" charset="-120"/>
+              </a:rPr>
+              <a:t>vertical app · real estate Italia</a:t>
+            </a:r>
+            <a:endParaRPr lang="en-US" sz="1100" dirty="0"/>
+          </a:p>
+        </p:txBody>
+      </p:sp>
+      <p:sp>
+        <p:nvSpPr>
+          <p:cNvPr id="18" name="Shape 16"/>
+          <p:cNvSpPr/>
+          <p:nvPr/>
+        </p:nvSpPr>
+        <p:spPr>
+          <a:xfrm>
+            <a:off x="7178040" y="4160520"/>
+            <a:ext cx="4160520" cy="777240"/>
+          </a:xfrm>
+          <a:prstGeom prst="roundRect">
+            <a:avLst>
+              <a:gd name="adj" fmla="val 9412"/>
+            </a:avLst>
+          </a:prstGeom>
+          <a:solidFill>
+            <a:srgbClr val="17294A"/>
+          </a:solidFill>
+          <a:ln w="12700">
+            <a:solidFill>
+              <a:srgbClr val="E8A33D"/>
+            </a:solidFill>
+            <a:prstDash val="solid"/>
+          </a:ln>
+        </p:spPr>
+      </p:sp>
+      <p:sp>
+        <p:nvSpPr>
+          <p:cNvPr id="19" name="Text 17"/>
+          <p:cNvSpPr/>
+          <p:nvPr/>
+        </p:nvSpPr>
+        <p:spPr>
+          <a:xfrm>
+            <a:off x="7178040" y="4160520"/>
+            <a:ext cx="4160520" cy="777240"/>
+          </a:xfrm>
+          <a:prstGeom prst="rect">
+            <a:avLst/>
+          </a:prstGeom>
+          <a:noFill/>
+          <a:ln/>
+        </p:spPr>
+        <p:txBody>
+          <a:bodyPr wrap="square" lIns="0" tIns="0" rIns="0" bIns="0" rtlCol="0" anchor="ctr"/>
+          <a:lstStyle/>
+          <a:p>
+            <a:pPr algn="ctr" indent="0" marL="0">
+              <a:buNone/>
+            </a:pPr>
+            <a:r>
+              <a:rPr lang="en-US" sz="1400" b="1" dirty="0">
+                <a:solidFill>
+                  <a:srgbClr val="FFFFFF"/>
+                </a:solidFill>
+                <a:latin typeface="Cambria" pitchFamily="34" charset="0"/>
+                <a:ea typeface="Cambria" pitchFamily="34" charset="-122"/>
+                <a:cs typeface="Cambria" pitchFamily="34" charset="-120"/>
+              </a:rPr>
+              <a:t>Universe · piattaforma agentica</a:t>
+            </a:r>
+            <a:endParaRPr lang="en-US" sz="1400" dirty="0"/>
+          </a:p>
+        </p:txBody>
+      </p:sp>
+      <p:sp>
+        <p:nvSpPr>
+          <p:cNvPr id="20" name="Shape 18"/>
+          <p:cNvSpPr/>
+          <p:nvPr/>
+        </p:nvSpPr>
+        <p:spPr>
+          <a:xfrm>
+            <a:off x="7178040" y="5074920"/>
+            <a:ext cx="4160520" cy="731520"/>
+          </a:xfrm>
+          <a:prstGeom prst="roundRect">
+            <a:avLst>
+              <a:gd name="adj" fmla="val 10000"/>
+            </a:avLst>
+          </a:prstGeom>
+          <a:solidFill>
+            <a:srgbClr val="0E2140"/>
+          </a:solidFill>
+          <a:ln w="12700">
+            <a:solidFill>
+              <a:srgbClr val="27406B"/>
+            </a:solidFill>
+            <a:prstDash val="solid"/>
+          </a:ln>
+        </p:spPr>
+      </p:sp>
+      <p:sp>
+        <p:nvSpPr>
+          <p:cNvPr id="21" name="Text 19"/>
+          <p:cNvSpPr/>
+          <p:nvPr/>
+        </p:nvSpPr>
+        <p:spPr>
+          <a:xfrm>
+            <a:off x="7178040" y="5074920"/>
+            <a:ext cx="4160520" cy="731520"/>
+          </a:xfrm>
+          <a:prstGeom prst="rect">
+            <a:avLst/>
+          </a:prstGeom>
+          <a:noFill/>
+          <a:ln/>
+        </p:spPr>
+        <p:txBody>
+          <a:bodyPr wrap="square" lIns="0" tIns="0" rIns="0" bIns="0" rtlCol="0" anchor="ctr"/>
+          <a:lstStyle/>
+          <a:p>
+            <a:pPr algn="ctr" indent="0" marL="0">
+              <a:buNone/>
+            </a:pPr>
+            <a:r>
+              <a:rPr lang="en-US" sz="1300" dirty="0">
+                <a:solidFill>
+                  <a:srgbClr val="EAF1FA"/>
+                </a:solidFill>
+                <a:latin typeface="Calibri" pitchFamily="34" charset="0"/>
+                <a:ea typeface="Calibri" pitchFamily="34" charset="-122"/>
+                <a:cs typeface="Calibri" pitchFamily="34" charset="-120"/>
+              </a:rPr>
+              <a:t>Skylabs / SAE · AI enterprise</a:t>
+            </a:r>
+            <a:endParaRPr lang="en-US" sz="1300" dirty="0"/>
+          </a:p>
+        </p:txBody>
+      </p:sp>
+      <p:sp>
+        <p:nvSpPr>
+          <p:cNvPr id="22" name="Text 20"/>
+          <p:cNvSpPr/>
+          <p:nvPr/>
+        </p:nvSpPr>
+        <p:spPr>
+          <a:xfrm>
+            <a:off x="11338560" y="6355080"/>
+            <a:ext cx="457200" cy="274320"/>
+          </a:xfrm>
+          <a:prstGeom prst="rect">
+            <a:avLst/>
+          </a:prstGeom>
+          <a:noFill/>
+          <a:ln/>
+        </p:spPr>
+        <p:txBody>
+          <a:bodyPr wrap="square" lIns="0" tIns="0" rIns="0" bIns="0" rtlCol="0" anchor="ctr"/>
+          <a:lstStyle/>
+          <a:p>
+            <a:pPr algn="r" indent="0" marL="0">
+              <a:buNone/>
+            </a:pPr>
+            <a:r>
+              <a:rPr lang="en-US" sz="1000" dirty="0">
+                <a:solidFill>
+                  <a:srgbClr val="9DB0CC"/>
+                </a:solidFill>
+                <a:latin typeface="Calibri" pitchFamily="34" charset="0"/>
+                <a:ea typeface="Calibri" pitchFamily="34" charset="-122"/>
+                <a:cs typeface="Calibri" pitchFamily="34" charset="-120"/>
+              </a:rPr>
+              <a:t>13</a:t>
+            </a:r>
+            <a:endParaRPr lang="en-US" sz="1000" dirty="0"/>
+          </a:p>
+        </p:txBody>
+      </p:sp>
+      <p:sp>
+        <p:nvSpPr>
+          <p:cNvPr id="23" name="Text 21"/>
+          <p:cNvSpPr/>
+          <p:nvPr/>
+        </p:nvSpPr>
+        <p:spPr>
+          <a:xfrm>
+            <a:off x="548640" y="6355080"/>
+            <a:ext cx="2743200" cy="274320"/>
+          </a:xfrm>
+          <a:prstGeom prst="rect">
+            <a:avLst/>
+          </a:prstGeom>
+          <a:noFill/>
+          <a:ln/>
+        </p:spPr>
+        <p:txBody>
+          <a:bodyPr wrap="square" lIns="0" tIns="0" rIns="0" bIns="0" rtlCol="0" anchor="ctr"/>
+          <a:lstStyle/>
+          <a:p>
+            <a:pPr algn="l" indent="0" marL="0">
+              <a:buNone/>
+            </a:pPr>
+            <a:r>
+              <a:rPr lang="en-US" sz="1000" b="1" spc="200" kern="0" dirty="0">
+                <a:solidFill>
+                  <a:srgbClr val="9DB0CC"/>
+                </a:solidFill>
+                <a:latin typeface="Calibri" pitchFamily="34" charset="0"/>
+                <a:ea typeface="Calibri" pitchFamily="34" charset="-122"/>
+                <a:cs typeface="Calibri" pitchFamily="34" charset="-120"/>
+              </a:rPr>
+              <a:t>CONFORME</a:t>
+            </a:r>
+            <a:endParaRPr lang="en-US" sz="1000" dirty="0"/>
+          </a:p>
+        </p:txBody>
+      </p:sp>
+    </p:spTree>
+  </p:cSld>
+  <p:clrMapOvr>
+    <a:masterClrMapping/>
+  </p:clrMapOvr>
+</p:sld>
+</file>
+
+<file path=ppt/slides/slide14.xml><?xml version="1.0" encoding="utf-8"?>
+<p:sld xmlns:a="http://schemas.openxmlformats.org/drawingml/2006/main" xmlns:r="http://schemas.openxmlformats.org/officeDocument/2006/relationships" xmlns:p="http://schemas.openxmlformats.org/presentationml/2006/main">
+  <p:cSld name="Slide 14">
+    <p:bg>
+      <p:bgPr>
+        <a:solidFill>
+          <a:srgbClr val="FFFFFF"/>
+        </a:solidFill>
+      </p:bgPr>
+    </p:bg>
+    <p:spTree>
+      <p:nvGrpSpPr>
+        <p:cNvPr id="1" name=""/>
+        <p:cNvGrpSpPr/>
+        <p:nvPr/>
+      </p:nvGrpSpPr>
+      <p:grpSpPr>
+        <a:xfrm>
+          <a:off x="0" y="0"/>
+          <a:ext cx="0" cy="0"/>
+          <a:chOff x="0" y="0"/>
+          <a:chExt cx="0" cy="0"/>
+        </a:xfrm>
+      </p:grpSpPr>
+      <p:sp>
+        <p:nvSpPr>
+          <p:cNvPr id="2" name="Text 0"/>
+          <p:cNvSpPr/>
+          <p:nvPr/>
+        </p:nvSpPr>
+        <p:spPr>
+          <a:xfrm>
+            <a:off x="548640" y="502920"/>
+            <a:ext cx="5486400" cy="274320"/>
+          </a:xfrm>
+          <a:prstGeom prst="rect">
+            <a:avLst/>
+          </a:prstGeom>
+          <a:noFill/>
+          <a:ln/>
+        </p:spPr>
+        <p:txBody>
+          <a:bodyPr wrap="square" lIns="0" tIns="0" rIns="0" bIns="0" rtlCol="0" anchor="ctr"/>
+          <a:lstStyle/>
+          <a:p>
+            <a:pPr algn="l" indent="0" marL="0">
+              <a:buNone/>
+            </a:pPr>
+            <a:r>
+              <a:rPr lang="en-US" sz="1200" b="1" spc="300" kern="0" dirty="0">
+                <a:solidFill>
+                  <a:srgbClr val="E8A33D"/>
+                </a:solidFill>
+                <a:latin typeface="Calibri" pitchFamily="34" charset="0"/>
+                <a:ea typeface="Calibri" pitchFamily="34" charset="-122"/>
+                <a:cs typeface="Calibri" pitchFamily="34" charset="-120"/>
+              </a:rPr>
+              <a:t>ROADMAP</a:t>
+            </a:r>
+            <a:endParaRPr lang="en-US" sz="1200" dirty="0"/>
+          </a:p>
+        </p:txBody>
+      </p:sp>
+      <p:sp>
+        <p:nvSpPr>
+          <p:cNvPr id="3" name="Text 1"/>
+          <p:cNvSpPr/>
+          <p:nvPr/>
+        </p:nvSpPr>
+        <p:spPr>
+          <a:xfrm>
+            <a:off x="502920" y="822960"/>
+            <a:ext cx="10972800" cy="731520"/>
+          </a:xfrm>
+          <a:prstGeom prst="rect">
+            <a:avLst/>
+          </a:prstGeom>
+          <a:noFill/>
+          <a:ln/>
+        </p:spPr>
+        <p:txBody>
+          <a:bodyPr wrap="square" lIns="0" tIns="0" rIns="0" bIns="0" rtlCol="0" anchor="ctr"/>
+          <a:lstStyle/>
+          <a:p>
+            <a:pPr indent="0" marL="0">
+              <a:buNone/>
+            </a:pPr>
+            <a:r>
+              <a:rPr lang="en-US" sz="2800" b="1" dirty="0">
+                <a:solidFill>
+                  <a:srgbClr val="16233B"/>
+                </a:solidFill>
+                <a:latin typeface="Cambria" pitchFamily="34" charset="0"/>
+                <a:ea typeface="Cambria" pitchFamily="34" charset="-122"/>
+                <a:cs typeface="Cambria" pitchFamily="34" charset="-120"/>
+              </a:rPr>
+              <a:t>Dal wedge alla piattaforma, in tre fasi</a:t>
+            </a:r>
+            <a:endParaRPr lang="en-US" sz="2800" dirty="0"/>
+          </a:p>
+        </p:txBody>
+      </p:sp>
+      <p:sp>
+        <p:nvSpPr>
+          <p:cNvPr id="4" name="Shape 2"/>
+          <p:cNvSpPr/>
+          <p:nvPr/>
+        </p:nvSpPr>
+        <p:spPr>
+          <a:xfrm>
+            <a:off x="502920" y="2148840"/>
+            <a:ext cx="3611880" cy="3566160"/>
+          </a:xfrm>
+          <a:prstGeom prst="roundRect">
+            <a:avLst>
+              <a:gd name="adj" fmla="val 2564"/>
+            </a:avLst>
+          </a:prstGeom>
+          <a:solidFill>
+            <a:srgbClr val="0E1E38"/>
+          </a:solidFill>
+          <a:ln w="12700">
+            <a:solidFill>
+              <a:srgbClr val="0E1E38"/>
+            </a:solidFill>
+            <a:prstDash val="solid"/>
+          </a:ln>
+        </p:spPr>
+      </p:sp>
+      <p:sp>
+        <p:nvSpPr>
+          <p:cNvPr id="5" name="Shape 3"/>
+          <p:cNvSpPr/>
+          <p:nvPr/>
+        </p:nvSpPr>
+        <p:spPr>
+          <a:xfrm>
+            <a:off x="777240" y="2468880"/>
+            <a:ext cx="1554480" cy="457200"/>
+          </a:xfrm>
+          <a:prstGeom prst="roundRect">
+            <a:avLst>
+              <a:gd name="adj" fmla="val 50000"/>
+            </a:avLst>
+          </a:prstGeom>
+          <a:solidFill>
+            <a:srgbClr val="C0563C"/>
+          </a:solidFill>
+          <a:ln/>
+        </p:spPr>
+      </p:sp>
+      <p:sp>
+        <p:nvSpPr>
+          <p:cNvPr id="6" name="Text 4"/>
+          <p:cNvSpPr/>
+          <p:nvPr/>
+        </p:nvSpPr>
+        <p:spPr>
+          <a:xfrm>
+            <a:off x="777240" y="2468880"/>
+            <a:ext cx="1554480" cy="457200"/>
+          </a:xfrm>
+          <a:prstGeom prst="rect">
+            <a:avLst/>
+          </a:prstGeom>
+          <a:noFill/>
+          <a:ln/>
+        </p:spPr>
+        <p:txBody>
+          <a:bodyPr wrap="square" lIns="0" tIns="0" rIns="0" bIns="0" rtlCol="0" anchor="ctr"/>
+          <a:lstStyle/>
+          <a:p>
+            <a:pPr algn="ctr" indent="0" marL="0">
+              <a:buNone/>
+            </a:pPr>
+            <a:r>
+              <a:rPr lang="en-US" sz="1500" b="1" dirty="0">
+                <a:solidFill>
+                  <a:srgbClr val="FFFFFF"/>
+                </a:solidFill>
+                <a:latin typeface="Cambria" pitchFamily="34" charset="0"/>
+                <a:ea typeface="Cambria" pitchFamily="34" charset="-122"/>
+                <a:cs typeface="Cambria" pitchFamily="34" charset="-120"/>
+              </a:rPr>
+              <a:t>Fase 1</a:t>
+            </a:r>
+            <a:endParaRPr lang="en-US" sz="1500" dirty="0"/>
+          </a:p>
+        </p:txBody>
+      </p:sp>
+      <p:sp>
+        <p:nvSpPr>
+          <p:cNvPr id="7" name="Text 5"/>
+          <p:cNvSpPr/>
+          <p:nvPr/>
+        </p:nvSpPr>
+        <p:spPr>
+          <a:xfrm>
+            <a:off x="777240" y="3063240"/>
+            <a:ext cx="3063240" cy="320040"/>
+          </a:xfrm>
+          <a:prstGeom prst="rect">
+            <a:avLst/>
+          </a:prstGeom>
+          <a:noFill/>
+          <a:ln/>
+        </p:spPr>
+        <p:txBody>
+          <a:bodyPr wrap="square" lIns="0" tIns="0" rIns="0" bIns="0" rtlCol="0" anchor="ctr"/>
+          <a:lstStyle/>
+          <a:p>
+            <a:pPr indent="0" marL="0">
+              <a:buNone/>
+            </a:pPr>
+            <a:r>
+              <a:rPr lang="en-US" sz="1200" b="1" spc="100" kern="0" dirty="0">
+                <a:solidFill>
+                  <a:srgbClr val="E8A33D"/>
+                </a:solidFill>
+                <a:latin typeface="Calibri" pitchFamily="34" charset="0"/>
+                <a:ea typeface="Calibri" pitchFamily="34" charset="-122"/>
+                <a:cs typeface="Calibri" pitchFamily="34" charset="-120"/>
+              </a:rPr>
+              <a:t>0-18 mesi</a:t>
+            </a:r>
+            <a:endParaRPr lang="en-US" sz="1200" dirty="0"/>
+          </a:p>
+        </p:txBody>
+      </p:sp>
+      <p:sp>
+        <p:nvSpPr>
+          <p:cNvPr id="8" name="Text 6"/>
+          <p:cNvSpPr/>
+          <p:nvPr/>
+        </p:nvSpPr>
+        <p:spPr>
+          <a:xfrm>
+            <a:off x="777240" y="3429000"/>
+            <a:ext cx="3063240" cy="548640"/>
+          </a:xfrm>
+          <a:prstGeom prst="rect">
+            <a:avLst/>
+          </a:prstGeom>
+          <a:noFill/>
+          <a:ln/>
+        </p:spPr>
+        <p:txBody>
+          <a:bodyPr wrap="square" lIns="0" tIns="0" rIns="0" bIns="0" rtlCol="0" anchor="ctr"/>
+          <a:lstStyle/>
+          <a:p>
+            <a:pPr indent="0" marL="0">
+              <a:buNone/>
+            </a:pPr>
+            <a:r>
+              <a:rPr lang="en-US" sz="1900" b="1" dirty="0">
+                <a:solidFill>
+                  <a:srgbClr val="FFFFFF"/>
+                </a:solidFill>
+                <a:latin typeface="Cambria" pitchFamily="34" charset="0"/>
+                <a:ea typeface="Cambria" pitchFamily="34" charset="-122"/>
+                <a:cs typeface="Cambria" pitchFamily="34" charset="-120"/>
+              </a:rPr>
+              <a:t>Il wedge</a:t>
+            </a:r>
+            <a:endParaRPr lang="en-US" sz="1900" dirty="0"/>
+          </a:p>
+        </p:txBody>
+      </p:sp>
+      <p:sp>
+        <p:nvSpPr>
+          <p:cNvPr id="9" name="Text 7"/>
+          <p:cNvSpPr/>
+          <p:nvPr/>
+        </p:nvSpPr>
+        <p:spPr>
+          <a:xfrm>
+            <a:off x="777240" y="4023360"/>
+            <a:ext cx="3063240" cy="1463040"/>
+          </a:xfrm>
+          <a:prstGeom prst="rect">
+            <a:avLst/>
+          </a:prstGeom>
+          <a:noFill/>
+          <a:ln/>
+        </p:spPr>
+        <p:txBody>
+          <a:bodyPr wrap="square" lIns="0" tIns="0" rIns="0" bIns="0" rtlCol="0" anchor="ctr"/>
+          <a:lstStyle/>
+          <a:p>
+            <a:pPr indent="0" marL="0">
+              <a:buNone/>
+            </a:pPr>
+            <a:r>
+              <a:rPr lang="en-US" sz="1300" dirty="0">
+                <a:solidFill>
+                  <a:srgbClr val="EAF1FA"/>
+                </a:solidFill>
+                <a:latin typeface="Calibri" pitchFamily="34" charset="0"/>
+                <a:ea typeface="Calibri" pitchFamily="34" charset="-122"/>
+                <a:cs typeface="Calibri" pitchFamily="34" charset="-120"/>
+              </a:rPr>
+              <a:t>Agente di due diligence in produzione. Primi clienti B2B: reti, notai, banche. Costruzione del dataset proprietario.</a:t>
+            </a:r>
+            <a:endParaRPr lang="en-US" sz="1300" dirty="0"/>
+          </a:p>
+        </p:txBody>
+      </p:sp>
+      <p:sp>
+        <p:nvSpPr>
+          <p:cNvPr id="10" name="Shape 8"/>
+          <p:cNvSpPr/>
+          <p:nvPr/>
+        </p:nvSpPr>
+        <p:spPr>
+          <a:xfrm>
+            <a:off x="4370832" y="2148840"/>
+            <a:ext cx="3611880" cy="3566160"/>
+          </a:xfrm>
+          <a:prstGeom prst="roundRect">
+            <a:avLst>
+              <a:gd name="adj" fmla="val 2564"/>
+            </a:avLst>
+          </a:prstGeom>
+          <a:solidFill>
+            <a:srgbClr val="F4F7FC"/>
+          </a:solidFill>
+          <a:ln w="12700">
+            <a:solidFill>
+              <a:srgbClr val="D9E2EF"/>
+            </a:solidFill>
+            <a:prstDash val="solid"/>
+          </a:ln>
+        </p:spPr>
+      </p:sp>
+      <p:sp>
+        <p:nvSpPr>
+          <p:cNvPr id="11" name="Shape 9"/>
+          <p:cNvSpPr/>
+          <p:nvPr/>
+        </p:nvSpPr>
+        <p:spPr>
+          <a:xfrm>
+            <a:off x="4645152" y="2468880"/>
+            <a:ext cx="1554480" cy="457200"/>
+          </a:xfrm>
+          <a:prstGeom prst="roundRect">
+            <a:avLst>
+              <a:gd name="adj" fmla="val 50000"/>
+            </a:avLst>
+          </a:prstGeom>
+          <a:solidFill>
+            <a:srgbClr val="0E1E38"/>
+          </a:solidFill>
+          <a:ln/>
+        </p:spPr>
+      </p:sp>
+      <p:sp>
+        <p:nvSpPr>
+          <p:cNvPr id="12" name="Text 10"/>
+          <p:cNvSpPr/>
+          <p:nvPr/>
+        </p:nvSpPr>
+        <p:spPr>
+          <a:xfrm>
+            <a:off x="4645152" y="2468880"/>
+            <a:ext cx="1554480" cy="457200"/>
+          </a:xfrm>
+          <a:prstGeom prst="rect">
+            <a:avLst/>
+          </a:prstGeom>
+          <a:noFill/>
+          <a:ln/>
+        </p:spPr>
+        <p:txBody>
+          <a:bodyPr wrap="square" lIns="0" tIns="0" rIns="0" bIns="0" rtlCol="0" anchor="ctr"/>
+          <a:lstStyle/>
+          <a:p>
+            <a:pPr algn="ctr" indent="0" marL="0">
+              <a:buNone/>
+            </a:pPr>
+            <a:r>
+              <a:rPr lang="en-US" sz="1500" b="1" dirty="0">
+                <a:solidFill>
+                  <a:srgbClr val="FFFFFF"/>
+                </a:solidFill>
+                <a:latin typeface="Cambria" pitchFamily="34" charset="0"/>
+                <a:ea typeface="Cambria" pitchFamily="34" charset="-122"/>
+                <a:cs typeface="Cambria" pitchFamily="34" charset="-120"/>
+              </a:rPr>
+              <a:t>Fase 2</a:t>
+            </a:r>
+            <a:endParaRPr lang="en-US" sz="1500" dirty="0"/>
+          </a:p>
+        </p:txBody>
+      </p:sp>
+      <p:sp>
+        <p:nvSpPr>
+          <p:cNvPr id="13" name="Text 11"/>
+          <p:cNvSpPr/>
+          <p:nvPr/>
+        </p:nvSpPr>
+        <p:spPr>
+          <a:xfrm>
+            <a:off x="4645152" y="3063240"/>
+            <a:ext cx="3063240" cy="320040"/>
+          </a:xfrm>
+          <a:prstGeom prst="rect">
+            <a:avLst/>
+          </a:prstGeom>
+          <a:noFill/>
+          <a:ln/>
+        </p:spPr>
+        <p:txBody>
+          <a:bodyPr wrap="square" lIns="0" tIns="0" rIns="0" bIns="0" rtlCol="0" anchor="ctr"/>
+          <a:lstStyle/>
+          <a:p>
+            <a:pPr indent="0" marL="0">
+              <a:buNone/>
+            </a:pPr>
+            <a:r>
+              <a:rPr lang="en-US" sz="1200" b="1" spc="100" kern="0" dirty="0">
+                <a:solidFill>
+                  <a:srgbClr val="5C6C87"/>
+                </a:solidFill>
+                <a:latin typeface="Calibri" pitchFamily="34" charset="0"/>
+                <a:ea typeface="Calibri" pitchFamily="34" charset="-122"/>
+                <a:cs typeface="Calibri" pitchFamily="34" charset="-120"/>
+              </a:rPr>
+              <a:t>18-36 mesi</a:t>
+            </a:r>
+            <a:endParaRPr lang="en-US" sz="1200" dirty="0"/>
+          </a:p>
+        </p:txBody>
+      </p:sp>
+      <p:sp>
+        <p:nvSpPr>
+          <p:cNvPr id="14" name="Text 12"/>
+          <p:cNvSpPr/>
+          <p:nvPr/>
+        </p:nvSpPr>
+        <p:spPr>
+          <a:xfrm>
+            <a:off x="4645152" y="3429000"/>
+            <a:ext cx="3063240" cy="548640"/>
+          </a:xfrm>
+          <a:prstGeom prst="rect">
+            <a:avLst/>
+          </a:prstGeom>
+          <a:noFill/>
+          <a:ln/>
+        </p:spPr>
+        <p:txBody>
+          <a:bodyPr wrap="square" lIns="0" tIns="0" rIns="0" bIns="0" rtlCol="0" anchor="ctr"/>
+          <a:lstStyle/>
+          <a:p>
+            <a:pPr indent="0" marL="0">
+              <a:buNone/>
+            </a:pPr>
+            <a:r>
+              <a:rPr lang="en-US" sz="1900" b="1" dirty="0">
+                <a:solidFill>
+                  <a:srgbClr val="16233B"/>
+                </a:solidFill>
+                <a:latin typeface="Cambria" pitchFamily="34" charset="0"/>
+                <a:ea typeface="Cambria" pitchFamily="34" charset="-122"/>
+                <a:cs typeface="Cambria" pitchFamily="34" charset="-120"/>
+              </a:rPr>
+              <a:t>Dati &amp; transazione</a:t>
+            </a:r>
+            <a:endParaRPr lang="en-US" sz="1900" dirty="0"/>
+          </a:p>
+        </p:txBody>
+      </p:sp>
+      <p:sp>
+        <p:nvSpPr>
+          <p:cNvPr id="15" name="Text 13"/>
+          <p:cNvSpPr/>
+          <p:nvPr/>
+        </p:nvSpPr>
+        <p:spPr>
+          <a:xfrm>
+            <a:off x="4645152" y="4023360"/>
+            <a:ext cx="3063240" cy="1463040"/>
+          </a:xfrm>
+          <a:prstGeom prst="rect">
+            <a:avLst/>
+          </a:prstGeom>
+          <a:noFill/>
+          <a:ln/>
+        </p:spPr>
+        <p:txBody>
+          <a:bodyPr wrap="square" lIns="0" tIns="0" rIns="0" bIns="0" rtlCol="0" anchor="ctr"/>
+          <a:lstStyle/>
+          <a:p>
+            <a:pPr indent="0" marL="0">
+              <a:buNone/>
+            </a:pPr>
+            <a:r>
+              <a:rPr lang="en-US" sz="1300" dirty="0">
+                <a:solidFill>
+                  <a:srgbClr val="5C6C87"/>
+                </a:solidFill>
+                <a:latin typeface="Calibri" pitchFamily="34" charset="0"/>
+                <a:ea typeface="Calibri" pitchFamily="34" charset="-122"/>
+                <a:cs typeface="Calibri" pitchFamily="34" charset="-120"/>
+              </a:rPr>
+              <a:t>AVM proprietario, rails della transazione digitale, sblocco degli immobili fermi. Il data-moat diventa prodotto.</a:t>
+            </a:r>
+            <a:endParaRPr lang="en-US" sz="1300" dirty="0"/>
+          </a:p>
+        </p:txBody>
+      </p:sp>
+      <p:sp>
+        <p:nvSpPr>
+          <p:cNvPr id="16" name="Shape 14"/>
+          <p:cNvSpPr/>
+          <p:nvPr/>
+        </p:nvSpPr>
+        <p:spPr>
+          <a:xfrm>
+            <a:off x="8238744" y="2148840"/>
+            <a:ext cx="3611880" cy="3566160"/>
+          </a:xfrm>
+          <a:prstGeom prst="roundRect">
+            <a:avLst>
+              <a:gd name="adj" fmla="val 2564"/>
+            </a:avLst>
+          </a:prstGeom>
+          <a:solidFill>
+            <a:srgbClr val="F4F7FC"/>
+          </a:solidFill>
+          <a:ln w="12700">
+            <a:solidFill>
+              <a:srgbClr val="D9E2EF"/>
+            </a:solidFill>
+            <a:prstDash val="solid"/>
+          </a:ln>
+        </p:spPr>
+      </p:sp>
+      <p:sp>
+        <p:nvSpPr>
+          <p:cNvPr id="17" name="Shape 15"/>
+          <p:cNvSpPr/>
+          <p:nvPr/>
+        </p:nvSpPr>
+        <p:spPr>
+          <a:xfrm>
+            <a:off x="8513064" y="2468880"/>
+            <a:ext cx="1554480" cy="457200"/>
+          </a:xfrm>
+          <a:prstGeom prst="roundRect">
+            <a:avLst>
+              <a:gd name="adj" fmla="val 50000"/>
+            </a:avLst>
+          </a:prstGeom>
+          <a:solidFill>
+            <a:srgbClr val="E8A33D"/>
+          </a:solidFill>
+          <a:ln/>
+        </p:spPr>
+      </p:sp>
+      <p:sp>
+        <p:nvSpPr>
+          <p:cNvPr id="18" name="Text 16"/>
+          <p:cNvSpPr/>
+          <p:nvPr/>
+        </p:nvSpPr>
+        <p:spPr>
+          <a:xfrm>
+            <a:off x="8513064" y="2468880"/>
+            <a:ext cx="1554480" cy="457200"/>
+          </a:xfrm>
+          <a:prstGeom prst="rect">
+            <a:avLst/>
+          </a:prstGeom>
+          <a:noFill/>
+          <a:ln/>
+        </p:spPr>
+        <p:txBody>
+          <a:bodyPr wrap="square" lIns="0" tIns="0" rIns="0" bIns="0" rtlCol="0" anchor="ctr"/>
+          <a:lstStyle/>
+          <a:p>
+            <a:pPr algn="ctr" indent="0" marL="0">
+              <a:buNone/>
+            </a:pPr>
+            <a:r>
+              <a:rPr lang="en-US" sz="1500" b="1" dirty="0">
+                <a:solidFill>
+                  <a:srgbClr val="0E1E38"/>
+                </a:solidFill>
+                <a:latin typeface="Cambria" pitchFamily="34" charset="0"/>
+                <a:ea typeface="Cambria" pitchFamily="34" charset="-122"/>
+                <a:cs typeface="Cambria" pitchFamily="34" charset="-120"/>
+              </a:rPr>
+              <a:t>Fase 3</a:t>
+            </a:r>
+            <a:endParaRPr lang="en-US" sz="1500" dirty="0"/>
+          </a:p>
+        </p:txBody>
+      </p:sp>
+      <p:sp>
+        <p:nvSpPr>
+          <p:cNvPr id="19" name="Text 17"/>
+          <p:cNvSpPr/>
+          <p:nvPr/>
+        </p:nvSpPr>
+        <p:spPr>
+          <a:xfrm>
+            <a:off x="8513064" y="3063240"/>
+            <a:ext cx="3063240" cy="320040"/>
+          </a:xfrm>
+          <a:prstGeom prst="rect">
+            <a:avLst/>
+          </a:prstGeom>
+          <a:noFill/>
+          <a:ln/>
+        </p:spPr>
+        <p:txBody>
+          <a:bodyPr wrap="square" lIns="0" tIns="0" rIns="0" bIns="0" rtlCol="0" anchor="ctr"/>
+          <a:lstStyle/>
+          <a:p>
+            <a:pPr indent="0" marL="0">
+              <a:buNone/>
+            </a:pPr>
+            <a:r>
+              <a:rPr lang="en-US" sz="1200" b="1" spc="100" kern="0" dirty="0">
+                <a:solidFill>
+                  <a:srgbClr val="5C6C87"/>
+                </a:solidFill>
+                <a:latin typeface="Calibri" pitchFamily="34" charset="0"/>
+                <a:ea typeface="Calibri" pitchFamily="34" charset="-122"/>
+                <a:cs typeface="Calibri" pitchFamily="34" charset="-120"/>
+              </a:rPr>
+              <a:t>36 mesi +</a:t>
+            </a:r>
+            <a:endParaRPr lang="en-US" sz="1200" dirty="0"/>
+          </a:p>
+        </p:txBody>
+      </p:sp>
+      <p:sp>
+        <p:nvSpPr>
+          <p:cNvPr id="20" name="Text 18"/>
+          <p:cNvSpPr/>
+          <p:nvPr/>
+        </p:nvSpPr>
+        <p:spPr>
+          <a:xfrm>
+            <a:off x="8513064" y="3429000"/>
+            <a:ext cx="3063240" cy="548640"/>
+          </a:xfrm>
+          <a:prstGeom prst="rect">
+            <a:avLst/>
+          </a:prstGeom>
+          <a:noFill/>
+          <a:ln/>
+        </p:spPr>
+        <p:txBody>
+          <a:bodyPr wrap="square" lIns="0" tIns="0" rIns="0" bIns="0" rtlCol="0" anchor="ctr"/>
+          <a:lstStyle/>
+          <a:p>
+            <a:pPr indent="0" marL="0">
+              <a:buNone/>
+            </a:pPr>
+            <a:r>
+              <a:rPr lang="en-US" sz="1900" b="1" dirty="0">
+                <a:solidFill>
+                  <a:srgbClr val="16233B"/>
+                </a:solidFill>
+                <a:latin typeface="Cambria" pitchFamily="34" charset="0"/>
+                <a:ea typeface="Cambria" pitchFamily="34" charset="-122"/>
+                <a:cs typeface="Cambria" pitchFamily="34" charset="-120"/>
+              </a:rPr>
+              <a:t>Piattaforma 360°</a:t>
+            </a:r>
+            <a:endParaRPr lang="en-US" sz="1900" dirty="0"/>
+          </a:p>
+        </p:txBody>
+      </p:sp>
+      <p:sp>
+        <p:nvSpPr>
+          <p:cNvPr id="21" name="Text 19"/>
+          <p:cNvSpPr/>
+          <p:nvPr/>
+        </p:nvSpPr>
+        <p:spPr>
+          <a:xfrm>
+            <a:off x="8513064" y="4023360"/>
+            <a:ext cx="3063240" cy="1463040"/>
+          </a:xfrm>
+          <a:prstGeom prst="rect">
+            <a:avLst/>
+          </a:prstGeom>
+          <a:noFill/>
+          <a:ln/>
+        </p:spPr>
+        <p:txBody>
+          <a:bodyPr wrap="square" lIns="0" tIns="0" rIns="0" bIns="0" rtlCol="0" anchor="ctr"/>
+          <a:lstStyle/>
+          <a:p>
+            <a:pPr indent="0" marL="0">
+              <a:buNone/>
+            </a:pPr>
+            <a:r>
+              <a:rPr lang="en-US" sz="1300" dirty="0">
+                <a:solidFill>
+                  <a:srgbClr val="5C6C87"/>
+                </a:solidFill>
+                <a:latin typeface="Calibri" pitchFamily="34" charset="0"/>
+                <a:ea typeface="Calibri" pitchFamily="34" charset="-122"/>
+                <a:cs typeface="Calibri" pitchFamily="34" charset="-120"/>
+              </a:rPr>
+              <a:t>Intelligence energetica Case Green e marketplace finanziario. Scala nazionale, poi replicabilità europea.</a:t>
+            </a:r>
+            <a:endParaRPr lang="en-US" sz="1300" dirty="0"/>
+          </a:p>
+        </p:txBody>
+      </p:sp>
+      <p:sp>
+        <p:nvSpPr>
+          <p:cNvPr id="22" name="Text 20"/>
+          <p:cNvSpPr/>
+          <p:nvPr/>
+        </p:nvSpPr>
+        <p:spPr>
+          <a:xfrm>
+            <a:off x="11338560" y="6355080"/>
+            <a:ext cx="457200" cy="274320"/>
+          </a:xfrm>
+          <a:prstGeom prst="rect">
+            <a:avLst/>
+          </a:prstGeom>
+          <a:noFill/>
+          <a:ln/>
+        </p:spPr>
+        <p:txBody>
+          <a:bodyPr wrap="square" lIns="0" tIns="0" rIns="0" bIns="0" rtlCol="0" anchor="ctr"/>
+          <a:lstStyle/>
+          <a:p>
+            <a:pPr algn="r" indent="0" marL="0">
+              <a:buNone/>
+            </a:pPr>
+            <a:r>
+              <a:rPr lang="en-US" sz="1000" dirty="0">
+                <a:solidFill>
+                  <a:srgbClr val="5C6C87"/>
+                </a:solidFill>
+                <a:latin typeface="Calibri" pitchFamily="34" charset="0"/>
+                <a:ea typeface="Calibri" pitchFamily="34" charset="-122"/>
+                <a:cs typeface="Calibri" pitchFamily="34" charset="-120"/>
+              </a:rPr>
+              <a:t>14</a:t>
+            </a:r>
+            <a:endParaRPr lang="en-US" sz="1000" dirty="0"/>
+          </a:p>
+        </p:txBody>
+      </p:sp>
+      <p:sp>
+        <p:nvSpPr>
+          <p:cNvPr id="23" name="Text 21"/>
+          <p:cNvSpPr/>
+          <p:nvPr/>
+        </p:nvSpPr>
+        <p:spPr>
+          <a:xfrm>
+            <a:off x="548640" y="6355080"/>
+            <a:ext cx="2743200" cy="274320"/>
+          </a:xfrm>
+          <a:prstGeom prst="rect">
+            <a:avLst/>
+          </a:prstGeom>
+          <a:noFill/>
+          <a:ln/>
+        </p:spPr>
+        <p:txBody>
+          <a:bodyPr wrap="square" lIns="0" tIns="0" rIns="0" bIns="0" rtlCol="0" anchor="ctr"/>
+          <a:lstStyle/>
+          <a:p>
+            <a:pPr algn="l" indent="0" marL="0">
+              <a:buNone/>
+            </a:pPr>
+            <a:r>
+              <a:rPr lang="en-US" sz="1000" b="1" spc="200" kern="0" dirty="0">
+                <a:solidFill>
+                  <a:srgbClr val="5C6C87"/>
+                </a:solidFill>
+                <a:latin typeface="Calibri" pitchFamily="34" charset="0"/>
+                <a:ea typeface="Calibri" pitchFamily="34" charset="-122"/>
+                <a:cs typeface="Calibri" pitchFamily="34" charset="-120"/>
+              </a:rPr>
+              <a:t>CONFORME</a:t>
+            </a:r>
+            <a:endParaRPr lang="en-US" sz="1000" dirty="0"/>
+          </a:p>
+        </p:txBody>
+      </p:sp>
+    </p:spTree>
+  </p:cSld>
+  <p:clrMapOvr>
+    <a:masterClrMapping/>
+  </p:clrMapOvr>
+</p:sld>
+</file>
+
+<file path=ppt/slides/slide15.xml><?xml version="1.0" encoding="utf-8"?>
+<p:sld xmlns:a="http://schemas.openxmlformats.org/drawingml/2006/main" xmlns:r="http://schemas.openxmlformats.org/officeDocument/2006/relationships" xmlns:p="http://schemas.openxmlformats.org/presentationml/2006/main">
+  <p:cSld name="Slide 15">
+    <p:bg>
+      <p:bgPr>
+        <a:solidFill>
+          <a:srgbClr val="0E1E38"/>
+        </a:solidFill>
+      </p:bgPr>
+    </p:bg>
+    <p:spTree>
+      <p:nvGrpSpPr>
+        <p:cNvPr id="1" name=""/>
+        <p:cNvGrpSpPr/>
+        <p:nvPr/>
+      </p:nvGrpSpPr>
+      <p:grpSpPr>
+        <a:xfrm>
+          <a:off x="0" y="0"/>
+          <a:ext cx="0" cy="0"/>
+          <a:chOff x="0" y="0"/>
+          <a:chExt cx="0" cy="0"/>
+        </a:xfrm>
+      </p:grpSpPr>
+      <p:sp>
+        <p:nvSpPr>
           <p:cNvPr id="2" name="Shape 0"/>
           <p:cNvSpPr/>
           <p:nvPr/>
@@ -4460,7 +8057,7 @@
                 <a:ea typeface="Calibri" pitchFamily="34" charset="-122"/>
                 <a:cs typeface="Calibri" pitchFamily="34" charset="-120"/>
               </a:rPr>
-              <a:t>Noi digitalizziamo la parte che fa saltare le compravendite — la conformità — e da lì diventiamo il layer di dati e transazione che il mercato immobiliare italiano non ha mai avuto.</a:t>
+              <a:t>Noi digitalizziamo la parte che fa saltare le compravendite, la conformità, e da lì diventiamo il layer di dati e transazione che il mercato immobiliare italiano non ha mai avuto.</a:t>
             </a:r>
             <a:endParaRPr lang="en-US" sz="1800" dirty="0"/>
           </a:p>
@@ -4963,7 +8560,7 @@
                 <a:ea typeface="Calibri" pitchFamily="34" charset="-122"/>
                 <a:cs typeface="Calibri" pitchFamily="34" charset="-120"/>
               </a:rPr>
-              <a:t>Immobiliare.it e Idealista dominano la vetrina. Ma dietro l'annuncio, la compravendita in Italia è ancora lenta, opaca e analogica — e il collo di bottiglia è sempre lo stesso.</a:t>
+              <a:t>Immobiliare.it e Idealista dominano la vetrina. Ma dietro l'annuncio, la compravendita in Italia è ancora lenta, opaca e analogica, e il collo di bottiglia è sempre lo stesso.</a:t>
             </a:r>
             <a:endParaRPr lang="en-US" sz="1600" dirty="0"/>
           </a:p>
@@ -5997,7 +9594,7 @@
                 <a:ea typeface="Calibri" pitchFamily="34" charset="-122"/>
                 <a:cs typeface="Calibri" pitchFamily="34" charset="-120"/>
               </a:rPr>
-              <a:t>L'equivalente di un MLS / registro dei titoli — che il mercato immobiliare italiano, a differenza di quello USA, non ha mai avuto.</a:t>
+              <a:t>L'equivalente di un MLS / registro dei titoli, che il mercato immobiliare italiano, a differenza di quello USA, non ha mai avuto.</a:t>
             </a:r>
             <a:endParaRPr lang="en-US" sz="1500" dirty="0"/>
           </a:p>
@@ -6036,7 +9633,7 @@
                 <a:ea typeface="Calibri" pitchFamily="34" charset="-122"/>
                 <a:cs typeface="Calibri" pitchFamily="34" charset="-120"/>
               </a:rPr>
-              <a:t>Fonte compravendite: OMI — Agenzia delle Entrate, Rapporto Immobiliare 2025. Transato: stima / ordine di grandezza.</a:t>
+              <a:t>Fonte compravendite: OMI, Agenzia delle Entrate, Rapporto Immobiliare 2025. Transato: stima / ordine di grandezza.</a:t>
             </a:r>
             <a:endParaRPr lang="en-US" sz="1000" dirty="0"/>
           </a:p>
@@ -6185,7 +9782,7 @@
                 <a:ea typeface="Calibri" pitchFamily="34" charset="-122"/>
                 <a:cs typeface="Calibri" pitchFamily="34" charset="-120"/>
               </a:rPr>
-              <a:t>LA SOLUZIONE — IL PUNTO D'INGRESSO</a:t>
+              <a:t>LA SOLUZIONE · IL PUNTO D'INGRESSO</a:t>
             </a:r>
             <a:endParaRPr lang="en-US" sz="1200" dirty="0"/>
           </a:p>
@@ -6993,7 +10590,7 @@
                 <a:ea typeface="Calibri" pitchFamily="34" charset="-122"/>
                 <a:cs typeface="Calibri" pitchFamily="34" charset="-120"/>
               </a:rPr>
-              <a:t>Agenzie di rete, notai, banche (perizie mutui), fondi e SGR, aste. Pagano già oggi per questo lavoro — fatto male e lento. Vendiamo tempo e riduzione del rischio, non “AI”.</a:t>
+              <a:t>Agenzie di rete, notai, banche (perizie mutui), fondi e SGR, aste. Pagano già oggi per questo lavoro, fatto male e lento. Vendiamo tempo e riduzione del rischio, non “AI”.</a:t>
             </a:r>
             <a:endParaRPr lang="en-US" sz="1400" dirty="0"/>
           </a:p>
@@ -9234,7 +12831,7 @@
                 <a:ea typeface="Cambria" pitchFamily="34" charset="-122"/>
                 <a:cs typeface="Cambria" pitchFamily="34" charset="-120"/>
               </a:rPr>
-              <a:t>Il mercato target supera il miliardo — di molto</a:t>
+              <a:t>Il mercato target supera di molto il miliardo</a:t>
             </a:r>
             <a:endParaRPr lang="en-US" sz="2700" dirty="0"/>
           </a:p>
@@ -9690,7 +13287,7 @@
                 <a:ea typeface="Calibri" pitchFamily="34" charset="-122"/>
                 <a:cs typeface="Calibri" pitchFamily="34" charset="-120"/>
               </a:rPr>
-              <a:t>Beachhead 0–3 anni: DD B2B per reti, notai, banche, fondi</a:t>
+              <a:t>Beachhead 0-3 anni: DD B2B per reti, notai, banche, fondi</a:t>
             </a:r>
             <a:endParaRPr lang="en-US" sz="1250" dirty="0"/>
           </a:p>
@@ -10991,7 +14588,7 @@
         </p:nvSpPr>
         <p:spPr>
           <a:xfrm>
-            <a:off x="548640" y="502920"/>
+            <a:off x="548640" y="457200"/>
             <a:ext cx="5486400" cy="274320"/>
           </a:xfrm>
           <a:prstGeom prst="rect">
@@ -11016,7 +14613,7 @@
                 <a:ea typeface="Calibri" pitchFamily="34" charset="-122"/>
                 <a:cs typeface="Calibri" pitchFamily="34" charset="-120"/>
               </a:rPr>
-              <a:t>PERCHÉ ADESSO</a:t>
+              <a:t>ANALISI COMPETITIVA · PANORAMA</a:t>
             </a:r>
             <a:endParaRPr lang="en-US" sz="1200" dirty="0"/>
           </a:p>
@@ -11030,24 +14627,24 @@
         </p:nvSpPr>
         <p:spPr>
           <a:xfrm>
-            <a:off x="502920" y="822960"/>
-            <a:ext cx="10972800" cy="731520"/>
-          </a:xfrm>
-          <a:prstGeom prst="rect">
-            <a:avLst/>
-          </a:prstGeom>
-          <a:noFill/>
-          <a:ln/>
-        </p:spPr>
-        <p:txBody>
-          <a:bodyPr wrap="square" lIns="0" tIns="0" rIns="0" bIns="0" rtlCol="0" anchor="ctr"/>
-          <a:lstStyle/>
-          <a:p>
-            <a:pPr indent="0" marL="0">
-              <a:buNone/>
-            </a:pPr>
-            <a:r>
-              <a:rPr lang="en-US" sz="2800" b="1" dirty="0">
+            <a:off x="502920" y="749808"/>
+            <a:ext cx="11155680" cy="548640"/>
+          </a:xfrm>
+          <a:prstGeom prst="rect">
+            <a:avLst/>
+          </a:prstGeom>
+          <a:noFill/>
+          <a:ln/>
+        </p:spPr>
+        <p:txBody>
+          <a:bodyPr wrap="square" lIns="0" tIns="0" rIns="0" bIns="0" rtlCol="0" anchor="ctr"/>
+          <a:lstStyle/>
+          <a:p>
+            <a:pPr indent="0" marL="0">
+              <a:buNone/>
+            </a:pPr>
+            <a:r>
+              <a:rPr lang="en-US" sz="2700" b="1" dirty="0">
                 <a:solidFill>
                   <a:srgbClr val="16233B"/>
                 </a:solidFill>
@@ -11055,26 +14652,143 @@
                 <a:ea typeface="Cambria" pitchFamily="34" charset="-122"/>
                 <a:cs typeface="Cambria" pitchFamily="34" charset="-120"/>
               </a:rPr>
-              <a:t>Tre venti a favore convergono nel 2026</a:t>
-            </a:r>
-            <a:endParaRPr lang="en-US" sz="2800" dirty="0"/>
-          </a:p>
-        </p:txBody>
-      </p:sp>
-      <p:sp>
-        <p:nvSpPr>
-          <p:cNvPr id="4" name="Shape 2"/>
-          <p:cNvSpPr/>
-          <p:nvPr/>
-        </p:nvSpPr>
-        <p:spPr>
-          <a:xfrm>
-            <a:off x="502920" y="2148840"/>
-            <a:ext cx="11155680" cy="1234440"/>
+              <a:t>Il quadrante “conformità AI + dati Italia” è vuoto</a:t>
+            </a:r>
+            <a:endParaRPr lang="en-US" sz="2700" dirty="0"/>
+          </a:p>
+        </p:txBody>
+      </p:sp>
+      <p:sp>
+        <p:nvSpPr>
+          <p:cNvPr id="4" name="Text 2"/>
+          <p:cNvSpPr/>
+          <p:nvPr/>
+        </p:nvSpPr>
+        <p:spPr>
+          <a:xfrm>
+            <a:off x="502920" y="1298448"/>
+            <a:ext cx="11155680" cy="457200"/>
+          </a:xfrm>
+          <a:prstGeom prst="rect">
+            <a:avLst/>
+          </a:prstGeom>
+          <a:noFill/>
+          <a:ln/>
+        </p:spPr>
+        <p:txBody>
+          <a:bodyPr wrap="square" lIns="0" tIns="0" rIns="0" bIns="0" rtlCol="0" anchor="ctr"/>
+          <a:lstStyle/>
+          <a:p>
+            <a:pPr indent="0" marL="0">
+              <a:buNone/>
+            </a:pPr>
+            <a:r>
+              <a:rPr lang="en-US" sz="1450" dirty="0">
+                <a:solidFill>
+                  <a:srgbClr val="5C6C87"/>
+                </a:solidFill>
+                <a:latin typeface="Calibri" pitchFamily="34" charset="0"/>
+                <a:ea typeface="Calibri" pitchFamily="34" charset="-122"/>
+                <a:cs typeface="Calibri" pitchFamily="34" charset="-120"/>
+              </a:rPr>
+              <a:t>Ogni layer della filiera ha un player forte. Nessuno presidia la conformità/titolo con AI e dati pubblici italiani.</a:t>
+            </a:r>
+            <a:endParaRPr lang="en-US" sz="1450" dirty="0"/>
+          </a:p>
+        </p:txBody>
+      </p:sp>
+      <p:sp>
+        <p:nvSpPr>
+          <p:cNvPr id="5" name="Text 3"/>
+          <p:cNvSpPr/>
+          <p:nvPr/>
+        </p:nvSpPr>
+        <p:spPr>
+          <a:xfrm rot="16200000">
+            <a:off x="-1417320" y="3520440"/>
+            <a:ext cx="3566160" cy="274320"/>
+          </a:xfrm>
+          <a:prstGeom prst="rect">
+            <a:avLst/>
+          </a:prstGeom>
+          <a:noFill/>
+          <a:ln/>
+        </p:spPr>
+        <p:txBody>
+          <a:bodyPr wrap="square" lIns="0" tIns="0" rIns="0" bIns="0" rtlCol="0" anchor="ctr"/>
+          <a:lstStyle/>
+          <a:p>
+            <a:pPr algn="ctr" indent="0" marL="0">
+              <a:buNone/>
+            </a:pPr>
+            <a:r>
+              <a:rPr lang="en-US" sz="1100" b="1" dirty="0">
+                <a:solidFill>
+                  <a:srgbClr val="5C6C87"/>
+                </a:solidFill>
+                <a:latin typeface="Calibri" pitchFamily="34" charset="0"/>
+                <a:ea typeface="Calibri" pitchFamily="34" charset="-122"/>
+                <a:cs typeface="Calibri" pitchFamily="34" charset="-120"/>
+              </a:rPr>
+              <a:t>Più AI-native · dati Italia</a:t>
+            </a:r>
+            <a:endParaRPr lang="en-US" sz="1100" dirty="0"/>
+          </a:p>
+        </p:txBody>
+      </p:sp>
+      <p:sp>
+        <p:nvSpPr>
+          <p:cNvPr id="6" name="Text 4"/>
+          <p:cNvSpPr/>
+          <p:nvPr/>
+        </p:nvSpPr>
+        <p:spPr>
+          <a:xfrm>
+            <a:off x="2468880" y="5870448"/>
+            <a:ext cx="8686800" cy="274320"/>
+          </a:xfrm>
+          <a:prstGeom prst="rect">
+            <a:avLst/>
+          </a:prstGeom>
+          <a:noFill/>
+          <a:ln/>
+        </p:spPr>
+        <p:txBody>
+          <a:bodyPr wrap="square" lIns="0" tIns="0" rIns="0" bIns="0" rtlCol="0" anchor="ctr"/>
+          <a:lstStyle/>
+          <a:p>
+            <a:pPr indent="0" marL="0">
+              <a:buNone/>
+            </a:pPr>
+            <a:r>
+              <a:rPr lang="en-US" sz="1100" b="1" dirty="0">
+                <a:solidFill>
+                  <a:srgbClr val="5C6C87"/>
+                </a:solidFill>
+                <a:latin typeface="Calibri" pitchFamily="34" charset="0"/>
+                <a:ea typeface="Calibri" pitchFamily="34" charset="-122"/>
+                <a:cs typeface="Calibri" pitchFamily="34" charset="-120"/>
+              </a:rPr>
+              <a:t>Copertura del layer:  vetrina → conformità → transazione</a:t>
+            </a:r>
+            <a:endParaRPr lang="en-US" sz="1100" dirty="0"/>
+          </a:p>
+        </p:txBody>
+      </p:sp>
+      <p:sp>
+        <p:nvSpPr>
+          <p:cNvPr id="7" name="Shape 5"/>
+          <p:cNvSpPr/>
+          <p:nvPr/>
+        </p:nvSpPr>
+        <p:spPr>
+          <a:xfrm>
+            <a:off x="2468880" y="1965960"/>
+            <a:ext cx="4434840" cy="1737360"/>
           </a:xfrm>
           <a:prstGeom prst="roundRect">
             <a:avLst>
-              <a:gd name="adj" fmla="val 6667"/>
+              <a:gd name="adj" fmla="val 4211"/>
             </a:avLst>
           </a:prstGeom>
           <a:solidFill>
@@ -11090,155 +14804,240 @@
       </p:sp>
       <p:sp>
         <p:nvSpPr>
-          <p:cNvPr id="5" name="Shape 3"/>
-          <p:cNvSpPr/>
-          <p:nvPr/>
-        </p:nvSpPr>
-        <p:spPr>
-          <a:xfrm>
-            <a:off x="777240" y="2487168"/>
-            <a:ext cx="566928" cy="566928"/>
-          </a:xfrm>
-          <a:prstGeom prst="ellipse">
-            <a:avLst/>
-          </a:prstGeom>
-          <a:solidFill>
-            <a:srgbClr val="C0563C"/>
-          </a:solidFill>
-          <a:ln/>
-        </p:spPr>
-      </p:sp>
-      <p:sp>
-        <p:nvSpPr>
-          <p:cNvPr id="6" name="Text 4"/>
-          <p:cNvSpPr/>
-          <p:nvPr/>
-        </p:nvSpPr>
-        <p:spPr>
-          <a:xfrm>
-            <a:off x="777240" y="2487168"/>
-            <a:ext cx="566928" cy="566928"/>
-          </a:xfrm>
-          <a:prstGeom prst="rect">
-            <a:avLst/>
-          </a:prstGeom>
-          <a:noFill/>
-          <a:ln/>
-        </p:spPr>
-        <p:txBody>
-          <a:bodyPr wrap="square" lIns="0" tIns="0" rIns="0" bIns="0" rtlCol="0" anchor="ctr"/>
-          <a:lstStyle/>
-          <a:p>
-            <a:pPr algn="ctr" indent="0" marL="0">
-              <a:buNone/>
-            </a:pPr>
-            <a:r>
-              <a:rPr lang="en-US" sz="1800" b="1" dirty="0">
-                <a:solidFill>
-                  <a:srgbClr val="FFFFFF"/>
+          <p:cNvPr id="8" name="Text 6"/>
+          <p:cNvSpPr/>
+          <p:nvPr/>
+        </p:nvSpPr>
+        <p:spPr>
+          <a:xfrm>
+            <a:off x="2670048" y="2112264"/>
+            <a:ext cx="4069080" cy="502920"/>
+          </a:xfrm>
+          <a:prstGeom prst="rect">
+            <a:avLst/>
+          </a:prstGeom>
+          <a:noFill/>
+          <a:ln/>
+        </p:spPr>
+        <p:txBody>
+          <a:bodyPr wrap="square" lIns="0" tIns="0" rIns="0" bIns="0" rtlCol="0" anchor="ctr"/>
+          <a:lstStyle/>
+          <a:p>
+            <a:pPr indent="0" marL="0">
+              <a:buNone/>
+            </a:pPr>
+            <a:r>
+              <a:rPr lang="en-US" sz="1250" b="1" dirty="0">
+                <a:solidFill>
+                  <a:srgbClr val="C0563C"/>
                 </a:solidFill>
                 <a:latin typeface="Cambria" pitchFamily="34" charset="0"/>
                 <a:ea typeface="Cambria" pitchFamily="34" charset="-122"/>
                 <a:cs typeface="Cambria" pitchFamily="34" charset="-120"/>
               </a:rPr>
-              <a:t>1</a:t>
-            </a:r>
-            <a:endParaRPr lang="en-US" sz="1800" dirty="0"/>
-          </a:p>
-        </p:txBody>
-      </p:sp>
-      <p:sp>
-        <p:nvSpPr>
-          <p:cNvPr id="7" name="Text 5"/>
-          <p:cNvSpPr/>
-          <p:nvPr/>
-        </p:nvSpPr>
-        <p:spPr>
-          <a:xfrm>
-            <a:off x="1600200" y="2331720"/>
-            <a:ext cx="4114800" cy="868680"/>
-          </a:xfrm>
-          <a:prstGeom prst="rect">
-            <a:avLst/>
-          </a:prstGeom>
-          <a:noFill/>
-          <a:ln/>
-        </p:spPr>
-        <p:txBody>
-          <a:bodyPr wrap="square" lIns="0" tIns="0" rIns="0" bIns="0" rtlCol="0" anchor="ctr"/>
-          <a:lstStyle/>
-          <a:p>
-            <a:pPr indent="0" marL="0">
-              <a:buNone/>
-            </a:pPr>
-            <a:r>
-              <a:rPr lang="en-US" sz="1800" b="1" dirty="0">
-                <a:solidFill>
-                  <a:srgbClr val="16233B"/>
+              <a:t>Valutazione AI, solo il prezzo</a:t>
+            </a:r>
+            <a:endParaRPr lang="en-US" sz="1250" dirty="0"/>
+          </a:p>
+        </p:txBody>
+      </p:sp>
+      <p:sp>
+        <p:nvSpPr>
+          <p:cNvPr id="9" name="Text 7"/>
+          <p:cNvSpPr/>
+          <p:nvPr/>
+        </p:nvSpPr>
+        <p:spPr>
+          <a:xfrm>
+            <a:off x="2670048" y="2651760"/>
+            <a:ext cx="4069080" cy="914400"/>
+          </a:xfrm>
+          <a:prstGeom prst="rect">
+            <a:avLst/>
+          </a:prstGeom>
+          <a:noFill/>
+          <a:ln/>
+        </p:spPr>
+        <p:txBody>
+          <a:bodyPr wrap="square" lIns="0" tIns="0" rIns="0" bIns="0" rtlCol="0" anchor="ctr"/>
+          <a:lstStyle/>
+          <a:p>
+            <a:pPr indent="0" marL="0">
+              <a:buNone/>
+            </a:pPr>
+            <a:r>
+              <a:rPr lang="en-US" sz="1200" dirty="0">
+                <a:solidFill>
+                  <a:srgbClr val="5C6C87"/>
+                </a:solidFill>
+                <a:latin typeface="Calibri" pitchFamily="34" charset="0"/>
+                <a:ea typeface="Calibri" pitchFamily="34" charset="-122"/>
+                <a:cs typeface="Calibri" pitchFamily="34" charset="-120"/>
+              </a:rPr>
+              <a:t>Reopla / Sprengnetter · CRIF RES · Nomisma · PriceHubble</a:t>
+            </a:r>
+            <a:endParaRPr lang="en-US" sz="1200" dirty="0"/>
+          </a:p>
+        </p:txBody>
+      </p:sp>
+      <p:sp>
+        <p:nvSpPr>
+          <p:cNvPr id="10" name="Shape 8"/>
+          <p:cNvSpPr/>
+          <p:nvPr/>
+        </p:nvSpPr>
+        <p:spPr>
+          <a:xfrm>
+            <a:off x="7040880" y="1965960"/>
+            <a:ext cx="4434840" cy="1737360"/>
+          </a:xfrm>
+          <a:prstGeom prst="roundRect">
+            <a:avLst>
+              <a:gd name="adj" fmla="val 4211"/>
+            </a:avLst>
+          </a:prstGeom>
+          <a:solidFill>
+            <a:srgbClr val="0E1E38"/>
+          </a:solidFill>
+          <a:ln w="12700">
+            <a:solidFill>
+              <a:srgbClr val="0E1E38"/>
+            </a:solidFill>
+            <a:prstDash val="solid"/>
+          </a:ln>
+        </p:spPr>
+      </p:sp>
+      <p:sp>
+        <p:nvSpPr>
+          <p:cNvPr id="11" name="Text 9"/>
+          <p:cNvSpPr/>
+          <p:nvPr/>
+        </p:nvSpPr>
+        <p:spPr>
+          <a:xfrm>
+            <a:off x="7242048" y="2112264"/>
+            <a:ext cx="4069080" cy="502920"/>
+          </a:xfrm>
+          <a:prstGeom prst="rect">
+            <a:avLst/>
+          </a:prstGeom>
+          <a:noFill/>
+          <a:ln/>
+        </p:spPr>
+        <p:txBody>
+          <a:bodyPr wrap="square" lIns="0" tIns="0" rIns="0" bIns="0" rtlCol="0" anchor="ctr"/>
+          <a:lstStyle/>
+          <a:p>
+            <a:pPr indent="0" marL="0">
+              <a:buNone/>
+            </a:pPr>
+            <a:r>
+              <a:rPr lang="en-US" sz="1250" b="1" dirty="0">
+                <a:solidFill>
+                  <a:srgbClr val="E8A33D"/>
                 </a:solidFill>
                 <a:latin typeface="Cambria" pitchFamily="34" charset="0"/>
                 <a:ea typeface="Cambria" pitchFamily="34" charset="-122"/>
                 <a:cs typeface="Cambria" pitchFamily="34" charset="-120"/>
               </a:rPr>
-              <a:t>Direttiva UE “Case Green”</a:t>
-            </a:r>
-            <a:endParaRPr lang="en-US" sz="1800" dirty="0"/>
-          </a:p>
-        </p:txBody>
-      </p:sp>
-      <p:sp>
-        <p:nvSpPr>
-          <p:cNvPr id="8" name="Text 6"/>
-          <p:cNvSpPr/>
-          <p:nvPr/>
-        </p:nvSpPr>
-        <p:spPr>
-          <a:xfrm>
-            <a:off x="5806440" y="2313432"/>
-            <a:ext cx="5669280" cy="914400"/>
-          </a:xfrm>
-          <a:prstGeom prst="rect">
-            <a:avLst/>
-          </a:prstGeom>
-          <a:noFill/>
-          <a:ln/>
-        </p:spPr>
-        <p:txBody>
-          <a:bodyPr wrap="square" lIns="0" tIns="0" rIns="0" bIns="0" rtlCol="0" anchor="ctr"/>
-          <a:lstStyle/>
-          <a:p>
-            <a:pPr indent="0" marL="0">
-              <a:buNone/>
-            </a:pPr>
-            <a:r>
-              <a:rPr lang="en-US" sz="1350" dirty="0">
-                <a:solidFill>
-                  <a:srgbClr val="5C6C87"/>
-                </a:solidFill>
-                <a:latin typeface="Calibri" pitchFamily="34" charset="0"/>
-                <a:ea typeface="Calibri" pitchFamily="34" charset="-122"/>
-                <a:cs typeface="Calibri" pitchFamily="34" charset="-120"/>
-              </a:rPr>
-              <a:t>La EPBD (recepimento entro maggio 2026) impone l'adeguamento di ~500.000 abitazioni/anno: ~€85 mld di investimenti entro il 2030. Domanda forzata e finanziabile.</a:t>
-            </a:r>
-            <a:endParaRPr lang="en-US" sz="1350" dirty="0"/>
-          </a:p>
-        </p:txBody>
-      </p:sp>
-      <p:sp>
-        <p:nvSpPr>
-          <p:cNvPr id="9" name="Shape 7"/>
-          <p:cNvSpPr/>
-          <p:nvPr/>
-        </p:nvSpPr>
-        <p:spPr>
-          <a:xfrm>
-            <a:off x="502920" y="3520440"/>
-            <a:ext cx="11155680" cy="1234440"/>
+              <a:t>Conformità + transazione · AI-native</a:t>
+            </a:r>
+            <a:endParaRPr lang="en-US" sz="1250" dirty="0"/>
+          </a:p>
+        </p:txBody>
+      </p:sp>
+      <p:sp>
+        <p:nvSpPr>
+          <p:cNvPr id="12" name="Text 10"/>
+          <p:cNvSpPr/>
+          <p:nvPr/>
+        </p:nvSpPr>
+        <p:spPr>
+          <a:xfrm>
+            <a:off x="7242048" y="2679192"/>
+            <a:ext cx="4069080" cy="457200"/>
+          </a:xfrm>
+          <a:prstGeom prst="rect">
+            <a:avLst/>
+          </a:prstGeom>
+          <a:noFill/>
+          <a:ln/>
+        </p:spPr>
+        <p:txBody>
+          <a:bodyPr wrap="square" lIns="0" tIns="0" rIns="0" bIns="0" rtlCol="0" anchor="ctr"/>
+          <a:lstStyle/>
+          <a:p>
+            <a:pPr indent="0" marL="0">
+              <a:buNone/>
+            </a:pPr>
+            <a:r>
+              <a:rPr lang="en-US" sz="2400" b="1" dirty="0">
+                <a:solidFill>
+                  <a:srgbClr val="E8A33D"/>
+                </a:solidFill>
+                <a:latin typeface="Cambria" pitchFamily="34" charset="0"/>
+                <a:ea typeface="Cambria" pitchFamily="34" charset="-122"/>
+                <a:cs typeface="Cambria" pitchFamily="34" charset="-120"/>
+              </a:rPr>
+              <a:t>CONFORME</a:t>
+            </a:r>
+            <a:endParaRPr lang="en-US" sz="2400" dirty="0"/>
+          </a:p>
+        </p:txBody>
+      </p:sp>
+      <p:sp>
+        <p:nvSpPr>
+          <p:cNvPr id="13" name="Text 11"/>
+          <p:cNvSpPr/>
+          <p:nvPr/>
+        </p:nvSpPr>
+        <p:spPr>
+          <a:xfrm>
+            <a:off x="7242048" y="3227832"/>
+            <a:ext cx="4069080" cy="365760"/>
+          </a:xfrm>
+          <a:prstGeom prst="rect">
+            <a:avLst/>
+          </a:prstGeom>
+          <a:noFill/>
+          <a:ln/>
+        </p:spPr>
+        <p:txBody>
+          <a:bodyPr wrap="square" lIns="0" tIns="0" rIns="0" bIns="0" rtlCol="0" anchor="ctr"/>
+          <a:lstStyle/>
+          <a:p>
+            <a:pPr indent="0" marL="0">
+              <a:buNone/>
+            </a:pPr>
+            <a:r>
+              <a:rPr lang="en-US" sz="1050" i="1" dirty="0">
+                <a:solidFill>
+                  <a:srgbClr val="9DB0CC"/>
+                </a:solidFill>
+                <a:latin typeface="Calibri" pitchFamily="34" charset="0"/>
+                <a:ea typeface="Calibri" pitchFamily="34" charset="-122"/>
+                <a:cs typeface="Calibri" pitchFamily="34" charset="-120"/>
+              </a:rPr>
+              <a:t>Orbital (UK) · non opera in Italia</a:t>
+            </a:r>
+            <a:endParaRPr lang="en-US" sz="1050" dirty="0"/>
+          </a:p>
+        </p:txBody>
+      </p:sp>
+      <p:sp>
+        <p:nvSpPr>
+          <p:cNvPr id="14" name="Shape 12"/>
+          <p:cNvSpPr/>
+          <p:nvPr/>
+        </p:nvSpPr>
+        <p:spPr>
+          <a:xfrm>
+            <a:off x="2468880" y="3840480"/>
+            <a:ext cx="4434840" cy="1737360"/>
           </a:xfrm>
           <a:prstGeom prst="roundRect">
             <a:avLst>
-              <a:gd name="adj" fmla="val 6667"/>
+              <a:gd name="adj" fmla="val 4211"/>
             </a:avLst>
           </a:prstGeom>
           <a:solidFill>
@@ -11254,128 +15053,69 @@
       </p:sp>
       <p:sp>
         <p:nvSpPr>
-          <p:cNvPr id="10" name="Shape 8"/>
-          <p:cNvSpPr/>
-          <p:nvPr/>
-        </p:nvSpPr>
-        <p:spPr>
-          <a:xfrm>
-            <a:off x="777240" y="3858768"/>
-            <a:ext cx="566928" cy="566928"/>
-          </a:xfrm>
-          <a:prstGeom prst="ellipse">
-            <a:avLst/>
-          </a:prstGeom>
-          <a:solidFill>
-            <a:srgbClr val="0E1E38"/>
-          </a:solidFill>
-          <a:ln/>
-        </p:spPr>
-      </p:sp>
-      <p:sp>
-        <p:nvSpPr>
-          <p:cNvPr id="11" name="Text 9"/>
-          <p:cNvSpPr/>
-          <p:nvPr/>
-        </p:nvSpPr>
-        <p:spPr>
-          <a:xfrm>
-            <a:off x="777240" y="3858768"/>
-            <a:ext cx="566928" cy="566928"/>
-          </a:xfrm>
-          <a:prstGeom prst="rect">
-            <a:avLst/>
-          </a:prstGeom>
-          <a:noFill/>
-          <a:ln/>
-        </p:spPr>
-        <p:txBody>
-          <a:bodyPr wrap="square" lIns="0" tIns="0" rIns="0" bIns="0" rtlCol="0" anchor="ctr"/>
-          <a:lstStyle/>
-          <a:p>
-            <a:pPr algn="ctr" indent="0" marL="0">
-              <a:buNone/>
-            </a:pPr>
-            <a:r>
-              <a:rPr lang="en-US" sz="1800" b="1" dirty="0">
-                <a:solidFill>
-                  <a:srgbClr val="FFFFFF"/>
+          <p:cNvPr id="15" name="Text 13"/>
+          <p:cNvSpPr/>
+          <p:nvPr/>
+        </p:nvSpPr>
+        <p:spPr>
+          <a:xfrm>
+            <a:off x="2670048" y="3986784"/>
+            <a:ext cx="4069080" cy="502920"/>
+          </a:xfrm>
+          <a:prstGeom prst="rect">
+            <a:avLst/>
+          </a:prstGeom>
+          <a:noFill/>
+          <a:ln/>
+        </p:spPr>
+        <p:txBody>
+          <a:bodyPr wrap="square" lIns="0" tIns="0" rIns="0" bIns="0" rtlCol="0" anchor="ctr"/>
+          <a:lstStyle/>
+          <a:p>
+            <a:pPr indent="0" marL="0">
+              <a:buNone/>
+            </a:pPr>
+            <a:r>
+              <a:rPr lang="en-US" sz="1250" b="1" dirty="0">
+                <a:solidFill>
+                  <a:srgbClr val="C0563C"/>
                 </a:solidFill>
                 <a:latin typeface="Cambria" pitchFamily="34" charset="0"/>
                 <a:ea typeface="Cambria" pitchFamily="34" charset="-122"/>
                 <a:cs typeface="Cambria" pitchFamily="34" charset="-120"/>
               </a:rPr>
-              <a:t>2</a:t>
-            </a:r>
-            <a:endParaRPr lang="en-US" sz="1800" dirty="0"/>
-          </a:p>
-        </p:txBody>
-      </p:sp>
-      <p:sp>
-        <p:nvSpPr>
-          <p:cNvPr id="12" name="Text 10"/>
-          <p:cNvSpPr/>
-          <p:nvPr/>
-        </p:nvSpPr>
-        <p:spPr>
-          <a:xfrm>
-            <a:off x="1600200" y="3703320"/>
-            <a:ext cx="4114800" cy="868680"/>
-          </a:xfrm>
-          <a:prstGeom prst="rect">
-            <a:avLst/>
-          </a:prstGeom>
-          <a:noFill/>
-          <a:ln/>
-        </p:spPr>
-        <p:txBody>
-          <a:bodyPr wrap="square" lIns="0" tIns="0" rIns="0" bIns="0" rtlCol="0" anchor="ctr"/>
-          <a:lstStyle/>
-          <a:p>
-            <a:pPr indent="0" marL="0">
-              <a:buNone/>
-            </a:pPr>
-            <a:r>
-              <a:rPr lang="en-US" sz="1800" b="1" dirty="0">
-                <a:solidFill>
-                  <a:srgbClr val="16233B"/>
-                </a:solidFill>
-                <a:latin typeface="Cambria" pitchFamily="34" charset="0"/>
-                <a:ea typeface="Cambria" pitchFamily="34" charset="-122"/>
-                <a:cs typeface="Cambria" pitchFamily="34" charset="-120"/>
-              </a:rPr>
-              <a:t>Agenti AI finalmente maturi</a:t>
-            </a:r>
-            <a:endParaRPr lang="en-US" sz="1800" dirty="0"/>
-          </a:p>
-        </p:txBody>
-      </p:sp>
-      <p:sp>
-        <p:nvSpPr>
-          <p:cNvPr id="13" name="Text 11"/>
-          <p:cNvSpPr/>
-          <p:nvPr/>
-        </p:nvSpPr>
-        <p:spPr>
-          <a:xfrm>
-            <a:off x="5806440" y="3685032"/>
-            <a:ext cx="5669280" cy="914400"/>
-          </a:xfrm>
-          <a:prstGeom prst="rect">
-            <a:avLst/>
-          </a:prstGeom>
-          <a:noFill/>
-          <a:ln/>
-        </p:spPr>
-        <p:txBody>
-          <a:bodyPr wrap="square" lIns="0" tIns="0" rIns="0" bIns="0" rtlCol="0" anchor="ctr"/>
-          <a:lstStyle/>
-          <a:p>
-            <a:pPr indent="0" marL="0">
-              <a:buNone/>
-            </a:pPr>
-            <a:r>
-              <a:rPr lang="en-US" sz="1350" dirty="0">
+              <a:t>Vetrina &amp; generazione lead</a:t>
+            </a:r>
+            <a:endParaRPr lang="en-US" sz="1250" dirty="0"/>
+          </a:p>
+        </p:txBody>
+      </p:sp>
+      <p:sp>
+        <p:nvSpPr>
+          <p:cNvPr id="16" name="Text 14"/>
+          <p:cNvSpPr/>
+          <p:nvPr/>
+        </p:nvSpPr>
+        <p:spPr>
+          <a:xfrm>
+            <a:off x="2670048" y="4526280"/>
+            <a:ext cx="4069080" cy="914400"/>
+          </a:xfrm>
+          <a:prstGeom prst="rect">
+            <a:avLst/>
+          </a:prstGeom>
+          <a:noFill/>
+          <a:ln/>
+        </p:spPr>
+        <p:txBody>
+          <a:bodyPr wrap="square" lIns="0" tIns="0" rIns="0" bIns="0" rtlCol="0" anchor="ctr"/>
+          <a:lstStyle/>
+          <a:p>
+            <a:pPr indent="0" marL="0">
+              <a:buNone/>
+            </a:pPr>
+            <a:r>
+              <a:rPr lang="en-US" sz="1200" dirty="0">
                 <a:solidFill>
                   <a:srgbClr val="5C6C87"/>
                 </a:solidFill>
@@ -11383,26 +15123,26 @@
                 <a:ea typeface="Calibri" pitchFamily="34" charset="-122"/>
                 <a:cs typeface="Calibri" pitchFamily="34" charset="-120"/>
               </a:rPr>
-              <a:t>I compiti document-heavy e rule-heavy — leggere visure, incrociare planimetrie, verificare regole — sono ora automatizzabili con affidabilità.</a:t>
-            </a:r>
-            <a:endParaRPr lang="en-US" sz="1350" dirty="0"/>
-          </a:p>
-        </p:txBody>
-      </p:sp>
-      <p:sp>
-        <p:nvSpPr>
-          <p:cNvPr id="14" name="Shape 12"/>
-          <p:cNvSpPr/>
-          <p:nvPr/>
-        </p:nvSpPr>
-        <p:spPr>
-          <a:xfrm>
-            <a:off x="502920" y="4892040"/>
-            <a:ext cx="11155680" cy="1234440"/>
+              <a:t>Immobiliare.it · Idealista · Casa.it · Wikicasa</a:t>
+            </a:r>
+            <a:endParaRPr lang="en-US" sz="1200" dirty="0"/>
+          </a:p>
+        </p:txBody>
+      </p:sp>
+      <p:sp>
+        <p:nvSpPr>
+          <p:cNvPr id="17" name="Shape 15"/>
+          <p:cNvSpPr/>
+          <p:nvPr/>
+        </p:nvSpPr>
+        <p:spPr>
+          <a:xfrm>
+            <a:off x="7040880" y="3840480"/>
+            <a:ext cx="4434840" cy="1737360"/>
           </a:xfrm>
           <a:prstGeom prst="roundRect">
             <a:avLst>
-              <a:gd name="adj" fmla="val 6667"/>
+              <a:gd name="adj" fmla="val 4211"/>
             </a:avLst>
           </a:prstGeom>
           <a:solidFill>
@@ -11418,128 +15158,69 @@
       </p:sp>
       <p:sp>
         <p:nvSpPr>
-          <p:cNvPr id="15" name="Shape 13"/>
-          <p:cNvSpPr/>
-          <p:nvPr/>
-        </p:nvSpPr>
-        <p:spPr>
-          <a:xfrm>
-            <a:off x="777240" y="5230368"/>
-            <a:ext cx="566928" cy="566928"/>
-          </a:xfrm>
-          <a:prstGeom prst="ellipse">
-            <a:avLst/>
-          </a:prstGeom>
-          <a:solidFill>
-            <a:srgbClr val="E8A33D"/>
-          </a:solidFill>
-          <a:ln/>
-        </p:spPr>
-      </p:sp>
-      <p:sp>
-        <p:nvSpPr>
-          <p:cNvPr id="16" name="Text 14"/>
-          <p:cNvSpPr/>
-          <p:nvPr/>
-        </p:nvSpPr>
-        <p:spPr>
-          <a:xfrm>
-            <a:off x="777240" y="5230368"/>
-            <a:ext cx="566928" cy="566928"/>
-          </a:xfrm>
-          <a:prstGeom prst="rect">
-            <a:avLst/>
-          </a:prstGeom>
-          <a:noFill/>
-          <a:ln/>
-        </p:spPr>
-        <p:txBody>
-          <a:bodyPr wrap="square" lIns="0" tIns="0" rIns="0" bIns="0" rtlCol="0" anchor="ctr"/>
-          <a:lstStyle/>
-          <a:p>
-            <a:pPr algn="ctr" indent="0" marL="0">
-              <a:buNone/>
-            </a:pPr>
-            <a:r>
-              <a:rPr lang="en-US" sz="1800" b="1" dirty="0">
-                <a:solidFill>
-                  <a:srgbClr val="0E1E38"/>
+          <p:cNvPr id="18" name="Text 16"/>
+          <p:cNvSpPr/>
+          <p:nvPr/>
+        </p:nvSpPr>
+        <p:spPr>
+          <a:xfrm>
+            <a:off x="7242048" y="3986784"/>
+            <a:ext cx="4069080" cy="502920"/>
+          </a:xfrm>
+          <a:prstGeom prst="rect">
+            <a:avLst/>
+          </a:prstGeom>
+          <a:noFill/>
+          <a:ln/>
+        </p:spPr>
+        <p:txBody>
+          <a:bodyPr wrap="square" lIns="0" tIns="0" rIns="0" bIns="0" rtlCol="0" anchor="ctr"/>
+          <a:lstStyle/>
+          <a:p>
+            <a:pPr indent="0" marL="0">
+              <a:buNone/>
+            </a:pPr>
+            <a:r>
+              <a:rPr lang="en-US" sz="1250" b="1" dirty="0">
+                <a:solidFill>
+                  <a:srgbClr val="C0563C"/>
                 </a:solidFill>
                 <a:latin typeface="Cambria" pitchFamily="34" charset="0"/>
                 <a:ea typeface="Cambria" pitchFamily="34" charset="-122"/>
                 <a:cs typeface="Cambria" pitchFamily="34" charset="-120"/>
               </a:rPr>
-              <a:t>3</a:t>
-            </a:r>
-            <a:endParaRPr lang="en-US" sz="1800" dirty="0"/>
-          </a:p>
-        </p:txBody>
-      </p:sp>
-      <p:sp>
-        <p:nvSpPr>
-          <p:cNvPr id="17" name="Text 15"/>
-          <p:cNvSpPr/>
-          <p:nvPr/>
-        </p:nvSpPr>
-        <p:spPr>
-          <a:xfrm>
-            <a:off x="1600200" y="5074920"/>
-            <a:ext cx="4114800" cy="868680"/>
-          </a:xfrm>
-          <a:prstGeom prst="rect">
-            <a:avLst/>
-          </a:prstGeom>
-          <a:noFill/>
-          <a:ln/>
-        </p:spPr>
-        <p:txBody>
-          <a:bodyPr wrap="square" lIns="0" tIns="0" rIns="0" bIns="0" rtlCol="0" anchor="ctr"/>
-          <a:lstStyle/>
-          <a:p>
-            <a:pPr indent="0" marL="0">
-              <a:buNone/>
-            </a:pPr>
-            <a:r>
-              <a:rPr lang="en-US" sz="1800" b="1" dirty="0">
-                <a:solidFill>
-                  <a:srgbClr val="16233B"/>
-                </a:solidFill>
-                <a:latin typeface="Cambria" pitchFamily="34" charset="0"/>
-                <a:ea typeface="Cambria" pitchFamily="34" charset="-122"/>
-                <a:cs typeface="Cambria" pitchFamily="34" charset="-120"/>
-              </a:rPr>
-              <a:t>Eredità del Superbonus</a:t>
-            </a:r>
-            <a:endParaRPr lang="en-US" sz="1800" dirty="0"/>
-          </a:p>
-        </p:txBody>
-      </p:sp>
-      <p:sp>
-        <p:nvSpPr>
-          <p:cNvPr id="18" name="Text 16"/>
-          <p:cNvSpPr/>
-          <p:nvPr/>
-        </p:nvSpPr>
-        <p:spPr>
-          <a:xfrm>
-            <a:off x="5806440" y="5056632"/>
-            <a:ext cx="5669280" cy="914400"/>
-          </a:xfrm>
-          <a:prstGeom prst="rect">
-            <a:avLst/>
-          </a:prstGeom>
-          <a:noFill/>
-          <a:ln/>
-        </p:spPr>
-        <p:txBody>
-          <a:bodyPr wrap="square" lIns="0" tIns="0" rIns="0" bIns="0" rtlCol="0" anchor="ctr"/>
-          <a:lstStyle/>
-          <a:p>
-            <a:pPr indent="0" marL="0">
-              <a:buNone/>
-            </a:pPr>
-            <a:r>
-              <a:rPr lang="en-US" sz="1350" dirty="0">
+              <a:t>Transazione manuale o capital-heavy</a:t>
+            </a:r>
+            <a:endParaRPr lang="en-US" sz="1250" dirty="0"/>
+          </a:p>
+        </p:txBody>
+      </p:sp>
+      <p:sp>
+        <p:nvSpPr>
+          <p:cNvPr id="19" name="Text 17"/>
+          <p:cNvSpPr/>
+          <p:nvPr/>
+        </p:nvSpPr>
+        <p:spPr>
+          <a:xfrm>
+            <a:off x="7242048" y="4526280"/>
+            <a:ext cx="4069080" cy="914400"/>
+          </a:xfrm>
+          <a:prstGeom prst="rect">
+            <a:avLst/>
+          </a:prstGeom>
+          <a:noFill/>
+          <a:ln/>
+        </p:spPr>
+        <p:txBody>
+          <a:bodyPr wrap="square" lIns="0" tIns="0" rIns="0" bIns="0" rtlCol="0" anchor="ctr"/>
+          <a:lstStyle/>
+          <a:p>
+            <a:pPr indent="0" marL="0">
+              <a:buNone/>
+            </a:pPr>
+            <a:r>
+              <a:rPr lang="en-US" sz="1200" dirty="0">
                 <a:solidFill>
                   <a:srgbClr val="5C6C87"/>
                 </a:solidFill>
@@ -11547,15 +15228,15 @@
                 <a:ea typeface="Calibri" pitchFamily="34" charset="-122"/>
                 <a:cs typeface="Calibri" pitchFamily="34" charset="-120"/>
               </a:rPr>
-              <a:t>Un ecosistema di dati, cantieri e pratiche edilizie mai visto prima, oggi disponibile per essere strutturato.</a:t>
-            </a:r>
-            <a:endParaRPr lang="en-US" sz="1350" dirty="0"/>
-          </a:p>
-        </p:txBody>
-      </p:sp>
-      <p:sp>
-        <p:nvSpPr>
-          <p:cNvPr id="19" name="Text 17"/>
+              <a:t>iBuyer Casavo · studi di DD (geometri/architetti) · notai</a:t>
+            </a:r>
+            <a:endParaRPr lang="en-US" sz="1200" dirty="0"/>
+          </a:p>
+        </p:txBody>
+      </p:sp>
+      <p:sp>
+        <p:nvSpPr>
+          <p:cNvPr id="20" name="Text 18"/>
           <p:cNvSpPr/>
           <p:nvPr/>
         </p:nvSpPr>
@@ -11594,7 +15275,7 @@
       </p:sp>
       <p:sp>
         <p:nvSpPr>
-          <p:cNvPr id="20" name="Text 18"/>
+          <p:cNvPr id="21" name="Text 19"/>
           <p:cNvSpPr/>
           <p:nvPr/>
         </p:nvSpPr>

--- a/proptech-deck/Conforme_Pitch.pptx
+++ b/proptech-deck/Conforme_Pitch.pptx
@@ -2916,7 +2916,7 @@
                 <a:ea typeface="Calibri" pitchFamily="34" charset="-122"/>
                 <a:cs typeface="Calibri" pitchFamily="34" charset="-120"/>
               </a:rPr>
-              <a:t>Pitch per investitore  ·  Luca Martino · Skylabs</a:t>
+              <a:t>Pitch per investitore  ·  Luca Martino</a:t>
             </a:r>
             <a:endParaRPr lang="en-US" sz="1300" dirty="0"/>
           </a:p>
@@ -6422,7 +6422,7 @@
                 <a:ea typeface="Cambria" pitchFamily="34" charset="-122"/>
                 <a:cs typeface="Cambria" pitchFamily="34" charset="-120"/>
               </a:rPr>
-              <a:t>Universe</a:t>
+              <a:t>Piattaforma agentica pronta</a:t>
             </a:r>
             <a:endParaRPr lang="en-US" sz="1800" dirty="0"/>
           </a:p>
@@ -6461,7 +6461,7 @@
                 <a:ea typeface="Calibri" pitchFamily="34" charset="-122"/>
                 <a:cs typeface="Calibri" pitchFamily="34" charset="-120"/>
               </a:rPr>
-              <a:t>La piattaforma agentica di Skylabs: l'infrastruttura AI è già in produzione, non da inventare.</a:t>
+              <a:t>L'infrastruttura AI agentica è già in produzione: non la costruiamo da zero.</a:t>
             </a:r>
             <a:endParaRPr lang="en-US" sz="1300" dirty="0"/>
           </a:p>
@@ -6527,7 +6527,7 @@
                 <a:ea typeface="Cambria" pitchFamily="34" charset="-122"/>
                 <a:cs typeface="Cambria" pitchFamily="34" charset="-120"/>
               </a:rPr>
-              <a:t>Skylabs / SAE</a:t>
+              <a:t>Competenza AI enterprise</a:t>
             </a:r>
             <a:endParaRPr lang="en-US" sz="1800" dirty="0"/>
           </a:p>
@@ -6566,7 +6566,7 @@
                 <a:ea typeface="Calibri" pitchFamily="34" charset="-122"/>
                 <a:cs typeface="Calibri" pitchFamily="34" charset="-120"/>
               </a:rPr>
-              <a:t>Competenza consolidata di AI enterprise e integrazione su processi complessi.</a:t>
+              <a:t>Esperienza consolidata di AI enterprise e integrazione su processi complessi.</a:t>
             </a:r>
             <a:endParaRPr lang="en-US" sz="1300" dirty="0"/>
           </a:p>
@@ -6903,7 +6903,7 @@
                 <a:ea typeface="Cambria" pitchFamily="34" charset="-122"/>
                 <a:cs typeface="Cambria" pitchFamily="34" charset="-120"/>
               </a:rPr>
-              <a:t>Universe · piattaforma agentica</a:t>
+              <a:t>Piattaforma agentica in produzione</a:t>
             </a:r>
             <a:endParaRPr lang="en-US" sz="1400" dirty="0"/>
           </a:p>
@@ -6969,7 +6969,7 @@
                 <a:ea typeface="Calibri" pitchFamily="34" charset="-122"/>
                 <a:cs typeface="Calibri" pitchFamily="34" charset="-120"/>
               </a:rPr>
-              <a:t>Skylabs / SAE · AI enterprise</a:t>
+              <a:t>Competenza AI enterprise</a:t>
             </a:r>
             <a:endParaRPr lang="en-US" sz="1300" dirty="0"/>
           </a:p>
@@ -8411,7 +8411,7 @@
                 <a:ea typeface="Calibri" pitchFamily="34" charset="-122"/>
                 <a:cs typeface="Calibri" pitchFamily="34" charset="-120"/>
               </a:rPr>
-              <a:t>Luca Martino  ·  Skylabs  ·  luca.martino@skylabs.it</a:t>
+              <a:t>Luca Martino</a:t>
             </a:r>
             <a:endParaRPr lang="en-US" sz="1300" dirty="0"/>
           </a:p>

--- a/proptech-deck/Conforme_Pitch.pptx
+++ b/proptech-deck/Conforme_Pitch.pptx
@@ -8496,7 +8496,7 @@
         </p:nvSpPr>
         <p:spPr>
           <a:xfrm>
-            <a:off x="502920" y="777240"/>
+            <a:off x="502920" y="749808"/>
             <a:ext cx="11155680" cy="822960"/>
           </a:xfrm>
           <a:prstGeom prst="rect">
@@ -8513,7 +8513,7 @@
               <a:buNone/>
             </a:pPr>
             <a:r>
-              <a:rPr lang="en-US" sz="3400" b="1" dirty="0">
+              <a:rPr lang="en-US" sz="3000" b="1" dirty="0">
                 <a:solidFill>
                   <a:srgbClr val="16233B"/>
                 </a:solidFill>
@@ -8521,9 +8521,9 @@
                 <a:ea typeface="Cambria" pitchFamily="34" charset="-122"/>
                 <a:cs typeface="Cambria" pitchFamily="34" charset="-120"/>
               </a:rPr>
-              <a:t>L'annuncio è risolto. La transazione è rotta.</a:t>
-            </a:r>
-            <a:endParaRPr lang="en-US" sz="3400" dirty="0"/>
+              <a:t>La vetrina è online. La transazione è analogica.</a:t>
+            </a:r>
+            <a:endParaRPr lang="en-US" sz="3000" dirty="0"/>
           </a:p>
         </p:txBody>
       </p:sp>
@@ -8535,7 +8535,7 @@
         </p:nvSpPr>
         <p:spPr>
           <a:xfrm>
-            <a:off x="502920" y="1600200"/>
+            <a:off x="502920" y="1783080"/>
             <a:ext cx="7498080" cy="822960"/>
           </a:xfrm>
           <a:prstGeom prst="rect">
@@ -8560,7 +8560,7 @@
                 <a:ea typeface="Calibri" pitchFamily="34" charset="-122"/>
                 <a:cs typeface="Calibri" pitchFamily="34" charset="-120"/>
               </a:rPr>
-              <a:t>Immobiliare.it e Idealista dominano la vetrina. Ma dietro l'annuncio, la compravendita in Italia è ancora lenta, opaca e analogica, e il collo di bottiglia è sempre lo stesso.</a:t>
+              <a:t>Immobiliare.it e Idealista dominano la vetrina. Ma dietro l'annuncio, la compravendita in Italia è ancora lenta, opaca e manuale, e il collo di bottiglia è sempre lo stesso.</a:t>
             </a:r>
             <a:endParaRPr lang="en-US" sz="1600" dirty="0"/>
           </a:p>
